--- a/labs/lab11/slides/slides.pptx
+++ b/labs/lab11/slides/slides.pptx
@@ -4,6 +4,9 @@
   <p:sldMasterIdLst>
     <p:sldMasterId id="2147483696" r:id="rId1"/>
   </p:sldMasterIdLst>
+  <p:notesMasterIdLst>
+    <p:notesMasterId r:id="rId19"/>
+  </p:notesMasterIdLst>
   <p:sldIdLst>
     <p:sldId id="256" r:id="rId2"/>
     <p:sldId id="257" r:id="rId3"/>
@@ -21,6 +24,7 @@
     <p:sldId id="269" r:id="rId15"/>
     <p:sldId id="270" r:id="rId16"/>
     <p:sldId id="271" r:id="rId17"/>
+    <p:sldId id="272" r:id="rId18"/>
   </p:sldIdLst>
   <p:sldSz cx="12192000" cy="6858000"/>
   <p:notesSz cx="6858000" cy="9144000"/>
@@ -127,6 +131,1677 @@
 </p:presentation>
 </file>
 
+<file path=ppt/notesMasters/notesMaster1.xml><?xml version="1.0" encoding="utf-8"?>
+<p:notesMaster xmlns:a="http://schemas.openxmlformats.org/drawingml/2006/main" xmlns:r="http://schemas.openxmlformats.org/officeDocument/2006/relationships" xmlns:p="http://schemas.openxmlformats.org/presentationml/2006/main">
+  <p:cSld>
+    <p:bg>
+      <p:bgRef idx="1001">
+        <a:schemeClr val="bg1"/>
+      </p:bgRef>
+    </p:bg>
+    <p:spTree>
+      <p:nvGrpSpPr>
+        <p:cNvPr id="1" name=""/>
+        <p:cNvGrpSpPr/>
+        <p:nvPr/>
+      </p:nvGrpSpPr>
+      <p:grpSpPr>
+        <a:xfrm>
+          <a:off x="0" y="0"/>
+          <a:ext cx="0" cy="0"/>
+          <a:chOff x="0" y="0"/>
+          <a:chExt cx="0" cy="0"/>
+        </a:xfrm>
+      </p:grpSpPr>
+      <p:sp>
+        <p:nvSpPr>
+          <p:cNvPr id="2" name="Header Placeholder 1"/>
+          <p:cNvSpPr>
+            <a:spLocks noGrp="1"/>
+          </p:cNvSpPr>
+          <p:nvPr>
+            <p:ph type="hdr" sz="quarter"/>
+          </p:nvPr>
+        </p:nvSpPr>
+        <p:spPr>
+          <a:xfrm>
+            <a:off x="0" y="0"/>
+            <a:ext cx="2971800" cy="458788"/>
+          </a:xfrm>
+          <a:prstGeom prst="rect">
+            <a:avLst/>
+          </a:prstGeom>
+        </p:spPr>
+        <p:txBody>
+          <a:bodyPr vert="horz" lIns="91440" tIns="45720" rIns="91440" bIns="45720" rtlCol="0"/>
+          <a:lstStyle>
+            <a:lvl1pPr algn="l">
+              <a:defRPr sz="1200"/>
+            </a:lvl1pPr>
+          </a:lstStyle>
+          <a:p>
+            <a:endParaRPr lang="en-US"/>
+          </a:p>
+        </p:txBody>
+      </p:sp>
+      <p:sp>
+        <p:nvSpPr>
+          <p:cNvPr id="3" name="Date Placeholder 2"/>
+          <p:cNvSpPr>
+            <a:spLocks noGrp="1"/>
+          </p:cNvSpPr>
+          <p:nvPr>
+            <p:ph type="dt" idx="1"/>
+          </p:nvPr>
+        </p:nvSpPr>
+        <p:spPr>
+          <a:xfrm>
+            <a:off x="3884613" y="0"/>
+            <a:ext cx="2971800" cy="458788"/>
+          </a:xfrm>
+          <a:prstGeom prst="rect">
+            <a:avLst/>
+          </a:prstGeom>
+        </p:spPr>
+        <p:txBody>
+          <a:bodyPr vert="horz" lIns="91440" tIns="45720" rIns="91440" bIns="45720" rtlCol="0"/>
+          <a:lstStyle>
+            <a:lvl1pPr algn="r">
+              <a:defRPr sz="1200"/>
+            </a:lvl1pPr>
+          </a:lstStyle>
+          <a:p>
+            <a:fld id="{0F9C1CCF-B725-44A7-AA57-5E433BD85C9F}" type="datetimeFigureOut">
+              <a:rPr lang="en-US" smtClean="0"/>
+              <a:t>1/2/22</a:t>
+            </a:fld>
+            <a:endParaRPr lang="en-US"/>
+          </a:p>
+        </p:txBody>
+      </p:sp>
+      <p:sp>
+        <p:nvSpPr>
+          <p:cNvPr id="4" name="Slide Image Placeholder 3"/>
+          <p:cNvSpPr>
+            <a:spLocks noGrp="1" noRot="1" noChangeAspect="1"/>
+          </p:cNvSpPr>
+          <p:nvPr>
+            <p:ph type="sldImg" idx="2"/>
+          </p:nvPr>
+        </p:nvSpPr>
+        <p:spPr>
+          <a:xfrm>
+            <a:off x="685800" y="1143000"/>
+            <a:ext cx="5486400" cy="3086100"/>
+          </a:xfrm>
+          <a:prstGeom prst="rect">
+            <a:avLst/>
+          </a:prstGeom>
+          <a:noFill/>
+          <a:ln w="12700">
+            <a:solidFill>
+              <a:prstClr val="black"/>
+            </a:solidFill>
+          </a:ln>
+        </p:spPr>
+        <p:txBody>
+          <a:bodyPr vert="horz" lIns="91440" tIns="45720" rIns="91440" bIns="45720" rtlCol="0" anchor="ctr"/>
+          <a:lstStyle/>
+          <a:p>
+            <a:endParaRPr lang="en-US"/>
+          </a:p>
+        </p:txBody>
+      </p:sp>
+      <p:sp>
+        <p:nvSpPr>
+          <p:cNvPr id="5" name="Notes Placeholder 4"/>
+          <p:cNvSpPr>
+            <a:spLocks noGrp="1"/>
+          </p:cNvSpPr>
+          <p:nvPr>
+            <p:ph type="body" sz="quarter" idx="3"/>
+          </p:nvPr>
+        </p:nvSpPr>
+        <p:spPr>
+          <a:xfrm>
+            <a:off x="685800" y="4400550"/>
+            <a:ext cx="5486400" cy="3600450"/>
+          </a:xfrm>
+          <a:prstGeom prst="rect">
+            <a:avLst/>
+          </a:prstGeom>
+        </p:spPr>
+        <p:txBody>
+          <a:bodyPr vert="horz" lIns="91440" tIns="45720" rIns="91440" bIns="45720" rtlCol="0"/>
+          <a:lstStyle/>
+          <a:p>
+            <a:pPr lvl="0"/>
+            <a:r>
+              <a:rPr lang="en-US"/>
+              <a:t>Click to edit Master text styles</a:t>
+            </a:r>
+          </a:p>
+          <a:p>
+            <a:pPr lvl="1"/>
+            <a:r>
+              <a:rPr lang="en-US"/>
+              <a:t>Second level</a:t>
+            </a:r>
+          </a:p>
+          <a:p>
+            <a:pPr lvl="2"/>
+            <a:r>
+              <a:rPr lang="en-US"/>
+              <a:t>Third level</a:t>
+            </a:r>
+          </a:p>
+          <a:p>
+            <a:pPr lvl="3"/>
+            <a:r>
+              <a:rPr lang="en-US"/>
+              <a:t>Fourth level</a:t>
+            </a:r>
+          </a:p>
+          <a:p>
+            <a:pPr lvl="4"/>
+            <a:r>
+              <a:rPr lang="en-US"/>
+              <a:t>Fifth level</a:t>
+            </a:r>
+          </a:p>
+        </p:txBody>
+      </p:sp>
+      <p:sp>
+        <p:nvSpPr>
+          <p:cNvPr id="6" name="Footer Placeholder 5"/>
+          <p:cNvSpPr>
+            <a:spLocks noGrp="1"/>
+          </p:cNvSpPr>
+          <p:nvPr>
+            <p:ph type="ftr" sz="quarter" idx="4"/>
+          </p:nvPr>
+        </p:nvSpPr>
+        <p:spPr>
+          <a:xfrm>
+            <a:off x="0" y="8685213"/>
+            <a:ext cx="2971800" cy="458787"/>
+          </a:xfrm>
+          <a:prstGeom prst="rect">
+            <a:avLst/>
+          </a:prstGeom>
+        </p:spPr>
+        <p:txBody>
+          <a:bodyPr vert="horz" lIns="91440" tIns="45720" rIns="91440" bIns="45720" rtlCol="0" anchor="b"/>
+          <a:lstStyle>
+            <a:lvl1pPr algn="l">
+              <a:defRPr sz="1200"/>
+            </a:lvl1pPr>
+          </a:lstStyle>
+          <a:p>
+            <a:endParaRPr lang="en-US"/>
+          </a:p>
+        </p:txBody>
+      </p:sp>
+      <p:sp>
+        <p:nvSpPr>
+          <p:cNvPr id="7" name="Slide Number Placeholder 6"/>
+          <p:cNvSpPr>
+            <a:spLocks noGrp="1"/>
+          </p:cNvSpPr>
+          <p:nvPr>
+            <p:ph type="sldNum" sz="quarter" idx="5"/>
+          </p:nvPr>
+        </p:nvSpPr>
+        <p:spPr>
+          <a:xfrm>
+            <a:off x="3884613" y="8685213"/>
+            <a:ext cx="2971800" cy="458787"/>
+          </a:xfrm>
+          <a:prstGeom prst="rect">
+            <a:avLst/>
+          </a:prstGeom>
+        </p:spPr>
+        <p:txBody>
+          <a:bodyPr vert="horz" lIns="91440" tIns="45720" rIns="91440" bIns="45720" rtlCol="0" anchor="b"/>
+          <a:lstStyle>
+            <a:lvl1pPr algn="r">
+              <a:defRPr sz="1200"/>
+            </a:lvl1pPr>
+          </a:lstStyle>
+          <a:p>
+            <a:fld id="{18BDFEC3-8487-43E8-A154-7C12CBC1FFF2}" type="slidenum">
+              <a:rPr lang="en-US" smtClean="0"/>
+              <a:t>‹#›</a:t>
+            </a:fld>
+            <a:endParaRPr lang="en-US"/>
+          </a:p>
+        </p:txBody>
+      </p:sp>
+    </p:spTree>
+    <p:extLst>
+      <p:ext uri="{BB962C8B-B14F-4D97-AF65-F5344CB8AC3E}">
+        <p14:creationId xmlns:p14="http://schemas.microsoft.com/office/powerpoint/2010/main" val="3782709779"/>
+      </p:ext>
+    </p:extLst>
+  </p:cSld>
+  <p:clrMap bg1="lt1" tx1="dk1" bg2="lt2" tx2="dk2" accent1="accent1" accent2="accent2" accent3="accent3" accent4="accent4" accent5="accent5" accent6="accent6" hlink="hlink" folHlink="folHlink"/>
+  <p:notesStyle>
+    <a:lvl1pPr marL="0" algn="l" defTabSz="914400" rtl="0" eaLnBrk="1" latinLnBrk="0" hangingPunct="1">
+      <a:defRPr sz="1200" kern="1200">
+        <a:solidFill>
+          <a:schemeClr val="tx1"/>
+        </a:solidFill>
+        <a:latin typeface="+mn-lt"/>
+        <a:ea typeface="+mn-ea"/>
+        <a:cs typeface="+mn-cs"/>
+      </a:defRPr>
+    </a:lvl1pPr>
+    <a:lvl2pPr marL="457200" algn="l" defTabSz="914400" rtl="0" eaLnBrk="1" latinLnBrk="0" hangingPunct="1">
+      <a:defRPr sz="1200" kern="1200">
+        <a:solidFill>
+          <a:schemeClr val="tx1"/>
+        </a:solidFill>
+        <a:latin typeface="+mn-lt"/>
+        <a:ea typeface="+mn-ea"/>
+        <a:cs typeface="+mn-cs"/>
+      </a:defRPr>
+    </a:lvl2pPr>
+    <a:lvl3pPr marL="914400" algn="l" defTabSz="914400" rtl="0" eaLnBrk="1" latinLnBrk="0" hangingPunct="1">
+      <a:defRPr sz="1200" kern="1200">
+        <a:solidFill>
+          <a:schemeClr val="tx1"/>
+        </a:solidFill>
+        <a:latin typeface="+mn-lt"/>
+        <a:ea typeface="+mn-ea"/>
+        <a:cs typeface="+mn-cs"/>
+      </a:defRPr>
+    </a:lvl3pPr>
+    <a:lvl4pPr marL="1371600" algn="l" defTabSz="914400" rtl="0" eaLnBrk="1" latinLnBrk="0" hangingPunct="1">
+      <a:defRPr sz="1200" kern="1200">
+        <a:solidFill>
+          <a:schemeClr val="tx1"/>
+        </a:solidFill>
+        <a:latin typeface="+mn-lt"/>
+        <a:ea typeface="+mn-ea"/>
+        <a:cs typeface="+mn-cs"/>
+      </a:defRPr>
+    </a:lvl4pPr>
+    <a:lvl5pPr marL="1828800" algn="l" defTabSz="914400" rtl="0" eaLnBrk="1" latinLnBrk="0" hangingPunct="1">
+      <a:defRPr sz="1200" kern="1200">
+        <a:solidFill>
+          <a:schemeClr val="tx1"/>
+        </a:solidFill>
+        <a:latin typeface="+mn-lt"/>
+        <a:ea typeface="+mn-ea"/>
+        <a:cs typeface="+mn-cs"/>
+      </a:defRPr>
+    </a:lvl5pPr>
+    <a:lvl6pPr marL="2286000" algn="l" defTabSz="914400" rtl="0" eaLnBrk="1" latinLnBrk="0" hangingPunct="1">
+      <a:defRPr sz="1200" kern="1200">
+        <a:solidFill>
+          <a:schemeClr val="tx1"/>
+        </a:solidFill>
+        <a:latin typeface="+mn-lt"/>
+        <a:ea typeface="+mn-ea"/>
+        <a:cs typeface="+mn-cs"/>
+      </a:defRPr>
+    </a:lvl6pPr>
+    <a:lvl7pPr marL="2743200" algn="l" defTabSz="914400" rtl="0" eaLnBrk="1" latinLnBrk="0" hangingPunct="1">
+      <a:defRPr sz="1200" kern="1200">
+        <a:solidFill>
+          <a:schemeClr val="tx1"/>
+        </a:solidFill>
+        <a:latin typeface="+mn-lt"/>
+        <a:ea typeface="+mn-ea"/>
+        <a:cs typeface="+mn-cs"/>
+      </a:defRPr>
+    </a:lvl7pPr>
+    <a:lvl8pPr marL="3200400" algn="l" defTabSz="914400" rtl="0" eaLnBrk="1" latinLnBrk="0" hangingPunct="1">
+      <a:defRPr sz="1200" kern="1200">
+        <a:solidFill>
+          <a:schemeClr val="tx1"/>
+        </a:solidFill>
+        <a:latin typeface="+mn-lt"/>
+        <a:ea typeface="+mn-ea"/>
+        <a:cs typeface="+mn-cs"/>
+      </a:defRPr>
+    </a:lvl8pPr>
+    <a:lvl9pPr marL="3657600" algn="l" defTabSz="914400" rtl="0" eaLnBrk="1" latinLnBrk="0" hangingPunct="1">
+      <a:defRPr sz="1200" kern="1200">
+        <a:solidFill>
+          <a:schemeClr val="tx1"/>
+        </a:solidFill>
+        <a:latin typeface="+mn-lt"/>
+        <a:ea typeface="+mn-ea"/>
+        <a:cs typeface="+mn-cs"/>
+      </a:defRPr>
+    </a:lvl9pPr>
+  </p:notesStyle>
+</p:notesMaster>
+</file>
+
+<file path=ppt/notesSlides/notesSlide1.xml><?xml version="1.0" encoding="utf-8"?>
+<p:notes xmlns:a="http://schemas.openxmlformats.org/drawingml/2006/main" xmlns:r="http://schemas.openxmlformats.org/officeDocument/2006/relationships" xmlns:p="http://schemas.openxmlformats.org/presentationml/2006/main">
+  <p:cSld>
+    <p:spTree>
+      <p:nvGrpSpPr>
+        <p:cNvPr id="1" name=""/>
+        <p:cNvGrpSpPr/>
+        <p:nvPr/>
+      </p:nvGrpSpPr>
+      <p:grpSpPr>
+        <a:xfrm>
+          <a:off x="0" y="0"/>
+          <a:ext cx="0" cy="0"/>
+          <a:chOff x="0" y="0"/>
+          <a:chExt cx="0" cy="0"/>
+        </a:xfrm>
+      </p:grpSpPr>
+      <p:sp>
+        <p:nvSpPr>
+          <p:cNvPr id="2" name="Slide Image Placeholder 1"/>
+          <p:cNvSpPr>
+            <a:spLocks noGrp="1" noRot="1" noChangeAspect="1"/>
+          </p:cNvSpPr>
+          <p:nvPr>
+            <p:ph type="sldImg"/>
+          </p:nvPr>
+        </p:nvSpPr>
+        <p:spPr/>
+      </p:sp>
+      <p:sp>
+        <p:nvSpPr>
+          <p:cNvPr id="3" name="Notes Placeholder 2"/>
+          <p:cNvSpPr>
+            <a:spLocks noGrp="1"/>
+          </p:cNvSpPr>
+          <p:nvPr>
+            <p:ph type="body" idx="1"/>
+          </p:nvPr>
+        </p:nvSpPr>
+        <p:spPr/>
+        <p:txBody>
+          <a:bodyPr/>
+          <a:lstStyle/>
+          <a:p>
+            <a:pPr lvl="0" indent="0" marL="0">
+              <a:buNone/>
+            </a:pPr>
+            <a:r>
+              <a:rPr/>
+              <a:t>The jury file supports both walkthroughs. Football and tips are used in the independent sections.</a:t>
+            </a:r>
+          </a:p>
+        </p:txBody>
+      </p:sp>
+      <p:sp>
+        <p:nvSpPr>
+          <p:cNvPr id="4" name="Slide Number Placeholder 3"/>
+          <p:cNvSpPr>
+            <a:spLocks noGrp="1"/>
+          </p:cNvSpPr>
+          <p:nvPr>
+            <p:ph type="sldNum" sz="quarter" idx="10"/>
+          </p:nvPr>
+        </p:nvSpPr>
+        <p:spPr/>
+        <p:txBody>
+          <a:bodyPr/>
+          <a:lstStyle/>
+          <a:p>
+            <a:fld id="{18BDFEC3-8487-43E8-A154-7C12CBC1FFF2}" type="slidenum">
+              <a:rPr lang="en-US"/>
+              <a:t>2</a:t>
+            </a:fld>
+            <a:endParaRPr lang="en-US"/>
+          </a:p>
+        </p:txBody>
+      </p:sp>
+    </p:spTree>
+  </p:cSld>
+</p:notes>
+</file>
+
+<file path=ppt/notesSlides/notesSlide10.xml><?xml version="1.0" encoding="utf-8"?>
+<p:notes xmlns:a="http://schemas.openxmlformats.org/drawingml/2006/main" xmlns:r="http://schemas.openxmlformats.org/officeDocument/2006/relationships" xmlns:p="http://schemas.openxmlformats.org/presentationml/2006/main">
+  <p:cSld>
+    <p:spTree>
+      <p:nvGrpSpPr>
+        <p:cNvPr id="1" name=""/>
+        <p:cNvGrpSpPr/>
+        <p:nvPr/>
+      </p:nvGrpSpPr>
+      <p:grpSpPr>
+        <a:xfrm>
+          <a:off x="0" y="0"/>
+          <a:ext cx="0" cy="0"/>
+          <a:chOff x="0" y="0"/>
+          <a:chExt cx="0" cy="0"/>
+        </a:xfrm>
+      </p:grpSpPr>
+      <p:sp>
+        <p:nvSpPr>
+          <p:cNvPr id="2" name="Slide Image Placeholder 1"/>
+          <p:cNvSpPr>
+            <a:spLocks noGrp="1" noRot="1" noChangeAspect="1"/>
+          </p:cNvSpPr>
+          <p:nvPr>
+            <p:ph type="sldImg"/>
+          </p:nvPr>
+        </p:nvSpPr>
+        <p:spPr/>
+      </p:sp>
+      <p:sp>
+        <p:nvSpPr>
+          <p:cNvPr id="3" name="Notes Placeholder 2"/>
+          <p:cNvSpPr>
+            <a:spLocks noGrp="1"/>
+          </p:cNvSpPr>
+          <p:nvPr>
+            <p:ph type="body" idx="1"/>
+          </p:nvPr>
+        </p:nvSpPr>
+        <p:spPr/>
+        <p:txBody>
+          <a:bodyPr/>
+          <a:lstStyle/>
+          <a:p>
+            <a:pPr lvl="0" indent="0" marL="0">
+              <a:buNone/>
+            </a:pPr>
+            <a:r>
+              <a:rPr/>
+              <a:t>SPSS prints each pair twice. Connect each planned pair to RH1, RH2, or RH3 and keep the stated direction visible.</a:t>
+            </a:r>
+          </a:p>
+        </p:txBody>
+      </p:sp>
+      <p:sp>
+        <p:nvSpPr>
+          <p:cNvPr id="4" name="Slide Number Placeholder 3"/>
+          <p:cNvSpPr>
+            <a:spLocks noGrp="1"/>
+          </p:cNvSpPr>
+          <p:nvPr>
+            <p:ph type="sldNum" sz="quarter" idx="10"/>
+          </p:nvPr>
+        </p:nvSpPr>
+        <p:spPr/>
+        <p:txBody>
+          <a:bodyPr/>
+          <a:lstStyle/>
+          <a:p>
+            <a:fld id="{18BDFEC3-8487-43E8-A154-7C12CBC1FFF2}" type="slidenum">
+              <a:rPr lang="en-US"/>
+              <a:t>11</a:t>
+            </a:fld>
+            <a:endParaRPr lang="en-US"/>
+          </a:p>
+        </p:txBody>
+      </p:sp>
+    </p:spTree>
+  </p:cSld>
+</p:notes>
+</file>
+
+<file path=ppt/notesSlides/notesSlide11.xml><?xml version="1.0" encoding="utf-8"?>
+<p:notes xmlns:a="http://schemas.openxmlformats.org/drawingml/2006/main" xmlns:r="http://schemas.openxmlformats.org/officeDocument/2006/relationships" xmlns:p="http://schemas.openxmlformats.org/presentationml/2006/main">
+  <p:cSld>
+    <p:spTree>
+      <p:nvGrpSpPr>
+        <p:cNvPr id="1" name=""/>
+        <p:cNvGrpSpPr/>
+        <p:nvPr/>
+      </p:nvGrpSpPr>
+      <p:grpSpPr>
+        <a:xfrm>
+          <a:off x="0" y="0"/>
+          <a:ext cx="0" cy="0"/>
+          <a:chOff x="0" y="0"/>
+          <a:chExt cx="0" cy="0"/>
+        </a:xfrm>
+      </p:grpSpPr>
+      <p:sp>
+        <p:nvSpPr>
+          <p:cNvPr id="2" name="Slide Image Placeholder 1"/>
+          <p:cNvSpPr>
+            <a:spLocks noGrp="1" noRot="1" noChangeAspect="1"/>
+          </p:cNvSpPr>
+          <p:nvPr>
+            <p:ph type="sldImg"/>
+          </p:nvPr>
+        </p:nvSpPr>
+        <p:spPr/>
+      </p:sp>
+      <p:sp>
+        <p:nvSpPr>
+          <p:cNvPr id="3" name="Notes Placeholder 2"/>
+          <p:cNvSpPr>
+            <a:spLocks noGrp="1"/>
+          </p:cNvSpPr>
+          <p:nvPr>
+            <p:ph type="body" idx="1"/>
+          </p:nvPr>
+        </p:nvSpPr>
+        <p:spPr/>
+        <p:txBody>
+          <a:bodyPr/>
+          <a:lstStyle/>
+          <a:p>
+            <a:pPr lvl="0" indent="0" marL="0">
+              <a:buNone/>
+            </a:pPr>
+            <a:r>
+              <a:rPr/>
+              <a:t>The worksheet requires this recode before the crosstab. Create a new variable rather than changing </a:t>
+            </a:r>
+            <a:r>
+              <a:rPr>
+                <a:latin typeface="Courier"/>
+              </a:rPr>
+              <a:t>serious</a:t>
+            </a:r>
+            <a:r>
+              <a:rPr/>
+              <a:t>, then confirm its values before continuing.</a:t>
+            </a:r>
+          </a:p>
+        </p:txBody>
+      </p:sp>
+      <p:sp>
+        <p:nvSpPr>
+          <p:cNvPr id="4" name="Slide Number Placeholder 3"/>
+          <p:cNvSpPr>
+            <a:spLocks noGrp="1"/>
+          </p:cNvSpPr>
+          <p:nvPr>
+            <p:ph type="sldNum" sz="quarter" idx="10"/>
+          </p:nvPr>
+        </p:nvSpPr>
+        <p:spPr/>
+        <p:txBody>
+          <a:bodyPr/>
+          <a:lstStyle/>
+          <a:p>
+            <a:fld id="{18BDFEC3-8487-43E8-A154-7C12CBC1FFF2}" type="slidenum">
+              <a:rPr lang="en-US"/>
+              <a:t>12</a:t>
+            </a:fld>
+            <a:endParaRPr lang="en-US"/>
+          </a:p>
+        </p:txBody>
+      </p:sp>
+    </p:spTree>
+  </p:cSld>
+</p:notes>
+</file>
+
+<file path=ppt/notesSlides/notesSlide12.xml><?xml version="1.0" encoding="utf-8"?>
+<p:notes xmlns:a="http://schemas.openxmlformats.org/drawingml/2006/main" xmlns:r="http://schemas.openxmlformats.org/officeDocument/2006/relationships" xmlns:p="http://schemas.openxmlformats.org/presentationml/2006/main">
+  <p:cSld>
+    <p:spTree>
+      <p:nvGrpSpPr>
+        <p:cNvPr id="1" name=""/>
+        <p:cNvGrpSpPr/>
+        <p:nvPr/>
+      </p:nvGrpSpPr>
+      <p:grpSpPr>
+        <a:xfrm>
+          <a:off x="0" y="0"/>
+          <a:ext cx="0" cy="0"/>
+          <a:chOff x="0" y="0"/>
+          <a:chExt cx="0" cy="0"/>
+        </a:xfrm>
+      </p:grpSpPr>
+      <p:sp>
+        <p:nvSpPr>
+          <p:cNvPr id="2" name="Slide Image Placeholder 1"/>
+          <p:cNvSpPr>
+            <a:spLocks noGrp="1" noRot="1" noChangeAspect="1"/>
+          </p:cNvSpPr>
+          <p:nvPr>
+            <p:ph type="sldImg"/>
+          </p:nvPr>
+        </p:nvSpPr>
+        <p:spPr/>
+      </p:sp>
+      <p:sp>
+        <p:nvSpPr>
+          <p:cNvPr id="3" name="Notes Placeholder 2"/>
+          <p:cNvSpPr>
+            <a:spLocks noGrp="1"/>
+          </p:cNvSpPr>
+          <p:nvPr>
+            <p:ph type="body" idx="1"/>
+          </p:nvPr>
+        </p:nvSpPr>
+        <p:spPr/>
+        <p:txBody>
+          <a:bodyPr/>
+          <a:lstStyle/>
+          <a:p>
+            <a:pPr lvl="0" indent="0" marL="0">
+              <a:buNone/>
+            </a:pPr>
+            <a:r>
+              <a:rPr/>
+              <a:t>Use the same jury subset. Describe row or column percentages before statistical significance, then follow up with the worksheet’s corrected threshold only when justified.</a:t>
+            </a:r>
+          </a:p>
+        </p:txBody>
+      </p:sp>
+      <p:sp>
+        <p:nvSpPr>
+          <p:cNvPr id="4" name="Slide Number Placeholder 3"/>
+          <p:cNvSpPr>
+            <a:spLocks noGrp="1"/>
+          </p:cNvSpPr>
+          <p:nvPr>
+            <p:ph type="sldNum" sz="quarter" idx="10"/>
+          </p:nvPr>
+        </p:nvSpPr>
+        <p:spPr/>
+        <p:txBody>
+          <a:bodyPr/>
+          <a:lstStyle/>
+          <a:p>
+            <a:fld id="{18BDFEC3-8487-43E8-A154-7C12CBC1FFF2}" type="slidenum">
+              <a:rPr lang="en-US"/>
+              <a:t>13</a:t>
+            </a:fld>
+            <a:endParaRPr lang="en-US"/>
+          </a:p>
+        </p:txBody>
+      </p:sp>
+    </p:spTree>
+  </p:cSld>
+</p:notes>
+</file>
+
+<file path=ppt/notesSlides/notesSlide13.xml><?xml version="1.0" encoding="utf-8"?>
+<p:notes xmlns:a="http://schemas.openxmlformats.org/drawingml/2006/main" xmlns:r="http://schemas.openxmlformats.org/officeDocument/2006/relationships" xmlns:p="http://schemas.openxmlformats.org/presentationml/2006/main">
+  <p:cSld>
+    <p:spTree>
+      <p:nvGrpSpPr>
+        <p:cNvPr id="1" name=""/>
+        <p:cNvGrpSpPr/>
+        <p:nvPr/>
+      </p:nvGrpSpPr>
+      <p:grpSpPr>
+        <a:xfrm>
+          <a:off x="0" y="0"/>
+          <a:ext cx="0" cy="0"/>
+          <a:chOff x="0" y="0"/>
+          <a:chExt cx="0" cy="0"/>
+        </a:xfrm>
+      </p:grpSpPr>
+      <p:sp>
+        <p:nvSpPr>
+          <p:cNvPr id="2" name="Slide Image Placeholder 1"/>
+          <p:cNvSpPr>
+            <a:spLocks noGrp="1" noRot="1" noChangeAspect="1"/>
+          </p:cNvSpPr>
+          <p:nvPr>
+            <p:ph type="sldImg"/>
+          </p:nvPr>
+        </p:nvSpPr>
+        <p:spPr/>
+      </p:sp>
+      <p:sp>
+        <p:nvSpPr>
+          <p:cNvPr id="3" name="Notes Placeholder 2"/>
+          <p:cNvSpPr>
+            <a:spLocks noGrp="1"/>
+          </p:cNvSpPr>
+          <p:nvPr>
+            <p:ph type="body" idx="1"/>
+          </p:nvPr>
+        </p:nvSpPr>
+        <p:spPr/>
+        <p:txBody>
+          <a:bodyPr/>
+          <a:lstStyle/>
+          <a:p>
+            <a:pPr lvl="0" indent="0" marL="0">
+              <a:buNone/>
+            </a:pPr>
+            <a:r>
+              <a:rPr/>
+              <a:t>Save every filter in syntax. A leftover pairwise filter will silently invalidate the next comparison.</a:t>
+            </a:r>
+          </a:p>
+        </p:txBody>
+      </p:sp>
+      <p:sp>
+        <p:nvSpPr>
+          <p:cNvPr id="4" name="Slide Number Placeholder 3"/>
+          <p:cNvSpPr>
+            <a:spLocks noGrp="1"/>
+          </p:cNvSpPr>
+          <p:nvPr>
+            <p:ph type="sldNum" sz="quarter" idx="10"/>
+          </p:nvPr>
+        </p:nvSpPr>
+        <p:spPr/>
+        <p:txBody>
+          <a:bodyPr/>
+          <a:lstStyle/>
+          <a:p>
+            <a:fld id="{18BDFEC3-8487-43E8-A154-7C12CBC1FFF2}" type="slidenum">
+              <a:rPr lang="en-US"/>
+              <a:t>14</a:t>
+            </a:fld>
+            <a:endParaRPr lang="en-US"/>
+          </a:p>
+        </p:txBody>
+      </p:sp>
+    </p:spTree>
+  </p:cSld>
+</p:notes>
+</file>
+
+<file path=ppt/notesSlides/notesSlide14.xml><?xml version="1.0" encoding="utf-8"?>
+<p:notes xmlns:a="http://schemas.openxmlformats.org/drawingml/2006/main" xmlns:r="http://schemas.openxmlformats.org/officeDocument/2006/relationships" xmlns:p="http://schemas.openxmlformats.org/presentationml/2006/main">
+  <p:cSld>
+    <p:spTree>
+      <p:nvGrpSpPr>
+        <p:cNvPr id="1" name=""/>
+        <p:cNvGrpSpPr/>
+        <p:nvPr/>
+      </p:nvGrpSpPr>
+      <p:grpSpPr>
+        <a:xfrm>
+          <a:off x="0" y="0"/>
+          <a:ext cx="0" cy="0"/>
+          <a:chOff x="0" y="0"/>
+          <a:chExt cx="0" cy="0"/>
+        </a:xfrm>
+      </p:grpSpPr>
+      <p:sp>
+        <p:nvSpPr>
+          <p:cNvPr id="2" name="Slide Image Placeholder 1"/>
+          <p:cNvSpPr>
+            <a:spLocks noGrp="1" noRot="1" noChangeAspect="1"/>
+          </p:cNvSpPr>
+          <p:nvPr>
+            <p:ph type="sldImg"/>
+          </p:nvPr>
+        </p:nvSpPr>
+        <p:spPr/>
+      </p:sp>
+      <p:sp>
+        <p:nvSpPr>
+          <p:cNvPr id="3" name="Notes Placeholder 2"/>
+          <p:cNvSpPr>
+            <a:spLocks noGrp="1"/>
+          </p:cNvSpPr>
+          <p:nvPr>
+            <p:ph type="body" idx="1"/>
+          </p:nvPr>
+        </p:nvSpPr>
+        <p:spPr/>
+        <p:txBody>
+          <a:bodyPr/>
+          <a:lstStyle/>
+          <a:p>
+            <a:pPr lvl="0" indent="0" marL="0">
+              <a:buNone/>
+            </a:pPr>
+            <a:r>
+              <a:rPr/>
+              <a:t>The independent analyses use different variables, but their order should match the walkthrough exactly.</a:t>
+            </a:r>
+          </a:p>
+        </p:txBody>
+      </p:sp>
+      <p:sp>
+        <p:nvSpPr>
+          <p:cNvPr id="4" name="Slide Number Placeholder 3"/>
+          <p:cNvSpPr>
+            <a:spLocks noGrp="1"/>
+          </p:cNvSpPr>
+          <p:nvPr>
+            <p:ph type="sldNum" sz="quarter" idx="10"/>
+          </p:nvPr>
+        </p:nvSpPr>
+        <p:spPr/>
+        <p:txBody>
+          <a:bodyPr/>
+          <a:lstStyle/>
+          <a:p>
+            <a:fld id="{18BDFEC3-8487-43E8-A154-7C12CBC1FFF2}" type="slidenum">
+              <a:rPr lang="en-US"/>
+              <a:t>15</a:t>
+            </a:fld>
+            <a:endParaRPr lang="en-US"/>
+          </a:p>
+        </p:txBody>
+      </p:sp>
+    </p:spTree>
+  </p:cSld>
+</p:notes>
+</file>
+
+<file path=ppt/notesSlides/notesSlide15.xml><?xml version="1.0" encoding="utf-8"?>
+<p:notes xmlns:a="http://schemas.openxmlformats.org/drawingml/2006/main" xmlns:r="http://schemas.openxmlformats.org/officeDocument/2006/relationships" xmlns:p="http://schemas.openxmlformats.org/presentationml/2006/main">
+  <p:cSld>
+    <p:spTree>
+      <p:nvGrpSpPr>
+        <p:cNvPr id="1" name=""/>
+        <p:cNvGrpSpPr/>
+        <p:nvPr/>
+      </p:nvGrpSpPr>
+      <p:grpSpPr>
+        <a:xfrm>
+          <a:off x="0" y="0"/>
+          <a:ext cx="0" cy="0"/>
+          <a:chOff x="0" y="0"/>
+          <a:chExt cx="0" cy="0"/>
+        </a:xfrm>
+      </p:grpSpPr>
+      <p:sp>
+        <p:nvSpPr>
+          <p:cNvPr id="2" name="Slide Image Placeholder 1"/>
+          <p:cNvSpPr>
+            <a:spLocks noGrp="1" noRot="1" noChangeAspect="1"/>
+          </p:cNvSpPr>
+          <p:nvPr>
+            <p:ph type="sldImg"/>
+          </p:nvPr>
+        </p:nvSpPr>
+        <p:spPr/>
+      </p:sp>
+      <p:sp>
+        <p:nvSpPr>
+          <p:cNvPr id="3" name="Notes Placeholder 2"/>
+          <p:cNvSpPr>
+            <a:spLocks noGrp="1"/>
+          </p:cNvSpPr>
+          <p:nvPr>
+            <p:ph type="body" idx="1"/>
+          </p:nvPr>
+        </p:nvSpPr>
+        <p:spPr/>
+        <p:txBody>
+          <a:bodyPr/>
+          <a:lstStyle/>
+          <a:p>
+            <a:pPr lvl="0" indent="0" marL="0">
+              <a:buNone/>
+            </a:pPr>
+            <a:r>
+              <a:rPr/>
+              <a:t>This output is generated with create_apa_anova_descriptives_table(), consistent with the course reporting functions and APA table template.</a:t>
+            </a:r>
+          </a:p>
+        </p:txBody>
+      </p:sp>
+      <p:sp>
+        <p:nvSpPr>
+          <p:cNvPr id="4" name="Slide Number Placeholder 3"/>
+          <p:cNvSpPr>
+            <a:spLocks noGrp="1"/>
+          </p:cNvSpPr>
+          <p:nvPr>
+            <p:ph type="sldNum" sz="quarter" idx="10"/>
+          </p:nvPr>
+        </p:nvSpPr>
+        <p:spPr/>
+        <p:txBody>
+          <a:bodyPr/>
+          <a:lstStyle/>
+          <a:p>
+            <a:fld id="{18BDFEC3-8487-43E8-A154-7C12CBC1FFF2}" type="slidenum">
+              <a:rPr lang="en-US"/>
+              <a:t>16</a:t>
+            </a:fld>
+            <a:endParaRPr lang="en-US"/>
+          </a:p>
+        </p:txBody>
+      </p:sp>
+    </p:spTree>
+  </p:cSld>
+</p:notes>
+</file>
+
+<file path=ppt/notesSlides/notesSlide16.xml><?xml version="1.0" encoding="utf-8"?>
+<p:notes xmlns:a="http://schemas.openxmlformats.org/drawingml/2006/main" xmlns:r="http://schemas.openxmlformats.org/officeDocument/2006/relationships" xmlns:p="http://schemas.openxmlformats.org/presentationml/2006/main">
+  <p:cSld>
+    <p:spTree>
+      <p:nvGrpSpPr>
+        <p:cNvPr id="1" name=""/>
+        <p:cNvGrpSpPr/>
+        <p:nvPr/>
+      </p:nvGrpSpPr>
+      <p:grpSpPr>
+        <a:xfrm>
+          <a:off x="0" y="0"/>
+          <a:ext cx="0" cy="0"/>
+          <a:chOff x="0" y="0"/>
+          <a:chExt cx="0" cy="0"/>
+        </a:xfrm>
+      </p:grpSpPr>
+      <p:sp>
+        <p:nvSpPr>
+          <p:cNvPr id="2" name="Slide Image Placeholder 1"/>
+          <p:cNvSpPr>
+            <a:spLocks noGrp="1" noRot="1" noChangeAspect="1"/>
+          </p:cNvSpPr>
+          <p:nvPr>
+            <p:ph type="sldImg"/>
+          </p:nvPr>
+        </p:nvSpPr>
+        <p:spPr/>
+      </p:sp>
+      <p:sp>
+        <p:nvSpPr>
+          <p:cNvPr id="3" name="Notes Placeholder 2"/>
+          <p:cNvSpPr>
+            <a:spLocks noGrp="1"/>
+          </p:cNvSpPr>
+          <p:nvPr>
+            <p:ph type="body" idx="1"/>
+          </p:nvPr>
+        </p:nvSpPr>
+        <p:spPr/>
+        <p:txBody>
+          <a:bodyPr/>
+          <a:lstStyle/>
+          <a:p>
+            <a:pPr lvl="0" indent="0" marL="0">
+              <a:buNone/>
+            </a:pPr>
+            <a:r>
+              <a:rPr/>
+              <a:t>For chi-square, replace means with the contingency-table pattern and report χ², df, p, sample size, and effect size before the pairwise results.</a:t>
+            </a:r>
+          </a:p>
+        </p:txBody>
+      </p:sp>
+      <p:sp>
+        <p:nvSpPr>
+          <p:cNvPr id="4" name="Slide Number Placeholder 3"/>
+          <p:cNvSpPr>
+            <a:spLocks noGrp="1"/>
+          </p:cNvSpPr>
+          <p:nvPr>
+            <p:ph type="sldNum" sz="quarter" idx="10"/>
+          </p:nvPr>
+        </p:nvSpPr>
+        <p:spPr/>
+        <p:txBody>
+          <a:bodyPr/>
+          <a:lstStyle/>
+          <a:p>
+            <a:fld id="{18BDFEC3-8487-43E8-A154-7C12CBC1FFF2}" type="slidenum">
+              <a:rPr lang="en-US"/>
+              <a:t>17</a:t>
+            </a:fld>
+            <a:endParaRPr lang="en-US"/>
+          </a:p>
+        </p:txBody>
+      </p:sp>
+    </p:spTree>
+  </p:cSld>
+</p:notes>
+</file>
+
+<file path=ppt/notesSlides/notesSlide2.xml><?xml version="1.0" encoding="utf-8"?>
+<p:notes xmlns:a="http://schemas.openxmlformats.org/drawingml/2006/main" xmlns:r="http://schemas.openxmlformats.org/officeDocument/2006/relationships" xmlns:p="http://schemas.openxmlformats.org/presentationml/2006/main">
+  <p:cSld>
+    <p:spTree>
+      <p:nvGrpSpPr>
+        <p:cNvPr id="1" name=""/>
+        <p:cNvGrpSpPr/>
+        <p:nvPr/>
+      </p:nvGrpSpPr>
+      <p:grpSpPr>
+        <a:xfrm>
+          <a:off x="0" y="0"/>
+          <a:ext cx="0" cy="0"/>
+          <a:chOff x="0" y="0"/>
+          <a:chExt cx="0" cy="0"/>
+        </a:xfrm>
+      </p:grpSpPr>
+      <p:sp>
+        <p:nvSpPr>
+          <p:cNvPr id="2" name="Slide Image Placeholder 1"/>
+          <p:cNvSpPr>
+            <a:spLocks noGrp="1" noRot="1" noChangeAspect="1"/>
+          </p:cNvSpPr>
+          <p:nvPr>
+            <p:ph type="sldImg"/>
+          </p:nvPr>
+        </p:nvSpPr>
+        <p:spPr/>
+      </p:sp>
+      <p:sp>
+        <p:nvSpPr>
+          <p:cNvPr id="3" name="Notes Placeholder 2"/>
+          <p:cNvSpPr>
+            <a:spLocks noGrp="1"/>
+          </p:cNvSpPr>
+          <p:nvPr>
+            <p:ph type="body" idx="1"/>
+          </p:nvPr>
+        </p:nvSpPr>
+        <p:spPr/>
+        <p:txBody>
+          <a:bodyPr/>
+          <a:lstStyle/>
+          <a:p>
+            <a:pPr lvl="0" indent="0" marL="0">
+              <a:buNone/>
+            </a:pPr>
+            <a:r>
+              <a:rPr/>
+              <a:t>The computator supports the worksheet’s LSD minimum-mean-difference steps. The APA template is used in the reporting section.</a:t>
+            </a:r>
+          </a:p>
+        </p:txBody>
+      </p:sp>
+      <p:sp>
+        <p:nvSpPr>
+          <p:cNvPr id="4" name="Slide Number Placeholder 3"/>
+          <p:cNvSpPr>
+            <a:spLocks noGrp="1"/>
+          </p:cNvSpPr>
+          <p:nvPr>
+            <p:ph type="sldNum" sz="quarter" idx="10"/>
+          </p:nvPr>
+        </p:nvSpPr>
+        <p:spPr/>
+        <p:txBody>
+          <a:bodyPr/>
+          <a:lstStyle/>
+          <a:p>
+            <a:fld id="{18BDFEC3-8487-43E8-A154-7C12CBC1FFF2}" type="slidenum">
+              <a:rPr lang="en-US"/>
+              <a:t>3</a:t>
+            </a:fld>
+            <a:endParaRPr lang="en-US"/>
+          </a:p>
+        </p:txBody>
+      </p:sp>
+    </p:spTree>
+  </p:cSld>
+</p:notes>
+</file>
+
+<file path=ppt/notesSlides/notesSlide3.xml><?xml version="1.0" encoding="utf-8"?>
+<p:notes xmlns:a="http://schemas.openxmlformats.org/drawingml/2006/main" xmlns:r="http://schemas.openxmlformats.org/officeDocument/2006/relationships" xmlns:p="http://schemas.openxmlformats.org/presentationml/2006/main">
+  <p:cSld>
+    <p:spTree>
+      <p:nvGrpSpPr>
+        <p:cNvPr id="1" name=""/>
+        <p:cNvGrpSpPr/>
+        <p:nvPr/>
+      </p:nvGrpSpPr>
+      <p:grpSpPr>
+        <a:xfrm>
+          <a:off x="0" y="0"/>
+          <a:ext cx="0" cy="0"/>
+          <a:chOff x="0" y="0"/>
+          <a:chExt cx="0" cy="0"/>
+        </a:xfrm>
+      </p:grpSpPr>
+      <p:sp>
+        <p:nvSpPr>
+          <p:cNvPr id="2" name="Slide Image Placeholder 1"/>
+          <p:cNvSpPr>
+            <a:spLocks noGrp="1" noRot="1" noChangeAspect="1"/>
+          </p:cNvSpPr>
+          <p:nvPr>
+            <p:ph type="sldImg"/>
+          </p:nvPr>
+        </p:nvSpPr>
+        <p:spPr/>
+      </p:sp>
+      <p:sp>
+        <p:nvSpPr>
+          <p:cNvPr id="3" name="Notes Placeholder 2"/>
+          <p:cNvSpPr>
+            <a:spLocks noGrp="1"/>
+          </p:cNvSpPr>
+          <p:nvPr>
+            <p:ph type="body" idx="1"/>
+          </p:nvPr>
+        </p:nvSpPr>
+        <p:spPr/>
+        <p:txBody>
+          <a:bodyPr/>
+          <a:lstStyle/>
+          <a:p>
+            <a:pPr lvl="0" indent="0" marL="0">
+              <a:buNone/>
+            </a:pPr>
+            <a:r>
+              <a:rPr/>
+              <a:t>Keep the dataset and saved syntax open together. Inspect variables and cases in the Data Editor; reproduce every command in the Syntax Editor.</a:t>
+            </a:r>
+          </a:p>
+        </p:txBody>
+      </p:sp>
+      <p:sp>
+        <p:nvSpPr>
+          <p:cNvPr id="4" name="Slide Number Placeholder 3"/>
+          <p:cNvSpPr>
+            <a:spLocks noGrp="1"/>
+          </p:cNvSpPr>
+          <p:nvPr>
+            <p:ph type="sldNum" sz="quarter" idx="10"/>
+          </p:nvPr>
+        </p:nvSpPr>
+        <p:spPr/>
+        <p:txBody>
+          <a:bodyPr/>
+          <a:lstStyle/>
+          <a:p>
+            <a:fld id="{18BDFEC3-8487-43E8-A154-7C12CBC1FFF2}" type="slidenum">
+              <a:rPr lang="en-US"/>
+              <a:t>4</a:t>
+            </a:fld>
+            <a:endParaRPr lang="en-US"/>
+          </a:p>
+        </p:txBody>
+      </p:sp>
+    </p:spTree>
+  </p:cSld>
+</p:notes>
+</file>
+
+<file path=ppt/notesSlides/notesSlide4.xml><?xml version="1.0" encoding="utf-8"?>
+<p:notes xmlns:a="http://schemas.openxmlformats.org/drawingml/2006/main" xmlns:r="http://schemas.openxmlformats.org/officeDocument/2006/relationships" xmlns:p="http://schemas.openxmlformats.org/presentationml/2006/main">
+  <p:cSld>
+    <p:spTree>
+      <p:nvGrpSpPr>
+        <p:cNvPr id="1" name=""/>
+        <p:cNvGrpSpPr/>
+        <p:nvPr/>
+      </p:nvGrpSpPr>
+      <p:grpSpPr>
+        <a:xfrm>
+          <a:off x="0" y="0"/>
+          <a:ext cx="0" cy="0"/>
+          <a:chOff x="0" y="0"/>
+          <a:chExt cx="0" cy="0"/>
+        </a:xfrm>
+      </p:grpSpPr>
+      <p:sp>
+        <p:nvSpPr>
+          <p:cNvPr id="2" name="Slide Image Placeholder 1"/>
+          <p:cNvSpPr>
+            <a:spLocks noGrp="1" noRot="1" noChangeAspect="1"/>
+          </p:cNvSpPr>
+          <p:nvPr>
+            <p:ph type="sldImg"/>
+          </p:nvPr>
+        </p:nvSpPr>
+        <p:spPr/>
+      </p:sp>
+      <p:sp>
+        <p:nvSpPr>
+          <p:cNvPr id="3" name="Notes Placeholder 2"/>
+          <p:cNvSpPr>
+            <a:spLocks noGrp="1"/>
+          </p:cNvSpPr>
+          <p:nvPr>
+            <p:ph type="body" idx="1"/>
+          </p:nvPr>
+        </p:nvSpPr>
+        <p:spPr/>
+        <p:txBody>
+          <a:bodyPr/>
+          <a:lstStyle/>
+          <a:p>
+            <a:pPr lvl="0" indent="0" marL="0">
+              <a:buNone/>
+            </a:pPr>
+            <a:r>
+              <a:rPr/>
+              <a:t>The Output Viewer accumulates tables, charts, warnings, and processing notes. Keep it open beside the data and syntax windows, and export only the results needed for the worksheet or report.</a:t>
+            </a:r>
+          </a:p>
+        </p:txBody>
+      </p:sp>
+      <p:sp>
+        <p:nvSpPr>
+          <p:cNvPr id="4" name="Slide Number Placeholder 3"/>
+          <p:cNvSpPr>
+            <a:spLocks noGrp="1"/>
+          </p:cNvSpPr>
+          <p:nvPr>
+            <p:ph type="sldNum" sz="quarter" idx="10"/>
+          </p:nvPr>
+        </p:nvSpPr>
+        <p:spPr/>
+        <p:txBody>
+          <a:bodyPr/>
+          <a:lstStyle/>
+          <a:p>
+            <a:fld id="{18BDFEC3-8487-43E8-A154-7C12CBC1FFF2}" type="slidenum">
+              <a:rPr lang="en-US"/>
+              <a:t>5</a:t>
+            </a:fld>
+            <a:endParaRPr lang="en-US"/>
+          </a:p>
+        </p:txBody>
+      </p:sp>
+    </p:spTree>
+  </p:cSld>
+</p:notes>
+</file>
+
+<file path=ppt/notesSlides/notesSlide5.xml><?xml version="1.0" encoding="utf-8"?>
+<p:notes xmlns:a="http://schemas.openxmlformats.org/drawingml/2006/main" xmlns:r="http://schemas.openxmlformats.org/officeDocument/2006/relationships" xmlns:p="http://schemas.openxmlformats.org/presentationml/2006/main">
+  <p:cSld>
+    <p:spTree>
+      <p:nvGrpSpPr>
+        <p:cNvPr id="1" name=""/>
+        <p:cNvGrpSpPr/>
+        <p:nvPr/>
+      </p:nvGrpSpPr>
+      <p:grpSpPr>
+        <a:xfrm>
+          <a:off x="0" y="0"/>
+          <a:ext cx="0" cy="0"/>
+          <a:chOff x="0" y="0"/>
+          <a:chExt cx="0" cy="0"/>
+        </a:xfrm>
+      </p:grpSpPr>
+      <p:sp>
+        <p:nvSpPr>
+          <p:cNvPr id="2" name="Slide Image Placeholder 1"/>
+          <p:cNvSpPr>
+            <a:spLocks noGrp="1" noRot="1" noChangeAspect="1"/>
+          </p:cNvSpPr>
+          <p:nvPr>
+            <p:ph type="sldImg"/>
+          </p:nvPr>
+        </p:nvSpPr>
+        <p:spPr/>
+      </p:sp>
+      <p:sp>
+        <p:nvSpPr>
+          <p:cNvPr id="3" name="Notes Placeholder 2"/>
+          <p:cNvSpPr>
+            <a:spLocks noGrp="1"/>
+          </p:cNvSpPr>
+          <p:nvPr>
+            <p:ph type="body" idx="1"/>
+          </p:nvPr>
+        </p:nvSpPr>
+        <p:spPr/>
+        <p:txBody>
+          <a:bodyPr/>
+          <a:lstStyle/>
+          <a:p>
+            <a:pPr lvl="0" indent="0" marL="0">
+              <a:buNone/>
+            </a:pPr>
+            <a:r>
+              <a:rPr/>
+              <a:t>This is the central concept in both halves of the lab. Starting with multiple pairwise tests inflates the Type I error rate.</a:t>
+            </a:r>
+          </a:p>
+        </p:txBody>
+      </p:sp>
+      <p:sp>
+        <p:nvSpPr>
+          <p:cNvPr id="4" name="Slide Number Placeholder 3"/>
+          <p:cNvSpPr>
+            <a:spLocks noGrp="1"/>
+          </p:cNvSpPr>
+          <p:nvPr>
+            <p:ph type="sldNum" sz="quarter" idx="10"/>
+          </p:nvPr>
+        </p:nvSpPr>
+        <p:spPr/>
+        <p:txBody>
+          <a:bodyPr/>
+          <a:lstStyle/>
+          <a:p>
+            <a:fld id="{18BDFEC3-8487-43E8-A154-7C12CBC1FFF2}" type="slidenum">
+              <a:rPr lang="en-US"/>
+              <a:t>6</a:t>
+            </a:fld>
+            <a:endParaRPr lang="en-US"/>
+          </a:p>
+        </p:txBody>
+      </p:sp>
+    </p:spTree>
+  </p:cSld>
+</p:notes>
+</file>
+
+<file path=ppt/notesSlides/notesSlide6.xml><?xml version="1.0" encoding="utf-8"?>
+<p:notes xmlns:a="http://schemas.openxmlformats.org/drawingml/2006/main" xmlns:r="http://schemas.openxmlformats.org/officeDocument/2006/relationships" xmlns:p="http://schemas.openxmlformats.org/presentationml/2006/main">
+  <p:cSld>
+    <p:spTree>
+      <p:nvGrpSpPr>
+        <p:cNvPr id="1" name=""/>
+        <p:cNvGrpSpPr/>
+        <p:nvPr/>
+      </p:nvGrpSpPr>
+      <p:grpSpPr>
+        <a:xfrm>
+          <a:off x="0" y="0"/>
+          <a:ext cx="0" cy="0"/>
+          <a:chOff x="0" y="0"/>
+          <a:chExt cx="0" cy="0"/>
+        </a:xfrm>
+      </p:grpSpPr>
+      <p:sp>
+        <p:nvSpPr>
+          <p:cNvPr id="2" name="Slide Image Placeholder 1"/>
+          <p:cNvSpPr>
+            <a:spLocks noGrp="1" noRot="1" noChangeAspect="1"/>
+          </p:cNvSpPr>
+          <p:nvPr>
+            <p:ph type="sldImg"/>
+          </p:nvPr>
+        </p:nvSpPr>
+        <p:spPr/>
+      </p:sp>
+      <p:sp>
+        <p:nvSpPr>
+          <p:cNvPr id="3" name="Notes Placeholder 2"/>
+          <p:cNvSpPr>
+            <a:spLocks noGrp="1"/>
+          </p:cNvSpPr>
+          <p:nvPr>
+            <p:ph type="body" idx="1"/>
+          </p:nvPr>
+        </p:nvSpPr>
+        <p:spPr/>
+        <p:txBody>
+          <a:bodyPr/>
+          <a:lstStyle/>
+          <a:p>
+            <a:pPr lvl="0" indent="0" marL="0">
+              <a:buNone/>
+            </a:pPr>
+            <a:r>
+              <a:rPr/>
+              <a:t>The same omnibus-then-follow-up logic applies to both test families, but the evidence is means for ANOVA and cell counts or percentages for chi-square.</a:t>
+            </a:r>
+          </a:p>
+        </p:txBody>
+      </p:sp>
+      <p:sp>
+        <p:nvSpPr>
+          <p:cNvPr id="4" name="Slide Number Placeholder 3"/>
+          <p:cNvSpPr>
+            <a:spLocks noGrp="1"/>
+          </p:cNvSpPr>
+          <p:nvPr>
+            <p:ph type="sldNum" sz="quarter" idx="10"/>
+          </p:nvPr>
+        </p:nvSpPr>
+        <p:spPr/>
+        <p:txBody>
+          <a:bodyPr/>
+          <a:lstStyle/>
+          <a:p>
+            <a:fld id="{18BDFEC3-8487-43E8-A154-7C12CBC1FFF2}" type="slidenum">
+              <a:rPr lang="en-US"/>
+              <a:t>7</a:t>
+            </a:fld>
+            <a:endParaRPr lang="en-US"/>
+          </a:p>
+        </p:txBody>
+      </p:sp>
+    </p:spTree>
+  </p:cSld>
+</p:notes>
+</file>
+
+<file path=ppt/notesSlides/notesSlide7.xml><?xml version="1.0" encoding="utf-8"?>
+<p:notes xmlns:a="http://schemas.openxmlformats.org/drawingml/2006/main" xmlns:r="http://schemas.openxmlformats.org/officeDocument/2006/relationships" xmlns:p="http://schemas.openxmlformats.org/presentationml/2006/main">
+  <p:cSld>
+    <p:spTree>
+      <p:nvGrpSpPr>
+        <p:cNvPr id="1" name=""/>
+        <p:cNvGrpSpPr/>
+        <p:nvPr/>
+      </p:nvGrpSpPr>
+      <p:grpSpPr>
+        <a:xfrm>
+          <a:off x="0" y="0"/>
+          <a:ext cx="0" cy="0"/>
+          <a:chOff x="0" y="0"/>
+          <a:chExt cx="0" cy="0"/>
+        </a:xfrm>
+      </p:grpSpPr>
+      <p:sp>
+        <p:nvSpPr>
+          <p:cNvPr id="2" name="Slide Image Placeholder 1"/>
+          <p:cNvSpPr>
+            <a:spLocks noGrp="1" noRot="1" noChangeAspect="1"/>
+          </p:cNvSpPr>
+          <p:nvPr>
+            <p:ph type="sldImg"/>
+          </p:nvPr>
+        </p:nvSpPr>
+        <p:spPr/>
+      </p:sp>
+      <p:sp>
+        <p:nvSpPr>
+          <p:cNvPr id="3" name="Notes Placeholder 2"/>
+          <p:cNvSpPr>
+            <a:spLocks noGrp="1"/>
+          </p:cNvSpPr>
+          <p:nvPr>
+            <p:ph type="body" idx="1"/>
+          </p:nvPr>
+        </p:nvSpPr>
+        <p:spPr/>
+        <p:txBody>
+          <a:bodyPr/>
+          <a:lstStyle/>
+          <a:p>
+            <a:pPr lvl="0" indent="0" marL="0">
+              <a:buNone/>
+            </a:pPr>
+            <a:r>
+              <a:rPr/>
+              <a:t>The walkthrough output uses the specified crime subset. Verify the active cases and the attractiveness value labels before running either analysis.</a:t>
+            </a:r>
+          </a:p>
+        </p:txBody>
+      </p:sp>
+      <p:sp>
+        <p:nvSpPr>
+          <p:cNvPr id="4" name="Slide Number Placeholder 3"/>
+          <p:cNvSpPr>
+            <a:spLocks noGrp="1"/>
+          </p:cNvSpPr>
+          <p:nvPr>
+            <p:ph type="sldNum" sz="quarter" idx="10"/>
+          </p:nvPr>
+        </p:nvSpPr>
+        <p:spPr/>
+        <p:txBody>
+          <a:bodyPr/>
+          <a:lstStyle/>
+          <a:p>
+            <a:fld id="{18BDFEC3-8487-43E8-A154-7C12CBC1FFF2}" type="slidenum">
+              <a:rPr lang="en-US"/>
+              <a:t>8</a:t>
+            </a:fld>
+            <a:endParaRPr lang="en-US"/>
+          </a:p>
+        </p:txBody>
+      </p:sp>
+    </p:spTree>
+  </p:cSld>
+</p:notes>
+</file>
+
+<file path=ppt/notesSlides/notesSlide8.xml><?xml version="1.0" encoding="utf-8"?>
+<p:notes xmlns:a="http://schemas.openxmlformats.org/drawingml/2006/main" xmlns:r="http://schemas.openxmlformats.org/officeDocument/2006/relationships" xmlns:p="http://schemas.openxmlformats.org/presentationml/2006/main">
+  <p:cSld>
+    <p:spTree>
+      <p:nvGrpSpPr>
+        <p:cNvPr id="1" name=""/>
+        <p:cNvGrpSpPr/>
+        <p:nvPr/>
+      </p:nvGrpSpPr>
+      <p:grpSpPr>
+        <a:xfrm>
+          <a:off x="0" y="0"/>
+          <a:ext cx="0" cy="0"/>
+          <a:chOff x="0" y="0"/>
+          <a:chExt cx="0" cy="0"/>
+        </a:xfrm>
+      </p:grpSpPr>
+      <p:sp>
+        <p:nvSpPr>
+          <p:cNvPr id="2" name="Slide Image Placeholder 1"/>
+          <p:cNvSpPr>
+            <a:spLocks noGrp="1" noRot="1" noChangeAspect="1"/>
+          </p:cNvSpPr>
+          <p:nvPr>
+            <p:ph type="sldImg"/>
+          </p:nvPr>
+        </p:nvSpPr>
+        <p:spPr/>
+      </p:sp>
+      <p:sp>
+        <p:nvSpPr>
+          <p:cNvPr id="3" name="Notes Placeholder 2"/>
+          <p:cNvSpPr>
+            <a:spLocks noGrp="1"/>
+          </p:cNvSpPr>
+          <p:nvPr>
+            <p:ph type="body" idx="1"/>
+          </p:nvPr>
+        </p:nvSpPr>
+        <p:spPr/>
+        <p:txBody>
+          <a:bodyPr/>
+          <a:lstStyle/>
+          <a:p>
+            <a:pPr lvl="0" indent="0" marL="0">
+              <a:buNone/>
+            </a:pPr>
+            <a:r>
+              <a:rPr/>
+              <a:t>Record group means, F, both degrees of freedom, MSe, p, and effect size before interpreting any pairwise row.</a:t>
+            </a:r>
+          </a:p>
+        </p:txBody>
+      </p:sp>
+      <p:sp>
+        <p:nvSpPr>
+          <p:cNvPr id="4" name="Slide Number Placeholder 3"/>
+          <p:cNvSpPr>
+            <a:spLocks noGrp="1"/>
+          </p:cNvSpPr>
+          <p:nvPr>
+            <p:ph type="sldNum" sz="quarter" idx="10"/>
+          </p:nvPr>
+        </p:nvSpPr>
+        <p:spPr/>
+        <p:txBody>
+          <a:bodyPr/>
+          <a:lstStyle/>
+          <a:p>
+            <a:fld id="{18BDFEC3-8487-43E8-A154-7C12CBC1FFF2}" type="slidenum">
+              <a:rPr lang="en-US"/>
+              <a:t>9</a:t>
+            </a:fld>
+            <a:endParaRPr lang="en-US"/>
+          </a:p>
+        </p:txBody>
+      </p:sp>
+    </p:spTree>
+  </p:cSld>
+</p:notes>
+</file>
+
+<file path=ppt/notesSlides/notesSlide9.xml><?xml version="1.0" encoding="utf-8"?>
+<p:notes xmlns:a="http://schemas.openxmlformats.org/drawingml/2006/main" xmlns:r="http://schemas.openxmlformats.org/officeDocument/2006/relationships" xmlns:p="http://schemas.openxmlformats.org/presentationml/2006/main">
+  <p:cSld>
+    <p:spTree>
+      <p:nvGrpSpPr>
+        <p:cNvPr id="1" name=""/>
+        <p:cNvGrpSpPr/>
+        <p:nvPr/>
+      </p:nvGrpSpPr>
+      <p:grpSpPr>
+        <a:xfrm>
+          <a:off x="0" y="0"/>
+          <a:ext cx="0" cy="0"/>
+          <a:chOff x="0" y="0"/>
+          <a:chExt cx="0" cy="0"/>
+        </a:xfrm>
+      </p:grpSpPr>
+      <p:sp>
+        <p:nvSpPr>
+          <p:cNvPr id="2" name="Slide Image Placeholder 1"/>
+          <p:cNvSpPr>
+            <a:spLocks noGrp="1" noRot="1" noChangeAspect="1"/>
+          </p:cNvSpPr>
+          <p:nvPr>
+            <p:ph type="sldImg"/>
+          </p:nvPr>
+        </p:nvSpPr>
+        <p:spPr/>
+      </p:sp>
+      <p:sp>
+        <p:nvSpPr>
+          <p:cNvPr id="3" name="Notes Placeholder 2"/>
+          <p:cNvSpPr>
+            <a:spLocks noGrp="1"/>
+          </p:cNvSpPr>
+          <p:nvPr>
+            <p:ph type="body" idx="1"/>
+          </p:nvPr>
+        </p:nvSpPr>
+        <p:spPr/>
+        <p:txBody>
+          <a:bodyPr/>
+          <a:lstStyle/>
+          <a:p>
+            <a:pPr lvl="0" indent="0" marL="0">
+              <a:buNone/>
+            </a:pPr>
+            <a:r>
+              <a:rPr/>
+              <a:t>Read the model row first. The significant omnibus result justifies moving to the worksheet’s planned comparisons.</a:t>
+            </a:r>
+          </a:p>
+        </p:txBody>
+      </p:sp>
+      <p:sp>
+        <p:nvSpPr>
+          <p:cNvPr id="4" name="Slide Number Placeholder 3"/>
+          <p:cNvSpPr>
+            <a:spLocks noGrp="1"/>
+          </p:cNvSpPr>
+          <p:nvPr>
+            <p:ph type="sldNum" sz="quarter" idx="10"/>
+          </p:nvPr>
+        </p:nvSpPr>
+        <p:spPr/>
+        <p:txBody>
+          <a:bodyPr/>
+          <a:lstStyle/>
+          <a:p>
+            <a:fld id="{18BDFEC3-8487-43E8-A154-7C12CBC1FFF2}" type="slidenum">
+              <a:rPr lang="en-US"/>
+              <a:t>10</a:t>
+            </a:fld>
+            <a:endParaRPr lang="en-US"/>
+          </a:p>
+        </p:txBody>
+      </p:sp>
+    </p:spTree>
+  </p:cSld>
+</p:notes>
+</file>
+
 <file path=ppt/slideLayouts/slideLayout1.xml><?xml version="1.0" encoding="utf-8"?>
 <p:sldLayout xmlns:a="http://schemas.openxmlformats.org/drawingml/2006/main" xmlns:r="http://schemas.openxmlformats.org/officeDocument/2006/relationships" xmlns:p="http://schemas.openxmlformats.org/presentationml/2006/main" type="title" preserve="1">
   <p:cSld name="Title Slide">
@@ -224,10 +1899,7 @@
               <a:buNone/>
               <a:defRPr sz="2000">
                 <a:solidFill>
-                  <a:schemeClr val="tx1">
-                    <a:lumMod val="75000"/>
-                    <a:lumOff val="25000"/>
-                  </a:schemeClr>
+                  <a:srgbClr val="FFFFFF"/>
                 </a:solidFill>
               </a:defRPr>
             </a:lvl1pPr>
@@ -2969,7 +4641,7 @@
         </a:buClr>
         <a:buFont charset="0" panose="020B0604020202020204" pitchFamily="34" typeface="Arial"/>
         <a:buChar char="•"/>
-        <a:defRPr kern="1200" sz="1800">
+        <a:defRPr kern="1200" sz="2000">
           <a:solidFill>
             <a:schemeClr val="tx1">
               <a:lumMod val="85000"/>
@@ -2993,7 +4665,7 @@
         </a:buClr>
         <a:buFont charset="0" panose="020B0604020202020204" pitchFamily="34" typeface="Arial"/>
         <a:buChar char="•"/>
-        <a:defRPr kern="1200" sz="1600">
+        <a:defRPr kern="1200" sz="2000">
           <a:solidFill>
             <a:schemeClr val="tx1">
               <a:lumMod val="85000"/>
@@ -3017,7 +4689,7 @@
         </a:buClr>
         <a:buFont charset="0" panose="020B0604020202020204" pitchFamily="34" typeface="Arial"/>
         <a:buChar char="•"/>
-        <a:defRPr kern="1200" sz="1600">
+        <a:defRPr kern="1200" sz="2000">
           <a:solidFill>
             <a:schemeClr val="tx1">
               <a:lumMod val="85000"/>
@@ -3041,7 +4713,7 @@
         </a:buClr>
         <a:buFont charset="0" panose="020B0604020202020204" pitchFamily="34" typeface="Arial"/>
         <a:buChar char="•"/>
-        <a:defRPr kern="1200" sz="1600">
+        <a:defRPr kern="1200" sz="2000">
           <a:solidFill>
             <a:schemeClr val="tx1">
               <a:lumMod val="85000"/>
@@ -3065,7 +4737,7 @@
         </a:buClr>
         <a:buFont charset="0" panose="020B0604020202020204" pitchFamily="34" typeface="Arial"/>
         <a:buChar char="•"/>
-        <a:defRPr kern="1200" sz="1600">
+        <a:defRPr kern="1200" sz="2000">
           <a:solidFill>
             <a:schemeClr val="tx1">
               <a:lumMod val="85000"/>
@@ -3089,7 +4761,7 @@
         </a:buClr>
         <a:buFont charset="0" panose="020B0604020202020204" pitchFamily="34" typeface="Arial"/>
         <a:buChar char="•"/>
-        <a:defRPr kern="1200" sz="1600">
+        <a:defRPr kern="1200" sz="2000">
           <a:solidFill>
             <a:schemeClr val="tx1"/>
           </a:solidFill>
@@ -3110,7 +4782,7 @@
         </a:buClr>
         <a:buFont charset="0" panose="020B0604020202020204" pitchFamily="34" typeface="Arial"/>
         <a:buChar char="•"/>
-        <a:defRPr kern="1200" sz="1600">
+        <a:defRPr kern="1200" sz="2000">
           <a:solidFill>
             <a:schemeClr val="tx1"/>
           </a:solidFill>
@@ -3131,7 +4803,7 @@
         </a:buClr>
         <a:buFont charset="0" panose="020B0604020202020204" pitchFamily="34" typeface="Arial"/>
         <a:buChar char="•"/>
-        <a:defRPr baseline="0" kern="1200" sz="1600">
+        <a:defRPr baseline="0" kern="1200" sz="2000">
           <a:solidFill>
             <a:schemeClr val="tx1"/>
           </a:solidFill>
@@ -3152,7 +4824,7 @@
         </a:buClr>
         <a:buFont charset="0" panose="020B0604020202020204" pitchFamily="34" typeface="Arial"/>
         <a:buChar char="•"/>
-        <a:defRPr baseline="0" kern="1200" sz="1600">
+        <a:defRPr baseline="0" kern="1200" sz="2000">
           <a:solidFill>
             <a:schemeClr val="tx1"/>
           </a:solidFill>
@@ -3167,7 +4839,7 @@
         <a:defRPr lang="en-US"/>
       </a:defPPr>
       <a:lvl1pPr algn="l" defTabSz="914400" eaLnBrk="1" hangingPunct="1" latinLnBrk="0" marL="0" rtl="0">
-        <a:defRPr kern="1200" sz="1800">
+        <a:defRPr kern="1200" sz="2000">
           <a:solidFill>
             <a:schemeClr val="tx1"/>
           </a:solidFill>
@@ -3177,7 +4849,7 @@
         </a:defRPr>
       </a:lvl1pPr>
       <a:lvl2pPr algn="l" defTabSz="914400" eaLnBrk="1" hangingPunct="1" latinLnBrk="0" marL="457200" rtl="0">
-        <a:defRPr kern="1200" sz="1800">
+        <a:defRPr kern="1200" sz="2000">
           <a:solidFill>
             <a:schemeClr val="tx1"/>
           </a:solidFill>
@@ -3187,7 +4859,7 @@
         </a:defRPr>
       </a:lvl2pPr>
       <a:lvl3pPr algn="l" defTabSz="914400" eaLnBrk="1" hangingPunct="1" latinLnBrk="0" marL="914400" rtl="0">
-        <a:defRPr kern="1200" sz="1800">
+        <a:defRPr kern="1200" sz="2000">
           <a:solidFill>
             <a:schemeClr val="tx1"/>
           </a:solidFill>
@@ -3197,7 +4869,7 @@
         </a:defRPr>
       </a:lvl3pPr>
       <a:lvl4pPr algn="l" defTabSz="914400" eaLnBrk="1" hangingPunct="1" latinLnBrk="0" marL="1371600" rtl="0">
-        <a:defRPr kern="1200" sz="1800">
+        <a:defRPr kern="1200" sz="2000">
           <a:solidFill>
             <a:schemeClr val="tx1"/>
           </a:solidFill>
@@ -3207,7 +4879,7 @@
         </a:defRPr>
       </a:lvl4pPr>
       <a:lvl5pPr algn="l" defTabSz="914400" eaLnBrk="1" hangingPunct="1" latinLnBrk="0" marL="1828800" rtl="0">
-        <a:defRPr kern="1200" sz="1800">
+        <a:defRPr kern="1200" sz="2000">
           <a:solidFill>
             <a:schemeClr val="tx1"/>
           </a:solidFill>
@@ -3217,7 +4889,7 @@
         </a:defRPr>
       </a:lvl5pPr>
       <a:lvl6pPr algn="l" defTabSz="914400" eaLnBrk="1" hangingPunct="1" latinLnBrk="0" marL="2286000" rtl="0">
-        <a:defRPr kern="1200" sz="1800">
+        <a:defRPr kern="1200" sz="2000">
           <a:solidFill>
             <a:schemeClr val="tx1"/>
           </a:solidFill>
@@ -3227,7 +4899,7 @@
         </a:defRPr>
       </a:lvl6pPr>
       <a:lvl7pPr algn="l" defTabSz="914400" eaLnBrk="1" hangingPunct="1" latinLnBrk="0" marL="2743200" rtl="0">
-        <a:defRPr kern="1200" sz="1800">
+        <a:defRPr kern="1200" sz="2000">
           <a:solidFill>
             <a:schemeClr val="tx1"/>
           </a:solidFill>
@@ -3237,7 +4909,7 @@
         </a:defRPr>
       </a:lvl7pPr>
       <a:lvl8pPr algn="l" defTabSz="914400" eaLnBrk="1" hangingPunct="1" latinLnBrk="0" marL="3200400" rtl="0">
-        <a:defRPr kern="1200" sz="1800">
+        <a:defRPr kern="1200" sz="2000">
           <a:solidFill>
             <a:schemeClr val="tx1"/>
           </a:solidFill>
@@ -3247,7 +4919,7 @@
         </a:defRPr>
       </a:lvl8pPr>
       <a:lvl9pPr algn="l" defTabSz="914400" eaLnBrk="1" hangingPunct="1" latinLnBrk="0" marL="3657600" rtl="0">
-        <a:defRPr kern="1200" sz="1800">
+        <a:defRPr kern="1200" sz="2000">
           <a:solidFill>
             <a:schemeClr val="tx1"/>
           </a:solidFill>
@@ -3311,7 +4983,7 @@
             </a:pPr>
             <a:r>
               <a:rPr/>
-              <a:t>k-Groups Analysis</a:t>
+              <a:t>Compare Multiple Groups</a:t>
             </a:r>
           </a:p>
         </p:txBody>
@@ -3342,13 +5014,13 @@
             </a:pPr>
             <a:r>
               <a:rPr/>
-              <a:t>Lab 11</a:t>
+              <a:t>Lab 11 · k-Group ANOVA and Chi-Square</a:t>
             </a:r>
             <a:br/>
             <a:br/>
             <a:r>
               <a:rPr/>
-              <a:t>PSYCH 350-Lab</a:t>
+              <a:t>PSYC 350 Laboratory</a:t>
             </a:r>
           </a:p>
         </p:txBody>
@@ -3400,11 +5072,41 @@
             </a:pPr>
             <a:r>
               <a:rPr/>
-              <a:t>The Data (continued)</a:t>
-            </a:r>
-          </a:p>
-        </p:txBody>
-      </p:sp>
+              <a:t>9 Let the omnibus result determine follow-up</a:t>
+            </a:r>
+          </a:p>
+        </p:txBody>
+      </p:sp>
+      <p:pic>
+        <p:nvPicPr>
+          <p:cNvPr descr="SPSS-style one-way ANOVA output for recommended prison sentence by defendant attractiveness, showing F equals 4.081 with 2 and 52 degrees of freedom and p equals .023" id="0" name="Picture 1"/>
+          <p:cNvPicPr>
+            <a:picLocks noGrp="1" noChangeAspect="1"/>
+          </p:cNvPicPr>
+          <p:nvPr/>
+        </p:nvPicPr>
+        <p:blipFill>
+          <a:blip r:embed="rId3"/>
+          <a:stretch>
+            <a:fillRect/>
+          </a:stretch>
+        </p:blipFill>
+        <p:spPr bwMode="auto">
+          <a:xfrm>
+            <a:off x="1092200" y="2641600"/>
+            <a:ext cx="9994900" cy="3086100"/>
+          </a:xfrm>
+          <a:prstGeom prst="rect">
+            <a:avLst/>
+          </a:prstGeom>
+          <a:noFill/>
+          <a:ln w="9525">
+            <a:noFill/>
+            <a:headEnd/>
+            <a:tailEnd/>
+          </a:ln>
+        </p:spPr>
+      </p:pic>
     </p:spTree>
   </p:cSld>
 </p:sld>
@@ -3452,41 +5154,41 @@
             </a:pPr>
             <a:r>
               <a:rPr/>
-              <a:t>What the ANOVA Tells Us</a:t>
-            </a:r>
-          </a:p>
-        </p:txBody>
-      </p:sp>
-      <p:sp>
-        <p:nvSpPr>
-          <p:cNvPr id="3" name="Content Placeholder 2"/>
-          <p:cNvSpPr>
-            <a:spLocks noGrp="1"/>
-          </p:cNvSpPr>
-          <p:nvPr>
-            <p:ph idx="1"/>
-          </p:nvPr>
-        </p:nvSpPr>
-        <p:spPr/>
-        <p:txBody>
-          <a:bodyPr/>
-          <a:lstStyle/>
-          <a:p>
-            <a:pPr lvl="0" indent="0">
-              <a:buNone/>
-            </a:pPr>
-            <a:r>
-              <a:rPr>
-                <a:latin typeface="Courier"/>
-              </a:rPr>
-              <a:t>The ANOVA (formula: body ~ dancer) suggests that:
-  - The main effect of dancer is statistically significant and large (F(2, 87) =
-170.56, p &lt; .001; Eta2 = 0.80, 95% CI [0.74, 1.00])
-Effect sizes were labelled following Field's (2013) recommendations.</a:t>
-            </a:r>
-          </a:p>
-        </p:txBody>
-      </p:sp>
+              <a:t>10 Read one direction for each planned pair</a:t>
+            </a:r>
+          </a:p>
+        </p:txBody>
+      </p:sp>
+      <p:pic>
+        <p:nvPicPr>
+          <p:cNvPr descr="SPSS-style LSD multiple-comparisons output for recommended prison sentence across beautiful, average, and unattractive defendant groups; comparisons with the unattractive group are statistically significant" id="0" name="Picture 1"/>
+          <p:cNvPicPr>
+            <a:picLocks noGrp="1" noChangeAspect="1"/>
+          </p:cNvPicPr>
+          <p:nvPr/>
+        </p:nvPicPr>
+        <p:blipFill>
+          <a:blip r:embed="rId3"/>
+          <a:stretch>
+            <a:fillRect/>
+          </a:stretch>
+        </p:blipFill>
+        <p:spPr bwMode="auto">
+          <a:xfrm>
+            <a:off x="1092200" y="2667000"/>
+            <a:ext cx="9994900" cy="3022600"/>
+          </a:xfrm>
+          <a:prstGeom prst="rect">
+            <a:avLst/>
+          </a:prstGeom>
+          <a:noFill/>
+          <a:ln w="9525">
+            <a:noFill/>
+            <a:headEnd/>
+            <a:tailEnd/>
+          </a:ln>
+        </p:spPr>
+      </p:pic>
     </p:spTree>
   </p:cSld>
 </p:sld>
@@ -3534,789 +5236,44 @@
             </a:pPr>
             <a:r>
               <a:rPr/>
-              <a:t>What the ANOVA Tells Us (continued)</a:t>
-            </a:r>
-          </a:p>
-        </p:txBody>
-      </p:sp>
-      <p:graphicFrame>
-        <p:nvGraphicFramePr>
-          <p:cNvPr id="6" name="Content Placeholder 5"/>
-          <p:cNvGraphicFramePr>
-            <a:graphicFrameLocks noGrp="1"/>
-          </p:cNvGraphicFramePr>
+              <a:t>11 Recode seriousness before the crosstab</a:t>
+            </a:r>
+          </a:p>
+        </p:txBody>
+      </p:sp>
+      <p:sp>
+        <p:nvSpPr>
+          <p:cNvPr id="3" name="Content Placeholder 2"/>
+          <p:cNvSpPr>
+            <a:spLocks noGrp="1"/>
+          </p:cNvSpPr>
           <p:nvPr>
             <p:ph idx="1"/>
           </p:nvPr>
-        </p:nvGraphicFramePr>
-        <p:xfrm>
-          <a:off x="1092200" y="2628900"/>
-          <a:ext cx="9994900" cy="3098800"/>
-        </p:xfrm>
-        <a:graphic>
-          <a:graphicData uri="http://schemas.openxmlformats.org/drawingml/2006/table">
-            <a:tbl>
-              <a:tblPr firstRow="1" bandRow="1">
-                <a:tableStyleId>{5C22544A-7EE6-4342-B048-85BDC9FD1C3A}</a:tableStyleId>
-              </a:tblPr>
-              <a:tblGrid>
-                <a:gridCol w="825500"/>
-                <a:gridCol w="825500"/>
-                <a:gridCol w="825500"/>
-                <a:gridCol w="825500"/>
-                <a:gridCol w="825500"/>
-                <a:gridCol w="825500"/>
-                <a:gridCol w="825500"/>
-                <a:gridCol w="825500"/>
-                <a:gridCol w="825500"/>
-                <a:gridCol w="825500"/>
-                <a:gridCol w="825500"/>
-                <a:gridCol w="825500"/>
-              </a:tblGrid>
-              <a:tr h="0">
-                <a:tc>
-                  <a:txBody>
-                    <a:bodyPr/>
-                    <a:lstStyle/>
-                    <a:p>
-                      <a:pPr lvl="0" indent="0" marL="0">
-                        <a:buNone/>
-                      </a:pPr>
-                      <a:r>
-                        <a:rPr/>
-                        <a:t>Group</a:t>
-                      </a:r>
-                    </a:p>
-                  </a:txBody>
-                  <a:tcPr/>
-                </a:tc>
-                <a:tc>
-                  <a:txBody>
-                    <a:bodyPr/>
-                    <a:lstStyle/>
-                    <a:p>
-                      <a:pPr lvl="0" indent="0" marL="0">
-                        <a:buNone/>
-                      </a:pPr>
-                      <a:r>
-                        <a:rPr/>
-                        <a:t>Variable</a:t>
-                      </a:r>
-                    </a:p>
-                  </a:txBody>
-                  <a:tcPr/>
-                </a:tc>
-                <a:tc>
-                  <a:txBody>
-                    <a:bodyPr/>
-                    <a:lstStyle/>
-                    <a:p>
-                      <a:pPr lvl="0" indent="0" marL="0">
-                        <a:buNone/>
-                      </a:pPr>
-                      <a:r>
-                        <a:rPr/>
-                        <a:t>n_Obs</a:t>
-                      </a:r>
-                    </a:p>
-                  </a:txBody>
-                  <a:tcPr/>
-                </a:tc>
-                <a:tc>
-                  <a:txBody>
-                    <a:bodyPr/>
-                    <a:lstStyle/>
-                    <a:p>
-                      <a:pPr lvl="0" indent="0" marL="0">
-                        <a:buNone/>
-                      </a:pPr>
-                      <a:r>
-                        <a:rPr/>
-                        <a:t>Mean</a:t>
-                      </a:r>
-                    </a:p>
-                  </a:txBody>
-                  <a:tcPr/>
-                </a:tc>
-                <a:tc>
-                  <a:txBody>
-                    <a:bodyPr/>
-                    <a:lstStyle/>
-                    <a:p>
-                      <a:pPr lvl="0" indent="0" marL="0">
-                        <a:buNone/>
-                      </a:pPr>
-                      <a:r>
-                        <a:rPr/>
-                        <a:t>SD</a:t>
-                      </a:r>
-                    </a:p>
-                  </a:txBody>
-                  <a:tcPr/>
-                </a:tc>
-                <a:tc>
-                  <a:txBody>
-                    <a:bodyPr/>
-                    <a:lstStyle/>
-                    <a:p>
-                      <a:pPr lvl="0" indent="0" marL="0">
-                        <a:buNone/>
-                      </a:pPr>
-                      <a:r>
-                        <a:rPr/>
-                        <a:t>Median</a:t>
-                      </a:r>
-                    </a:p>
-                  </a:txBody>
-                  <a:tcPr/>
-                </a:tc>
-                <a:tc>
-                  <a:txBody>
-                    <a:bodyPr/>
-                    <a:lstStyle/>
-                    <a:p>
-                      <a:pPr lvl="0" indent="0" marL="0">
-                        <a:buNone/>
-                      </a:pPr>
-                      <a:r>
-                        <a:rPr/>
-                        <a:t>MAD</a:t>
-                      </a:r>
-                    </a:p>
-                  </a:txBody>
-                  <a:tcPr/>
-                </a:tc>
-                <a:tc>
-                  <a:txBody>
-                    <a:bodyPr/>
-                    <a:lstStyle/>
-                    <a:p>
-                      <a:pPr lvl="0" indent="0" marL="0">
-                        <a:buNone/>
-                      </a:pPr>
-                      <a:r>
-                        <a:rPr/>
-                        <a:t>Min</a:t>
-                      </a:r>
-                    </a:p>
-                  </a:txBody>
-                  <a:tcPr/>
-                </a:tc>
-                <a:tc>
-                  <a:txBody>
-                    <a:bodyPr/>
-                    <a:lstStyle/>
-                    <a:p>
-                      <a:pPr lvl="0" indent="0" marL="0">
-                        <a:buNone/>
-                      </a:pPr>
-                      <a:r>
-                        <a:rPr/>
-                        <a:t>Max</a:t>
-                      </a:r>
-                    </a:p>
-                  </a:txBody>
-                  <a:tcPr/>
-                </a:tc>
-                <a:tc>
-                  <a:txBody>
-                    <a:bodyPr/>
-                    <a:lstStyle/>
-                    <a:p>
-                      <a:pPr lvl="0" indent="0" marL="0">
-                        <a:buNone/>
-                      </a:pPr>
-                      <a:r>
-                        <a:rPr/>
-                        <a:t>Skewness</a:t>
-                      </a:r>
-                    </a:p>
-                  </a:txBody>
-                  <a:tcPr/>
-                </a:tc>
-                <a:tc>
-                  <a:txBody>
-                    <a:bodyPr/>
-                    <a:lstStyle/>
-                    <a:p>
-                      <a:pPr lvl="0" indent="0" marL="0">
-                        <a:buNone/>
-                      </a:pPr>
-                      <a:r>
-                        <a:rPr/>
-                        <a:t>Kurtosis</a:t>
-                      </a:r>
-                    </a:p>
-                  </a:txBody>
-                  <a:tcPr/>
-                </a:tc>
-                <a:tc>
-                  <a:txBody>
-                    <a:bodyPr/>
-                    <a:lstStyle/>
-                    <a:p>
-                      <a:pPr lvl="0" indent="0" marL="0">
-                        <a:buNone/>
-                      </a:pPr>
-                      <a:r>
-                        <a:rPr/>
-                        <a:t>n_Missing</a:t>
-                      </a:r>
-                    </a:p>
-                  </a:txBody>
-                  <a:tcPr/>
-                </a:tc>
-              </a:tr>
-              <a:tr h="0">
-                <a:tc>
-                  <a:txBody>
-                    <a:bodyPr/>
-                    <a:lstStyle/>
-                    <a:p>
-                      <a:pPr lvl="0" indent="0" marL="0">
-                        <a:buNone/>
-                      </a:pPr>
-                      <a:r>
-                        <a:rPr/>
-                        <a:t>thin</a:t>
-                      </a:r>
-                    </a:p>
-                  </a:txBody>
-                </a:tc>
-                <a:tc>
-                  <a:txBody>
-                    <a:bodyPr/>
-                    <a:lstStyle/>
-                    <a:p>
-                      <a:pPr lvl="0" indent="0" marL="0">
-                        <a:buNone/>
-                      </a:pPr>
-                      <a:r>
-                        <a:rPr/>
-                        <a:t>body</a:t>
-                      </a:r>
-                    </a:p>
-                  </a:txBody>
-                </a:tc>
-                <a:tc>
-                  <a:txBody>
-                    <a:bodyPr/>
-                    <a:lstStyle/>
-                    <a:p>
-                      <a:pPr lvl="0" indent="0" marL="0">
-                        <a:buNone/>
-                      </a:pPr>
-                      <a:r>
-                        <a:rPr/>
-                        <a:t>30</a:t>
-                      </a:r>
-                    </a:p>
-                  </a:txBody>
-                </a:tc>
-                <a:tc>
-                  <a:txBody>
-                    <a:bodyPr/>
-                    <a:lstStyle/>
-                    <a:p>
-                      <a:pPr lvl="0" indent="0" marL="0">
-                        <a:buNone/>
-                      </a:pPr>
-                      <a:r>
-                        <a:rPr/>
-                        <a:t>4.095535</a:t>
-                      </a:r>
-                    </a:p>
-                  </a:txBody>
-                </a:tc>
-                <a:tc>
-                  <a:txBody>
-                    <a:bodyPr/>
-                    <a:lstStyle/>
-                    <a:p>
-                      <a:pPr lvl="0" indent="0" marL="0">
-                        <a:buNone/>
-                      </a:pPr>
-                      <a:r>
-                        <a:rPr/>
-                        <a:t>0.9557137</a:t>
-                      </a:r>
-                    </a:p>
-                  </a:txBody>
-                </a:tc>
-                <a:tc>
-                  <a:txBody>
-                    <a:bodyPr/>
-                    <a:lstStyle/>
-                    <a:p>
-                      <a:pPr lvl="0" indent="0" marL="0">
-                        <a:buNone/>
-                      </a:pPr>
-                      <a:r>
-                        <a:rPr/>
-                        <a:t>4.104949</a:t>
-                      </a:r>
-                    </a:p>
-                  </a:txBody>
-                </a:tc>
-                <a:tc>
-                  <a:txBody>
-                    <a:bodyPr/>
-                    <a:lstStyle/>
-                    <a:p>
-                      <a:pPr lvl="0" indent="0" marL="0">
-                        <a:buNone/>
-                      </a:pPr>
-                      <a:r>
-                        <a:rPr/>
-                        <a:t>0.6177722</a:t>
-                      </a:r>
-                    </a:p>
-                  </a:txBody>
-                </a:tc>
-                <a:tc>
-                  <a:txBody>
-                    <a:bodyPr/>
-                    <a:lstStyle/>
-                    <a:p>
-                      <a:pPr lvl="0" indent="0" marL="0">
-                        <a:buNone/>
-                      </a:pPr>
-                      <a:r>
-                        <a:rPr/>
-                        <a:t>1.962318</a:t>
-                      </a:r>
-                    </a:p>
-                  </a:txBody>
-                </a:tc>
-                <a:tc>
-                  <a:txBody>
-                    <a:bodyPr/>
-                    <a:lstStyle/>
-                    <a:p>
-                      <a:pPr lvl="0" indent="0" marL="0">
-                        <a:buNone/>
-                      </a:pPr>
-                      <a:r>
-                        <a:rPr/>
-                        <a:t>5.877864</a:t>
-                      </a:r>
-                    </a:p>
-                  </a:txBody>
-                </a:tc>
-                <a:tc>
-                  <a:txBody>
-                    <a:bodyPr/>
-                    <a:lstStyle/>
-                    <a:p>
-                      <a:pPr lvl="0" indent="0" marL="0">
-                        <a:buNone/>
-                      </a:pPr>
-                      <a:r>
-                        <a:rPr/>
-                        <a:t>-0.4810970</a:t>
-                      </a:r>
-                    </a:p>
-                  </a:txBody>
-                </a:tc>
-                <a:tc>
-                  <a:txBody>
-                    <a:bodyPr/>
-                    <a:lstStyle/>
-                    <a:p>
-                      <a:pPr lvl="0" indent="0" marL="0">
-                        <a:buNone/>
-                      </a:pPr>
-                      <a:r>
-                        <a:rPr/>
-                        <a:t>0.27633982</a:t>
-                      </a:r>
-                    </a:p>
-                  </a:txBody>
-                </a:tc>
-                <a:tc>
-                  <a:txBody>
-                    <a:bodyPr/>
-                    <a:lstStyle/>
-                    <a:p>
-                      <a:pPr lvl="0" indent="0" marL="0">
-                        <a:buNone/>
-                      </a:pPr>
-                      <a:r>
-                        <a:rPr/>
-                        <a:t>0</a:t>
-                      </a:r>
-                    </a:p>
-                  </a:txBody>
-                </a:tc>
-              </a:tr>
-              <a:tr h="0">
-                <a:tc>
-                  <a:txBody>
-                    <a:bodyPr/>
-                    <a:lstStyle/>
-                    <a:p>
-                      <a:pPr lvl="0" indent="0" marL="0">
-                        <a:buNone/>
-                      </a:pPr>
-                      <a:r>
-                        <a:rPr/>
-                        <a:t>large</a:t>
-                      </a:r>
-                    </a:p>
-                  </a:txBody>
-                </a:tc>
-                <a:tc>
-                  <a:txBody>
-                    <a:bodyPr/>
-                    <a:lstStyle/>
-                    <a:p>
-                      <a:pPr lvl="0" indent="0" marL="0">
-                        <a:buNone/>
-                      </a:pPr>
-                      <a:r>
-                        <a:rPr/>
-                        <a:t>body</a:t>
-                      </a:r>
-                    </a:p>
-                  </a:txBody>
-                </a:tc>
-                <a:tc>
-                  <a:txBody>
-                    <a:bodyPr/>
-                    <a:lstStyle/>
-                    <a:p>
-                      <a:pPr lvl="0" indent="0" marL="0">
-                        <a:buNone/>
-                      </a:pPr>
-                      <a:r>
-                        <a:rPr/>
-                        <a:t>30</a:t>
-                      </a:r>
-                    </a:p>
-                  </a:txBody>
-                </a:tc>
-                <a:tc>
-                  <a:txBody>
-                    <a:bodyPr/>
-                    <a:lstStyle/>
-                    <a:p>
-                      <a:pPr lvl="0" indent="0" marL="0">
-                        <a:buNone/>
-                      </a:pPr>
-                      <a:r>
-                        <a:rPr/>
-                        <a:t>8.310650</a:t>
-                      </a:r>
-                    </a:p>
-                  </a:txBody>
-                </a:tc>
-                <a:tc>
-                  <a:txBody>
-                    <a:bodyPr/>
-                    <a:lstStyle/>
-                    <a:p>
-                      <a:pPr lvl="0" indent="0" marL="0">
-                        <a:buNone/>
-                      </a:pPr>
-                      <a:r>
-                        <a:rPr/>
-                        <a:t>1.2163277</a:t>
-                      </a:r>
-                    </a:p>
-                  </a:txBody>
-                </a:tc>
-                <a:tc>
-                  <a:txBody>
-                    <a:bodyPr/>
-                    <a:lstStyle/>
-                    <a:p>
-                      <a:pPr lvl="0" indent="0" marL="0">
-                        <a:buNone/>
-                      </a:pPr>
-                      <a:r>
-                        <a:rPr/>
-                        <a:t>8.449779</a:t>
-                      </a:r>
-                    </a:p>
-                  </a:txBody>
-                </a:tc>
-                <a:tc>
-                  <a:txBody>
-                    <a:bodyPr/>
-                    <a:lstStyle/>
-                    <a:p>
-                      <a:pPr lvl="0" indent="0" marL="0">
-                        <a:buNone/>
-                      </a:pPr>
-                      <a:r>
-                        <a:rPr/>
-                        <a:t>0.7984322</a:t>
-                      </a:r>
-                    </a:p>
-                  </a:txBody>
-                </a:tc>
-                <a:tc>
-                  <a:txBody>
-                    <a:bodyPr/>
-                    <a:lstStyle/>
-                    <a:p>
-                      <a:pPr lvl="0" indent="0" marL="0">
-                        <a:buNone/>
-                      </a:pPr>
-                      <a:r>
-                        <a:rPr/>
-                        <a:t>5.789367</a:t>
-                      </a:r>
-                    </a:p>
-                  </a:txBody>
-                </a:tc>
-                <a:tc>
-                  <a:txBody>
-                    <a:bodyPr/>
-                    <a:lstStyle/>
-                    <a:p>
-                      <a:pPr lvl="0" indent="0" marL="0">
-                        <a:buNone/>
-                      </a:pPr>
-                      <a:r>
-                        <a:rPr/>
-                        <a:t>10.691714</a:t>
-                      </a:r>
-                    </a:p>
-                  </a:txBody>
-                </a:tc>
-                <a:tc>
-                  <a:txBody>
-                    <a:bodyPr/>
-                    <a:lstStyle/>
-                    <a:p>
-                      <a:pPr lvl="0" indent="0" marL="0">
-                        <a:buNone/>
-                      </a:pPr>
-                      <a:r>
-                        <a:rPr/>
-                        <a:t>-0.2000572</a:t>
-                      </a:r>
-                    </a:p>
-                  </a:txBody>
-                </a:tc>
-                <a:tc>
-                  <a:txBody>
-                    <a:bodyPr/>
-                    <a:lstStyle/>
-                    <a:p>
-                      <a:pPr lvl="0" indent="0" marL="0">
-                        <a:buNone/>
-                      </a:pPr>
-                      <a:r>
-                        <a:rPr/>
-                        <a:t>0.05681082</a:t>
-                      </a:r>
-                    </a:p>
-                  </a:txBody>
-                </a:tc>
-                <a:tc>
-                  <a:txBody>
-                    <a:bodyPr/>
-                    <a:lstStyle/>
-                    <a:p>
-                      <a:pPr lvl="0" indent="0" marL="0">
-                        <a:buNone/>
-                      </a:pPr>
-                      <a:r>
-                        <a:rPr/>
-                        <a:t>0</a:t>
-                      </a:r>
-                    </a:p>
-                  </a:txBody>
-                </a:tc>
-              </a:tr>
-              <a:tr h="0">
-                <a:tc>
-                  <a:txBody>
-                    <a:bodyPr/>
-                    <a:lstStyle/>
-                    <a:p>
-                      <a:pPr lvl="0" indent="0" marL="0">
-                        <a:buNone/>
-                      </a:pPr>
-                      <a:r>
-                        <a:rPr/>
-                        <a:t>dog</a:t>
-                      </a:r>
-                    </a:p>
-                  </a:txBody>
-                </a:tc>
-                <a:tc>
-                  <a:txBody>
-                    <a:bodyPr/>
-                    <a:lstStyle/>
-                    <a:p>
-                      <a:pPr lvl="0" indent="0" marL="0">
-                        <a:buNone/>
-                      </a:pPr>
-                      <a:r>
-                        <a:rPr/>
-                        <a:t>body</a:t>
-                      </a:r>
-                    </a:p>
-                  </a:txBody>
-                </a:tc>
-                <a:tc>
-                  <a:txBody>
-                    <a:bodyPr/>
-                    <a:lstStyle/>
-                    <a:p>
-                      <a:pPr lvl="0" indent="0" marL="0">
-                        <a:buNone/>
-                      </a:pPr>
-                      <a:r>
-                        <a:rPr/>
-                        <a:t>30</a:t>
-                      </a:r>
-                    </a:p>
-                  </a:txBody>
-                </a:tc>
-                <a:tc>
-                  <a:txBody>
-                    <a:bodyPr/>
-                    <a:lstStyle/>
-                    <a:p>
-                      <a:pPr lvl="0" indent="0" marL="0">
-                        <a:buNone/>
-                      </a:pPr>
-                      <a:r>
-                        <a:rPr/>
-                        <a:t>8.575175</a:t>
-                      </a:r>
-                    </a:p>
-                  </a:txBody>
-                </a:tc>
-                <a:tc>
-                  <a:txBody>
-                    <a:bodyPr/>
-                    <a:lstStyle/>
-                    <a:p>
-                      <a:pPr lvl="0" indent="0" marL="0">
-                        <a:buNone/>
-                      </a:pPr>
-                      <a:r>
-                        <a:rPr/>
-                        <a:t>0.9698645</a:t>
-                      </a:r>
-                    </a:p>
-                  </a:txBody>
-                </a:tc>
-                <a:tc>
-                  <a:txBody>
-                    <a:bodyPr/>
-                    <a:lstStyle/>
-                    <a:p>
-                      <a:pPr lvl="0" indent="0" marL="0">
-                        <a:buNone/>
-                      </a:pPr>
-                      <a:r>
-                        <a:rPr/>
-                        <a:t>8.516068</a:t>
-                      </a:r>
-                    </a:p>
-                  </a:txBody>
-                </a:tc>
-                <a:tc>
-                  <a:txBody>
-                    <a:bodyPr/>
-                    <a:lstStyle/>
-                    <a:p>
-                      <a:pPr lvl="0" indent="0" marL="0">
-                        <a:buNone/>
-                      </a:pPr>
-                      <a:r>
-                        <a:rPr/>
-                        <a:t>1.0683436</a:t>
-                      </a:r>
-                    </a:p>
-                  </a:txBody>
-                </a:tc>
-                <a:tc>
-                  <a:txBody>
-                    <a:bodyPr/>
-                    <a:lstStyle/>
-                    <a:p>
-                      <a:pPr lvl="0" indent="0" marL="0">
-                        <a:buNone/>
-                      </a:pPr>
-                      <a:r>
-                        <a:rPr/>
-                        <a:t>6.885961</a:t>
-                      </a:r>
-                    </a:p>
-                  </a:txBody>
-                </a:tc>
-                <a:tc>
-                  <a:txBody>
-                    <a:bodyPr/>
-                    <a:lstStyle/>
-                    <a:p>
-                      <a:pPr lvl="0" indent="0" marL="0">
-                        <a:buNone/>
-                      </a:pPr>
-                      <a:r>
-                        <a:rPr/>
-                        <a:t>10.958060</a:t>
-                      </a:r>
-                    </a:p>
-                  </a:txBody>
-                </a:tc>
-                <a:tc>
-                  <a:txBody>
-                    <a:bodyPr/>
-                    <a:lstStyle/>
-                    <a:p>
-                      <a:pPr lvl="0" indent="0" marL="0">
-                        <a:buNone/>
-                      </a:pPr>
-                      <a:r>
-                        <a:rPr/>
-                        <a:t>0.1215120</a:t>
-                      </a:r>
-                    </a:p>
-                  </a:txBody>
-                </a:tc>
-                <a:tc>
-                  <a:txBody>
-                    <a:bodyPr/>
-                    <a:lstStyle/>
-                    <a:p>
-                      <a:pPr lvl="0" indent="0" marL="0">
-                        <a:buNone/>
-                      </a:pPr>
-                      <a:r>
-                        <a:rPr/>
-                        <a:t>0.02236201</a:t>
-                      </a:r>
-                    </a:p>
-                  </a:txBody>
-                </a:tc>
-                <a:tc>
-                  <a:txBody>
-                    <a:bodyPr/>
-                    <a:lstStyle/>
-                    <a:p>
-                      <a:pPr lvl="0" indent="0" marL="0">
-                        <a:buNone/>
-                      </a:pPr>
-                      <a:r>
-                        <a:rPr/>
-                        <a:t>0</a:t>
-                      </a:r>
-                    </a:p>
-                  </a:txBody>
-                </a:tc>
-              </a:tr>
-            </a:tbl>
-          </a:graphicData>
-        </a:graphic>
-      </p:graphicFrame>
+        </p:nvSpPr>
+        <p:spPr/>
+        <p:txBody>
+          <a:bodyPr/>
+          <a:lstStyle/>
+          <a:p>
+            <a:pPr lvl="0" indent="0">
+              <a:buNone/>
+            </a:pPr>
+            <a:r>
+              <a:rPr>
+                <a:latin typeface="Courier"/>
+              </a:rPr>
+              <a:t>* 1–4 = Serious Crime; 6–10 = Not Serious Crime; 5 = missing.
+RECODE serious
+  (1 THRU 4 = 1)
+  (5 = SYSMIS)
+  (6 THRU 10 = 2)
+  INTO serious_cat.
+EXECUTE.</a:t>
+            </a:r>
+          </a:p>
+        </p:txBody>
+      </p:sp>
     </p:spTree>
   </p:cSld>
 </p:sld>
@@ -4364,7 +5321,46 @@
             </a:pPr>
             <a:r>
               <a:rPr/>
-              <a:t>What the ANOVA Tells Us (continued)</a:t>
+              <a:t>12 Run the jury chi-square</a:t>
+            </a:r>
+          </a:p>
+        </p:txBody>
+      </p:sp>
+      <p:sp>
+        <p:nvSpPr>
+          <p:cNvPr id="3" name="Content Placeholder 2"/>
+          <p:cNvSpPr>
+            <a:spLocks noGrp="1"/>
+          </p:cNvSpPr>
+          <p:nvPr>
+            <p:ph idx="1"/>
+          </p:nvPr>
+        </p:nvSpPr>
+        <p:spPr/>
+        <p:txBody>
+          <a:bodyPr/>
+          <a:lstStyle/>
+          <a:p>
+            <a:pPr lvl="0" indent="0">
+              <a:buNone/>
+            </a:pPr>
+            <a:r>
+              <a:rPr>
+                <a:latin typeface="Courier"/>
+              </a:rPr>
+              <a:t>CROSSTABS
+  /TABLES=attr BY serious_cat
+  /STATISTICS=CHISQ PHI
+  /CELLS=COUNT EXPECTED ROW COLUMN.</a:t>
+            </a:r>
+          </a:p>
+          <a:p>
+            <a:pPr lvl="0" indent="0" marL="0">
+              <a:buNone/>
+            </a:pPr>
+            <a:r>
+              <a:rPr/>
+              <a:t>Read the full table and omnibus χ² before filtering to any 2 × 2 pair.</a:t>
             </a:r>
           </a:p>
         </p:txBody>
@@ -4401,19 +5397,11 @@
             <p:ph type="title"/>
           </p:nvPr>
         </p:nvSpPr>
-        <p:spPr bwMode="blackWhite">
+        <p:spPr>
           <a:xfrm>
-            <a:off x="1097280" y="2386744"/>
-            <a:ext cx="9997440" cy="1645920"/>
+            <a:off x="1097280" y="964692"/>
+            <a:ext cx="9997440" cy="1188720"/>
           </a:xfrm>
-          <a:solidFill>
-            <a:srgbClr val="FFFFFF"/>
-          </a:solidFill>
-          <a:ln w="38100">
-            <a:solidFill>
-              <a:srgbClr val="404040"/>
-            </a:solidFill>
-          </a:ln>
         </p:spPr>
         <p:txBody>
           <a:bodyPr/>
@@ -4424,7 +5412,68 @@
             </a:pPr>
             <a:r>
               <a:rPr/>
-              <a:t>Your Turn</a:t>
+              <a:t>13 Follow up with 2-by-2 tables</a:t>
+            </a:r>
+          </a:p>
+        </p:txBody>
+      </p:sp>
+      <p:sp>
+        <p:nvSpPr>
+          <p:cNvPr id="3" name="Content Placeholder 2"/>
+          <p:cNvSpPr>
+            <a:spLocks noGrp="1"/>
+          </p:cNvSpPr>
+          <p:nvPr>
+            <p:ph idx="1"/>
+          </p:nvPr>
+        </p:nvSpPr>
+        <p:spPr/>
+        <p:txBody>
+          <a:bodyPr/>
+          <a:lstStyle/>
+          <a:p>
+            <a:pPr lvl="0" indent="-457200" marL="457200">
+              <a:buAutoNum type="arabicPeriod"/>
+            </a:pPr>
+            <a:r>
+              <a:rPr/>
+              <a:t>Restore the full selected jury sample.</a:t>
+            </a:r>
+          </a:p>
+          <a:p>
+            <a:pPr lvl="0" indent="-457200" marL="457200">
+              <a:buAutoNum type="arabicPeriod"/>
+            </a:pPr>
+            <a:r>
+              <a:rPr/>
+              <a:t>Keep only one planned pair of attractiveness levels.</a:t>
+            </a:r>
+          </a:p>
+          <a:p>
+            <a:pPr lvl="0" indent="-457200" marL="457200">
+              <a:buAutoNum type="arabicPeriod"/>
+            </a:pPr>
+            <a:r>
+              <a:rPr/>
+              <a:t>Rerun the same crosstab syntax.</a:t>
+            </a:r>
+          </a:p>
+          <a:p>
+            <a:pPr lvl="0" indent="-457200" marL="457200">
+              <a:buAutoNum type="arabicPeriod"/>
+            </a:pPr>
+            <a:r>
+              <a:rPr/>
+              <a:t>Compare the result with the corrected criterion.</a:t>
+            </a:r>
+          </a:p>
+          <a:p>
+            <a:pPr lvl="0" indent="-457200" marL="457200">
+              <a:buAutoNum type="arabicPeriod"/>
+            </a:pPr>
+            <a:r>
+              <a:rPr/>
+              <a:t>Restore cases before the next pair.</a:t>
             </a:r>
           </a:p>
         </p:txBody>
@@ -4476,7 +5525,7 @@
             </a:pPr>
             <a:r>
               <a:rPr/>
-              <a:t>RH3 &amp; RH4: On Your Own (or with a neighbor)</a:t>
+              <a:t>14 Repeat with new datasets</a:t>
             </a:r>
           </a:p>
         </p:txBody>
@@ -4496,71 +5545,42 @@
           <a:bodyPr/>
           <a:lstStyle/>
           <a:p>
+            <a:pPr lvl="0"/>
+            <a:r>
+              <a:rPr b="1"/>
+              <a:t>Football:</a:t>
+            </a:r>
+            <a:r>
+              <a:rPr/>
+              <a:t> k-group ANOVA on hippocampal volume</a:t>
+            </a:r>
+          </a:p>
+          <a:p>
+            <a:pPr lvl="0"/>
+            <a:r>
+              <a:rPr b="1"/>
+              <a:t>Tips:</a:t>
+            </a:r>
+            <a:r>
+              <a:rPr/>
+              <a:t> k-group chi-square on card condition and tipping</a:t>
+            </a:r>
+          </a:p>
+          <a:p>
             <a:pPr lvl="0" indent="0" marL="0">
               <a:buNone/>
             </a:pPr>
             <a:r>
               <a:rPr/>
-              <a:t>Same procedures, new datasets:</a:t>
-            </a:r>
-          </a:p>
-          <a:p>
-            <a:pPr lvl="0"/>
+              <a:t>For each: </a:t>
+            </a:r>
             <a:r>
               <a:rPr b="1"/>
-              <a:t>RH3:</a:t>
+              <a:t>prepare → omnibus → pairwise → effect size → RH decision</a:t>
             </a:r>
             <a:r>
               <a:rPr/>
-              <a:t> Football study – k-group ANOVA with </a:t>
-            </a:r>
-            <a:r>
-              <a:rPr>
-                <a:latin typeface="Courier"/>
-              </a:rPr>
-              <a:t>football_data.sav</a:t>
-            </a:r>
-          </a:p>
-          <a:p>
-            <a:pPr lvl="0"/>
-            <a:r>
-              <a:rPr b="1"/>
-              <a:t>RH4:</a:t>
-            </a:r>
-            <a:r>
-              <a:rPr/>
-              <a:t> Tip Jokes study – k-group Chi-Square with </a:t>
-            </a:r>
-            <a:r>
-              <a:rPr>
-                <a:latin typeface="Courier"/>
-              </a:rPr>
-              <a:t>tips_data.sav</a:t>
-            </a:r>
-          </a:p>
-          <a:p>
-            <a:pPr lvl="0" indent="0" marL="0">
-              <a:buNone/>
-            </a:pPr>
-            <a:r>
-              <a:rPr/>
-              <a:t>Record your answers on the </a:t>
-            </a:r>
-            <a:r>
-              <a:rPr b="1"/>
-              <a:t>Multi-Group Coding &amp; Analyses worksheet</a:t>
-            </a:r>
-            <a:r>
-              <a:rPr/>
-              <a:t> and verify each one in the </a:t>
-            </a:r>
-            <a:r>
-              <a:rPr b="1"/>
-              <a:t>homework checker</a:t>
-            </a:r>
-            <a:r>
-              <a:rPr/>
-              <a:t> before you leave.</a:t>
+              <a:t>.</a:t>
             </a:r>
           </a:p>
         </p:txBody>
@@ -4612,7 +5632,89 @@
             </a:pPr>
             <a:r>
               <a:rPr/>
-              <a:t>Assignments &amp; Reminders</a:t>
+              <a:t>15 Make the APA descriptives table</a:t>
+            </a:r>
+          </a:p>
+        </p:txBody>
+      </p:sp>
+      <p:pic>
+        <p:nvPicPr>
+          <p:cNvPr descr="APA-style table of recommended prison-sentence means and standard deviations for beautiful, average, and unattractive defendants" id="0" name="Picture 1"/>
+          <p:cNvPicPr>
+            <a:picLocks noGrp="1" noChangeAspect="1"/>
+          </p:cNvPicPr>
+          <p:nvPr/>
+        </p:nvPicPr>
+        <p:blipFill>
+          <a:blip r:embed="rId3"/>
+          <a:stretch>
+            <a:fillRect/>
+          </a:stretch>
+        </p:blipFill>
+        <p:spPr bwMode="auto">
+          <a:xfrm>
+            <a:off x="1092200" y="2743200"/>
+            <a:ext cx="9994900" cy="2870200"/>
+          </a:xfrm>
+          <a:prstGeom prst="rect">
+            <a:avLst/>
+          </a:prstGeom>
+          <a:noFill/>
+          <a:ln w="9525">
+            <a:noFill/>
+            <a:headEnd/>
+            <a:tailEnd/>
+          </a:ln>
+        </p:spPr>
+      </p:pic>
+    </p:spTree>
+  </p:cSld>
+</p:sld>
+</file>
+
+<file path=ppt/slides/slide17.xml><?xml version="1.0" encoding="utf-8"?>
+<p:sld xmlns:a="http://schemas.openxmlformats.org/drawingml/2006/main" xmlns:r="http://schemas.openxmlformats.org/officeDocument/2006/relationships" xmlns:p="http://schemas.openxmlformats.org/presentationml/2006/main">
+  <p:cSld>
+    <p:spTree>
+      <p:nvGrpSpPr>
+        <p:cNvPr id="1" name=""/>
+        <p:cNvGrpSpPr/>
+        <p:nvPr/>
+      </p:nvGrpSpPr>
+      <p:grpSpPr>
+        <a:xfrm>
+          <a:off x="0" y="0"/>
+          <a:ext cx="0" cy="0"/>
+          <a:chOff x="0" y="0"/>
+          <a:chExt cx="0" cy="0"/>
+        </a:xfrm>
+      </p:grpSpPr>
+      <p:sp>
+        <p:nvSpPr>
+          <p:cNvPr id="2" name="Title 1"/>
+          <p:cNvSpPr>
+            <a:spLocks noGrp="1"/>
+          </p:cNvSpPr>
+          <p:nvPr>
+            <p:ph type="title"/>
+          </p:nvPr>
+        </p:nvSpPr>
+        <p:spPr>
+          <a:xfrm>
+            <a:off x="1097280" y="964692"/>
+            <a:ext cx="9997440" cy="1188720"/>
+          </a:xfrm>
+        </p:spPr>
+        <p:txBody>
+          <a:bodyPr/>
+          <a:lstStyle/>
+          <a:p>
+            <a:pPr lvl="0" indent="0" marL="0">
+              <a:buNone/>
+            </a:pPr>
+            <a:r>
+              <a:rPr/>
+              <a:t>16 Write the full result package</a:t>
             </a:r>
           </a:p>
         </p:txBody>
@@ -4632,35 +5734,48 @@
           <a:bodyPr/>
           <a:lstStyle/>
           <a:p>
-            <a:pPr lvl="0" indent="0" marL="0">
-              <a:buNone/>
+            <a:pPr lvl="0" indent="-457200" marL="457200">
+              <a:buAutoNum type="arabicPeriod"/>
             </a:pPr>
             <a:r>
-              <a:rPr b="1"/>
-              <a:t>Given this week:</a:t>
-            </a:r>
-          </a:p>
-          <a:p>
-            <a:pPr lvl="0"/>
-            <a:r>
               <a:rPr/>
-              <a:t>Multi-Group Coding &amp; Analysis Worksheet</a:t>
-            </a:r>
-          </a:p>
-          <a:p>
-            <a:pPr lvl="0"/>
+              <a:t>Refer to the descriptive table or figure.</a:t>
+            </a:r>
+          </a:p>
+          <a:p>
+            <a:pPr lvl="0" indent="-457200" marL="457200">
+              <a:buAutoNum type="arabicPeriod"/>
+            </a:pPr>
             <a:r>
               <a:rPr/>
-              <a:t>Complete Research Project Report by the end of lab during the week of Nov 21</a:t>
-            </a:r>
-          </a:p>
-          <a:p>
-            <a:pPr lvl="0" indent="0" marL="0">
-              <a:buNone/>
+              <a:t>Report the omnibus test and effect size.</a:t>
+            </a:r>
+          </a:p>
+          <a:p>
+            <a:pPr lvl="0" indent="-457200" marL="457200">
+              <a:buAutoNum type="arabicPeriod"/>
             </a:pPr>
             <a:r>
               <a:rPr/>
-              <a:t>Submit to your lab section in Canvas by 11:59pm the day before your lab meets.</a:t>
+              <a:t>Name the follow-up method and corrected criterion.</a:t>
+            </a:r>
+          </a:p>
+          <a:p>
+            <a:pPr lvl="0" indent="-457200" marL="457200">
+              <a:buAutoNum type="arabicPeriod"/>
+            </a:pPr>
+            <a:r>
+              <a:rPr/>
+              <a:t>Describe each planned pair and RH decision.</a:t>
+            </a:r>
+          </a:p>
+          <a:p>
+            <a:pPr lvl="0" indent="-457200" marL="457200">
+              <a:buAutoNum type="arabicPeriod"/>
+            </a:pPr>
+            <a:r>
+              <a:rPr/>
+              <a:t>Add the all-green checker screenshot.</a:t>
             </a:r>
           </a:p>
         </p:txBody>
@@ -4712,77 +5827,353 @@
             </a:pPr>
             <a:r>
               <a:rPr/>
-              <a:t>Today’s Tasks</a:t>
-            </a:r>
-          </a:p>
-        </p:txBody>
-      </p:sp>
-      <p:sp>
-        <p:nvSpPr>
-          <p:cNvPr id="3" name="Content Placeholder 2"/>
-          <p:cNvSpPr>
-            <a:spLocks noGrp="1"/>
-          </p:cNvSpPr>
-          <p:nvPr>
-            <p:ph idx="1"/>
-          </p:nvPr>
-        </p:nvSpPr>
-        <p:spPr/>
-        <p:txBody>
-          <a:bodyPr/>
-          <a:lstStyle/>
-          <a:p>
-            <a:pPr lvl="0" indent="-457200" marL="457200">
-              <a:buAutoNum type="arabicPeriod"/>
-            </a:pPr>
-            <a:r>
-              <a:rPr b="1"/>
-              <a:t>Get set up</a:t>
-            </a:r>
-            <a:r>
-              <a:rPr/>
-              <a:t> – open the materials linked on the next slides</a:t>
-            </a:r>
-          </a:p>
-          <a:p>
-            <a:pPr lvl="0" indent="-457200" marL="457200">
-              <a:buAutoNum type="arabicPeriod"/>
-            </a:pPr>
-            <a:r>
-              <a:rPr b="1"/>
-              <a:t>Walkthrough together</a:t>
-            </a:r>
-            <a:r>
-              <a:rPr/>
-              <a:t> – Mock Jury study: k-group ANOVA (RH1) and Chi-Square (RH2)</a:t>
-            </a:r>
-          </a:p>
-          <a:p>
-            <a:pPr lvl="0" indent="-457200" marL="457200">
-              <a:buAutoNum type="arabicPeriod"/>
-            </a:pPr>
-            <a:r>
-              <a:rPr b="1"/>
-              <a:t>Your turn</a:t>
-            </a:r>
-            <a:r>
-              <a:rPr/>
-              <a:t> – Football study (RH3) and Tip Jokes study (RH4)</a:t>
-            </a:r>
-          </a:p>
-          <a:p>
-            <a:pPr lvl="0" indent="-457200" marL="457200">
-              <a:buAutoNum type="arabicPeriod"/>
-            </a:pPr>
-            <a:r>
-              <a:rPr b="1"/>
-              <a:t>Wrap up</a:t>
-            </a:r>
-            <a:r>
-              <a:rPr/>
-              <a:t> – worksheet, homework checker, and assignments</a:t>
-            </a:r>
-          </a:p>
+              <a:t>1 Download the Lab 11 data</a:t>
+            </a:r>
+          </a:p>
+        </p:txBody>
+      </p:sp>
+      <p:sp>
+        <p:nvSpPr>
+          <p:cNvPr id="1001" name="card-steel" descr="card: Worksheet. Download worksheet"/>
+          <p:cNvSpPr/>
+          <p:nvPr/>
+        </p:nvSpPr>
+        <p:spPr>
+          <a:xfrm>
+            <a:off x="1097280" y="2633472"/>
+            <a:ext cx="4924044" cy="1005840"/>
+          </a:xfrm>
+          <a:prstGeom prst="roundRect">
+            <a:avLst>
+              <a:gd name="adj" fmla="val 6000"/>
+            </a:avLst>
+          </a:prstGeom>
+          <a:solidFill>
+            <a:srgbClr val="FEFDFA"/>
+          </a:solidFill>
+          <a:ln w="19050">
+            <a:solidFill>
+              <a:srgbClr val="CCCCCC"/>
+            </a:solidFill>
+          </a:ln>
+        </p:spPr>
+        <p:txBody>
+          <a:bodyPr lIns="182880" tIns="182880" rIns="182880" bIns="182880" anchor="t" wrap="square">
+            <a:normAutofit/>
+          </a:bodyPr>
+          <a:lstStyle/>
+          <a:p>
+            <a:pPr algn="l"/>
+            <a:r>
+              <a:rPr lang="en-US" sz="2200" b="1" dirty="0">
+                <a:solidFill>
+                  <a:srgbClr val="010B13"/>
+                </a:solidFill>
+              </a:rPr>
+              <a:t>Worksheet</a:t>
+            </a:r>
+          </a:p>
+          <a:p>
+            <a:pPr algn="l"/>
+            <a:r>
+              <a:rPr lang="en-US" sz="2000" b="0" dirty="0">
+                <a:solidFill>
+                  <a:srgbClr val="010B13"/>
+                </a:solidFill>
+                <a:hlinkClick r:id="rId3"/>
+              </a:rPr>
+              <a:t>Download worksheet</a:t>
+            </a:r>
+          </a:p>
+        </p:txBody>
+      </p:sp>
+      <p:sp>
+        <p:nvSpPr>
+          <p:cNvPr id="1002" name="card-rail" descr=""/>
+          <p:cNvSpPr/>
+          <p:nvPr/>
+        </p:nvSpPr>
+        <p:spPr>
+          <a:xfrm>
+            <a:off x="1097280" y="2633472"/>
+            <a:ext cx="54864" cy="1005840"/>
+          </a:xfrm>
+          <a:prstGeom prst="roundRect">
+            <a:avLst>
+              <a:gd name="adj" fmla="val 20000"/>
+            </a:avLst>
+          </a:prstGeom>
+          <a:solidFill>
+            <a:srgbClr val="010B13"/>
+          </a:solidFill>
+          <a:ln>
+            <a:noFill/>
+          </a:ln>
+        </p:spPr>
+        <p:txBody>
+          <a:bodyPr lIns="182880" tIns="182880" rIns="182880" bIns="182880" anchor="t" wrap="square">
+            <a:normAutofit/>
+          </a:bodyPr>
+          <a:lstStyle/>
+          <a:p/>
+        </p:txBody>
+      </p:sp>
+      <p:sp>
+        <p:nvSpPr>
+          <p:cNvPr id="1003" name="card-steel" descr="card: Walkthrough data. Download jury data"/>
+          <p:cNvSpPr/>
+          <p:nvPr/>
+        </p:nvSpPr>
+        <p:spPr>
+          <a:xfrm>
+            <a:off x="6167628" y="2633472"/>
+            <a:ext cx="4924044" cy="1005840"/>
+          </a:xfrm>
+          <a:prstGeom prst="roundRect">
+            <a:avLst>
+              <a:gd name="adj" fmla="val 6000"/>
+            </a:avLst>
+          </a:prstGeom>
+          <a:solidFill>
+            <a:srgbClr val="FEFDFA"/>
+          </a:solidFill>
+          <a:ln w="19050">
+            <a:solidFill>
+              <a:srgbClr val="CCCCCC"/>
+            </a:solidFill>
+          </a:ln>
+        </p:spPr>
+        <p:txBody>
+          <a:bodyPr lIns="182880" tIns="182880" rIns="182880" bIns="182880" anchor="t" wrap="square">
+            <a:normAutofit/>
+          </a:bodyPr>
+          <a:lstStyle/>
+          <a:p>
+            <a:pPr algn="l"/>
+            <a:r>
+              <a:rPr lang="en-US" sz="2200" b="1" dirty="0">
+                <a:solidFill>
+                  <a:srgbClr val="010B13"/>
+                </a:solidFill>
+              </a:rPr>
+              <a:t>Walkthrough data</a:t>
+            </a:r>
+          </a:p>
+          <a:p>
+            <a:pPr algn="l"/>
+            <a:r>
+              <a:rPr lang="en-US" sz="2000" b="0" dirty="0">
+                <a:solidFill>
+                  <a:srgbClr val="010B13"/>
+                </a:solidFill>
+                <a:hlinkClick r:id="rId4"/>
+              </a:rPr>
+              <a:t>Download jury data</a:t>
+            </a:r>
+          </a:p>
+        </p:txBody>
+      </p:sp>
+      <p:sp>
+        <p:nvSpPr>
+          <p:cNvPr id="1004" name="card-rail" descr=""/>
+          <p:cNvSpPr/>
+          <p:nvPr/>
+        </p:nvSpPr>
+        <p:spPr>
+          <a:xfrm>
+            <a:off x="6167628" y="2633472"/>
+            <a:ext cx="54864" cy="1005840"/>
+          </a:xfrm>
+          <a:prstGeom prst="roundRect">
+            <a:avLst>
+              <a:gd name="adj" fmla="val 20000"/>
+            </a:avLst>
+          </a:prstGeom>
+          <a:solidFill>
+            <a:srgbClr val="010B13"/>
+          </a:solidFill>
+          <a:ln>
+            <a:noFill/>
+          </a:ln>
+        </p:spPr>
+        <p:txBody>
+          <a:bodyPr lIns="182880" tIns="182880" rIns="182880" bIns="182880" anchor="t" wrap="square">
+            <a:normAutofit/>
+          </a:bodyPr>
+          <a:lstStyle/>
+          <a:p/>
+        </p:txBody>
+      </p:sp>
+      <p:sp>
+        <p:nvSpPr>
+          <p:cNvPr id="1005" name="card-steel" descr="card: ANOVA practice. Download football data"/>
+          <p:cNvSpPr/>
+          <p:nvPr/>
+        </p:nvSpPr>
+        <p:spPr>
+          <a:xfrm>
+            <a:off x="1097280" y="3785616"/>
+            <a:ext cx="4924044" cy="1005840"/>
+          </a:xfrm>
+          <a:prstGeom prst="roundRect">
+            <a:avLst>
+              <a:gd name="adj" fmla="val 6000"/>
+            </a:avLst>
+          </a:prstGeom>
+          <a:solidFill>
+            <a:srgbClr val="FEFDFA"/>
+          </a:solidFill>
+          <a:ln w="19050">
+            <a:solidFill>
+              <a:srgbClr val="CCCCCC"/>
+            </a:solidFill>
+          </a:ln>
+        </p:spPr>
+        <p:txBody>
+          <a:bodyPr lIns="182880" tIns="182880" rIns="182880" bIns="182880" anchor="t" wrap="square">
+            <a:normAutofit/>
+          </a:bodyPr>
+          <a:lstStyle/>
+          <a:p>
+            <a:pPr algn="l"/>
+            <a:r>
+              <a:rPr lang="en-US" sz="2200" b="1" dirty="0">
+                <a:solidFill>
+                  <a:srgbClr val="010B13"/>
+                </a:solidFill>
+              </a:rPr>
+              <a:t>ANOVA practice</a:t>
+            </a:r>
+          </a:p>
+          <a:p>
+            <a:pPr algn="l"/>
+            <a:r>
+              <a:rPr lang="en-US" sz="2000" b="0" dirty="0">
+                <a:solidFill>
+                  <a:srgbClr val="010B13"/>
+                </a:solidFill>
+                <a:hlinkClick r:id="rId5"/>
+              </a:rPr>
+              <a:t>Download football data</a:t>
+            </a:r>
+          </a:p>
+        </p:txBody>
+      </p:sp>
+      <p:sp>
+        <p:nvSpPr>
+          <p:cNvPr id="1006" name="card-rail" descr=""/>
+          <p:cNvSpPr/>
+          <p:nvPr/>
+        </p:nvSpPr>
+        <p:spPr>
+          <a:xfrm>
+            <a:off x="1097280" y="3785616"/>
+            <a:ext cx="54864" cy="1005840"/>
+          </a:xfrm>
+          <a:prstGeom prst="roundRect">
+            <a:avLst>
+              <a:gd name="adj" fmla="val 20000"/>
+            </a:avLst>
+          </a:prstGeom>
+          <a:solidFill>
+            <a:srgbClr val="010B13"/>
+          </a:solidFill>
+          <a:ln>
+            <a:noFill/>
+          </a:ln>
+        </p:spPr>
+        <p:txBody>
+          <a:bodyPr lIns="182880" tIns="182880" rIns="182880" bIns="182880" anchor="t" wrap="square">
+            <a:normAutofit/>
+          </a:bodyPr>
+          <a:lstStyle/>
+          <a:p/>
+        </p:txBody>
+      </p:sp>
+      <p:sp>
+        <p:nvSpPr>
+          <p:cNvPr id="1007" name="card-steel" descr="card: Chi-square practice. Download tips data"/>
+          <p:cNvSpPr/>
+          <p:nvPr/>
+        </p:nvSpPr>
+        <p:spPr>
+          <a:xfrm>
+            <a:off x="6167628" y="3785616"/>
+            <a:ext cx="4924044" cy="1005840"/>
+          </a:xfrm>
+          <a:prstGeom prst="roundRect">
+            <a:avLst>
+              <a:gd name="adj" fmla="val 6000"/>
+            </a:avLst>
+          </a:prstGeom>
+          <a:solidFill>
+            <a:srgbClr val="FEFDFA"/>
+          </a:solidFill>
+          <a:ln w="19050">
+            <a:solidFill>
+              <a:srgbClr val="CCCCCC"/>
+            </a:solidFill>
+          </a:ln>
+        </p:spPr>
+        <p:txBody>
+          <a:bodyPr lIns="182880" tIns="182880" rIns="182880" bIns="182880" anchor="t" wrap="square">
+            <a:normAutofit/>
+          </a:bodyPr>
+          <a:lstStyle/>
+          <a:p>
+            <a:pPr algn="l"/>
+            <a:r>
+              <a:rPr lang="en-US" sz="2200" b="1" dirty="0">
+                <a:solidFill>
+                  <a:srgbClr val="010B13"/>
+                </a:solidFill>
+              </a:rPr>
+              <a:t>Chi-square practice</a:t>
+            </a:r>
+          </a:p>
+          <a:p>
+            <a:pPr algn="l"/>
+            <a:r>
+              <a:rPr lang="en-US" sz="2000" b="0" dirty="0">
+                <a:solidFill>
+                  <a:srgbClr val="010B13"/>
+                </a:solidFill>
+                <a:hlinkClick r:id="rId6"/>
+              </a:rPr>
+              <a:t>Download tips data</a:t>
+            </a:r>
+          </a:p>
+        </p:txBody>
+      </p:sp>
+      <p:sp>
+        <p:nvSpPr>
+          <p:cNvPr id="1008" name="card-rail" descr=""/>
+          <p:cNvSpPr/>
+          <p:nvPr/>
+        </p:nvSpPr>
+        <p:spPr>
+          <a:xfrm>
+            <a:off x="6167628" y="3785616"/>
+            <a:ext cx="54864" cy="1005840"/>
+          </a:xfrm>
+          <a:prstGeom prst="roundRect">
+            <a:avLst>
+              <a:gd name="adj" fmla="val 20000"/>
+            </a:avLst>
+          </a:prstGeom>
+          <a:solidFill>
+            <a:srgbClr val="010B13"/>
+          </a:solidFill>
+          <a:ln>
+            <a:noFill/>
+          </a:ln>
+        </p:spPr>
+        <p:txBody>
+          <a:bodyPr lIns="182880" tIns="182880" rIns="182880" bIns="182880" anchor="t" wrap="square">
+            <a:normAutofit/>
+          </a:bodyPr>
+          <a:lstStyle/>
+          <a:p/>
         </p:txBody>
       </p:sp>
     </p:spTree>
@@ -4832,59 +6223,279 @@
             </a:pPr>
             <a:r>
               <a:rPr/>
-              <a:t>What You Need Today</a:t>
-            </a:r>
-          </a:p>
-        </p:txBody>
-      </p:sp>
-      <p:sp>
-        <p:nvSpPr>
-          <p:cNvPr id="3" name="Content Placeholder 2"/>
-          <p:cNvSpPr>
-            <a:spLocks noGrp="1"/>
-          </p:cNvSpPr>
-          <p:nvPr>
-            <p:ph idx="1"/>
-          </p:nvPr>
-        </p:nvSpPr>
-        <p:spPr/>
-        <p:txBody>
-          <a:bodyPr/>
-          <a:lstStyle/>
-          <a:p>
-            <a:pPr lvl="0" indent="0" marL="0">
-              <a:buNone/>
-            </a:pPr>
-            <a:r>
-              <a:rPr/>
-              <a:t>Everything for this week is linked on the next slides – and always on the lab page under </a:t>
-            </a:r>
-            <a:r>
-              <a:rPr b="1"/>
-              <a:t>Handouts &amp; References</a:t>
-            </a:r>
-            <a:r>
-              <a:rPr/>
-              <a:t>.</a:t>
-            </a:r>
-          </a:p>
-          <a:p>
-            <a:pPr lvl="0" indent="0" marL="0">
-              <a:buNone/>
-            </a:pPr>
-            <a:r>
-              <a:rPr/>
-              <a:t>Open these </a:t>
-            </a:r>
-            <a:r>
-              <a:rPr b="1"/>
-              <a:t>before we start</a:t>
-            </a:r>
-            <a:r>
-              <a:rPr/>
-              <a:t> so you can follow along.</a:t>
-            </a:r>
-          </a:p>
+              <a:t>2 Open the Lab 11 guides</a:t>
+            </a:r>
+          </a:p>
+        </p:txBody>
+      </p:sp>
+      <p:sp>
+        <p:nvSpPr>
+          <p:cNvPr id="1009" name="card-steel" descr="card: Analysis guides. k-group ANOVA k-group chi-square"/>
+          <p:cNvSpPr/>
+          <p:nvPr/>
+        </p:nvSpPr>
+        <p:spPr>
+          <a:xfrm>
+            <a:off x="1097280" y="2633472"/>
+            <a:ext cx="3233928" cy="1310640"/>
+          </a:xfrm>
+          <a:prstGeom prst="roundRect">
+            <a:avLst>
+              <a:gd name="adj" fmla="val 6000"/>
+            </a:avLst>
+          </a:prstGeom>
+          <a:solidFill>
+            <a:srgbClr val="FEFDFA"/>
+          </a:solidFill>
+          <a:ln w="19050">
+            <a:solidFill>
+              <a:srgbClr val="CCCCCC"/>
+            </a:solidFill>
+          </a:ln>
+        </p:spPr>
+        <p:txBody>
+          <a:bodyPr lIns="182880" tIns="182880" rIns="182880" bIns="182880" anchor="t" wrap="square">
+            <a:normAutofit/>
+          </a:bodyPr>
+          <a:lstStyle/>
+          <a:p>
+            <a:pPr algn="l"/>
+            <a:r>
+              <a:rPr lang="en-US" sz="2200" b="1" dirty="0">
+                <a:solidFill>
+                  <a:srgbClr val="010B13"/>
+                </a:solidFill>
+              </a:rPr>
+              <a:t>Analysis guides</a:t>
+            </a:r>
+          </a:p>
+          <a:p>
+            <a:pPr algn="l"/>
+            <a:r>
+              <a:rPr lang="en-US" sz="2000" b="0" dirty="0">
+                <a:solidFill>
+                  <a:srgbClr val="010B13"/>
+                </a:solidFill>
+                <a:hlinkClick r:id="rId3"/>
+              </a:rPr>
+              <a:t>k-group ANOVA</a:t>
+            </a:r>
+          </a:p>
+          <a:p>
+            <a:pPr algn="l"/>
+            <a:r>
+              <a:rPr lang="en-US" sz="2000" b="0" dirty="0">
+                <a:solidFill>
+                  <a:srgbClr val="010B13"/>
+                </a:solidFill>
+                <a:hlinkClick r:id="rId4"/>
+              </a:rPr>
+              <a:t>k-group chi-square</a:t>
+            </a:r>
+          </a:p>
+        </p:txBody>
+      </p:sp>
+      <p:sp>
+        <p:nvSpPr>
+          <p:cNvPr id="1010" name="card-rail" descr=""/>
+          <p:cNvSpPr/>
+          <p:nvPr/>
+        </p:nvSpPr>
+        <p:spPr>
+          <a:xfrm>
+            <a:off x="1097280" y="2633472"/>
+            <a:ext cx="54864" cy="1310640"/>
+          </a:xfrm>
+          <a:prstGeom prst="roundRect">
+            <a:avLst>
+              <a:gd name="adj" fmla="val 20000"/>
+            </a:avLst>
+          </a:prstGeom>
+          <a:solidFill>
+            <a:srgbClr val="010B13"/>
+          </a:solidFill>
+          <a:ln>
+            <a:noFill/>
+          </a:ln>
+        </p:spPr>
+        <p:txBody>
+          <a:bodyPr lIns="182880" tIns="182880" rIns="182880" bIns="182880" anchor="t" wrap="square">
+            <a:normAutofit/>
+          </a:bodyPr>
+          <a:lstStyle/>
+          <a:p/>
+        </p:txBody>
+      </p:sp>
+      <p:sp>
+        <p:nvSpPr>
+          <p:cNvPr id="1011" name="card-steel" descr="card: Post-hoc calculator. Download Computator"/>
+          <p:cNvSpPr/>
+          <p:nvPr/>
+        </p:nvSpPr>
+        <p:spPr>
+          <a:xfrm>
+            <a:off x="4477512" y="2633472"/>
+            <a:ext cx="3233928" cy="1341120"/>
+          </a:xfrm>
+          <a:prstGeom prst="roundRect">
+            <a:avLst>
+              <a:gd name="adj" fmla="val 6000"/>
+            </a:avLst>
+          </a:prstGeom>
+          <a:solidFill>
+            <a:srgbClr val="FEFDFA"/>
+          </a:solidFill>
+          <a:ln w="19050">
+            <a:solidFill>
+              <a:srgbClr val="CCCCCC"/>
+            </a:solidFill>
+          </a:ln>
+        </p:spPr>
+        <p:txBody>
+          <a:bodyPr lIns="182880" tIns="182880" rIns="182880" bIns="182880" anchor="t" wrap="square">
+            <a:normAutofit/>
+          </a:bodyPr>
+          <a:lstStyle/>
+          <a:p>
+            <a:pPr algn="l"/>
+            <a:r>
+              <a:rPr lang="en-US" sz="2200" b="1" dirty="0">
+                <a:solidFill>
+                  <a:srgbClr val="010B13"/>
+                </a:solidFill>
+              </a:rPr>
+              <a:t>Post-hoc calculator</a:t>
+            </a:r>
+          </a:p>
+          <a:p>
+            <a:pPr algn="l"/>
+            <a:r>
+              <a:rPr lang="en-US" sz="2000" b="0" dirty="0">
+                <a:solidFill>
+                  <a:srgbClr val="010B13"/>
+                </a:solidFill>
+                <a:hlinkClick r:id="rId5"/>
+              </a:rPr>
+              <a:t>Download Computator</a:t>
+            </a:r>
+          </a:p>
+        </p:txBody>
+      </p:sp>
+      <p:sp>
+        <p:nvSpPr>
+          <p:cNvPr id="1012" name="card-rail" descr=""/>
+          <p:cNvSpPr/>
+          <p:nvPr/>
+        </p:nvSpPr>
+        <p:spPr>
+          <a:xfrm>
+            <a:off x="4477512" y="2633472"/>
+            <a:ext cx="54864" cy="1341120"/>
+          </a:xfrm>
+          <a:prstGeom prst="roundRect">
+            <a:avLst>
+              <a:gd name="adj" fmla="val 20000"/>
+            </a:avLst>
+          </a:prstGeom>
+          <a:solidFill>
+            <a:srgbClr val="010B13"/>
+          </a:solidFill>
+          <a:ln>
+            <a:noFill/>
+          </a:ln>
+        </p:spPr>
+        <p:txBody>
+          <a:bodyPr lIns="182880" tIns="182880" rIns="182880" bIns="182880" anchor="t" wrap="square">
+            <a:normAutofit/>
+          </a:bodyPr>
+          <a:lstStyle/>
+          <a:p/>
+        </p:txBody>
+      </p:sp>
+      <p:sp>
+        <p:nvSpPr>
+          <p:cNvPr id="1013" name="card-steel" descr="card: APA table help. Open templates"/>
+          <p:cNvSpPr/>
+          <p:nvPr/>
+        </p:nvSpPr>
+        <p:spPr>
+          <a:xfrm>
+            <a:off x="7857744" y="2633472"/>
+            <a:ext cx="3233928" cy="1005840"/>
+          </a:xfrm>
+          <a:prstGeom prst="roundRect">
+            <a:avLst>
+              <a:gd name="adj" fmla="val 6000"/>
+            </a:avLst>
+          </a:prstGeom>
+          <a:solidFill>
+            <a:srgbClr val="FEFDFA"/>
+          </a:solidFill>
+          <a:ln w="19050">
+            <a:solidFill>
+              <a:srgbClr val="CCCCCC"/>
+            </a:solidFill>
+          </a:ln>
+        </p:spPr>
+        <p:txBody>
+          <a:bodyPr lIns="182880" tIns="182880" rIns="182880" bIns="182880" anchor="t" wrap="square">
+            <a:normAutofit/>
+          </a:bodyPr>
+          <a:lstStyle/>
+          <a:p>
+            <a:pPr algn="l"/>
+            <a:r>
+              <a:rPr lang="en-US" sz="2200" b="1" dirty="0">
+                <a:solidFill>
+                  <a:srgbClr val="010B13"/>
+                </a:solidFill>
+              </a:rPr>
+              <a:t>APA table help</a:t>
+            </a:r>
+          </a:p>
+          <a:p>
+            <a:pPr algn="l"/>
+            <a:r>
+              <a:rPr lang="en-US" sz="2000" b="0" dirty="0">
+                <a:solidFill>
+                  <a:srgbClr val="010B13"/>
+                </a:solidFill>
+                <a:hlinkClick r:id="rId6"/>
+              </a:rPr>
+              <a:t>Open templates</a:t>
+            </a:r>
+          </a:p>
+        </p:txBody>
+      </p:sp>
+      <p:sp>
+        <p:nvSpPr>
+          <p:cNvPr id="1014" name="card-rail" descr=""/>
+          <p:cNvSpPr/>
+          <p:nvPr/>
+        </p:nvSpPr>
+        <p:spPr>
+          <a:xfrm>
+            <a:off x="7857744" y="2633472"/>
+            <a:ext cx="54864" cy="1005840"/>
+          </a:xfrm>
+          <a:prstGeom prst="roundRect">
+            <a:avLst>
+              <a:gd name="adj" fmla="val 20000"/>
+            </a:avLst>
+          </a:prstGeom>
+          <a:solidFill>
+            <a:srgbClr val="010B13"/>
+          </a:solidFill>
+          <a:ln>
+            <a:noFill/>
+          </a:ln>
+        </p:spPr>
+        <p:txBody>
+          <a:bodyPr lIns="182880" tIns="182880" rIns="182880" bIns="182880" anchor="t" wrap="square">
+            <a:normAutofit/>
+          </a:bodyPr>
+          <a:lstStyle/>
+          <a:p/>
         </p:txBody>
       </p:sp>
     </p:spTree>
@@ -4911,7 +6522,7 @@
       </p:grpSpPr>
       <p:sp>
         <p:nvSpPr>
-          <p:cNvPr id="2" name="Title 1"/>
+          <p:cNvPr id="10" name="Title 9"/>
           <p:cNvSpPr>
             <a:spLocks noGrp="1"/>
           </p:cNvSpPr>
@@ -4919,578 +6530,179 @@
             <p:ph type="title"/>
           </p:nvPr>
         </p:nvSpPr>
-        <p:spPr>
+        <p:spPr/>
+        <p:txBody>
+          <a:bodyPr/>
+          <a:lstStyle/>
+          <a:p>
+            <a:pPr lvl="0" indent="0" marL="0">
+              <a:buNone/>
+            </a:pPr>
+            <a:r>
+              <a:rPr/>
+              <a:t>3 Keep Data and Syntax Editors open</a:t>
+            </a:r>
+          </a:p>
+        </p:txBody>
+      </p:sp>
+      <p:sp>
+        <p:nvSpPr>
+          <p:cNvPr id="3" name="Text Placeholder 2"/>
+          <p:cNvSpPr>
+            <a:spLocks noGrp="1"/>
+          </p:cNvSpPr>
+          <p:nvPr>
+            <p:ph idx="1" type="body"/>
+          </p:nvPr>
+        </p:nvSpPr>
+        <p:spPr/>
+        <p:txBody>
+          <a:bodyPr/>
+          <a:lstStyle/>
+          <a:p>
+            <a:pPr lvl="0" indent="0" marL="0">
+              <a:buNone/>
+            </a:pPr>
+            <a:r>
+              <a:rPr b="1"/>
+              <a:t>Data Editor</a:t>
+            </a:r>
+          </a:p>
+        </p:txBody>
+      </p:sp>
+      <p:pic>
+        <p:nvPicPr>
+          <p:cNvPr descr="Focused SPSS Data Editor image showing spreadsheet columns and the Data View and Variable View tabs" id="0" name="Picture 1"/>
+          <p:cNvPicPr>
+            <a:picLocks noGrp="1" noChangeAspect="1"/>
+          </p:cNvPicPr>
+          <p:nvPr/>
+        </p:nvPicPr>
+        <p:blipFill>
+          <a:blip r:embed="rId3"/>
+          <a:stretch>
+            <a:fillRect/>
+          </a:stretch>
+        </p:blipFill>
+        <p:spPr bwMode="auto">
           <a:xfrm>
-            <a:off x="1097280" y="964692"/>
-            <a:ext cx="9997440" cy="1188720"/>
+            <a:off x="1574800" y="3416300"/>
+            <a:ext cx="4267200" cy="2032000"/>
           </a:xfrm>
-        </p:spPr>
-        <p:txBody>
-          <a:bodyPr/>
-          <a:lstStyle/>
-          <a:p>
-            <a:pPr lvl="0" indent="0" marL="0">
-              <a:buNone/>
-            </a:pPr>
-            <a:r>
-              <a:rPr/>
-              <a:t>Multiple-Group Data Coding &amp; Analyses</a:t>
-            </a:r>
-          </a:p>
-        </p:txBody>
-      </p:sp>
-      <p:sp>
-        <p:nvSpPr>
-          <p:cNvPr id="1001" name="card-blue" descr="card: [book icon]. SPSS Handouts"/>
-          <p:cNvSpPr/>
-          <p:nvPr/>
-        </p:nvSpPr>
-        <p:spPr>
-          <a:xfrm>
-            <a:off x="1097280" y="2633472"/>
-            <a:ext cx="3270504" cy="579120"/>
-          </a:xfrm>
-          <a:prstGeom prst="roundRect">
-            <a:avLst>
-              <a:gd name="adj" fmla="val 6000"/>
-            </a:avLst>
+          <a:prstGeom prst="rect">
+            <a:avLst/>
           </a:prstGeom>
-          <a:solidFill>
-            <a:srgbClr val="FEFDFA"/>
-          </a:solidFill>
-          <a:ln w="19050">
-            <a:solidFill>
-              <a:srgbClr val="CCCCCC"/>
-            </a:solidFill>
+          <a:noFill/>
+          <a:ln w="9525">
+            <a:noFill/>
+            <a:headEnd/>
+            <a:tailEnd/>
           </a:ln>
         </p:spPr>
-        <p:txBody>
-          <a:bodyPr lIns="91440" tIns="68580" rIns="91440" bIns="68580" anchor="t" wrap="square">
-            <a:normAutofit/>
-          </a:bodyPr>
-          <a:lstStyle/>
-          <a:p>
-            <a:pPr algn="l"/>
-            <a:r>
-              <a:rPr lang="en-US" sz="1400" b="1" dirty="0">
-                <a:solidFill>
-                  <a:srgbClr val="005D84"/>
-                </a:solidFill>
-              </a:rPr>
-              <a:t>[book icon]</a:t>
-            </a:r>
-          </a:p>
-          <a:p>
-            <a:pPr algn="l"/>
-            <a:r>
-              <a:rPr lang="en-US" sz="1200" b="0" dirty="0">
-                <a:solidFill>
-                  <a:srgbClr val="010B13"/>
-                </a:solidFill>
-              </a:rPr>
-              <a:t>SPSS Handouts</a:t>
-            </a:r>
-          </a:p>
-        </p:txBody>
-      </p:sp>
-      <p:sp>
-        <p:nvSpPr>
-          <p:cNvPr id="1002" name="card-rail" descr=""/>
-          <p:cNvSpPr/>
+      </p:pic>
+      <p:sp>
+        <p:nvSpPr>
+          <p:cNvPr id="4" name="Content Placeholder 3"/>
+          <p:cNvSpPr>
+            <a:spLocks noGrp="1"/>
+          </p:cNvSpPr>
+          <p:nvPr>
+            <p:ph idx="2" sz="half"/>
+          </p:nvPr>
+        </p:nvSpPr>
+        <p:spPr/>
+        <p:txBody>
+          <a:bodyPr/>
+          <a:lstStyle/>
+          <a:p>
+            <a:pPr lvl="0" indent="0" marL="0">
+              <a:buNone/>
+            </a:pPr>
+            <a:r>
+              <a:rPr b="1"/>
+              <a:t>Inspect groups and outcomes</a:t>
+            </a:r>
+          </a:p>
+        </p:txBody>
+      </p:sp>
+      <p:sp>
+        <p:nvSpPr>
+          <p:cNvPr id="11" name="Text Placeholder 4"/>
+          <p:cNvSpPr>
+            <a:spLocks noGrp="1"/>
+          </p:cNvSpPr>
+          <p:nvPr>
+            <p:ph idx="13" sz="quarter" type="body"/>
+          </p:nvPr>
+        </p:nvSpPr>
+        <p:spPr/>
+        <p:txBody>
+          <a:bodyPr/>
+          <a:lstStyle/>
+          <a:p>
+            <a:pPr lvl="0" indent="0" marL="0">
+              <a:buNone/>
+            </a:pPr>
+            <a:r>
+              <a:rPr b="1"/>
+              <a:t>Syntax Editor</a:t>
+            </a:r>
+          </a:p>
+        </p:txBody>
+      </p:sp>
+      <p:pic>
+        <p:nvPicPr>
+          <p:cNvPr descr="Focused SPSS Syntax Editor image showing the command area and an annotation pointing to the green Run button" id="0" name="Picture 1"/>
+          <p:cNvPicPr>
+            <a:picLocks noGrp="1" noChangeAspect="1"/>
+          </p:cNvPicPr>
           <p:nvPr/>
-        </p:nvSpPr>
-        <p:spPr>
+        </p:nvPicPr>
+        <p:blipFill>
+          <a:blip r:embed="rId4"/>
+          <a:stretch>
+            <a:fillRect/>
+          </a:stretch>
+        </p:blipFill>
+        <p:spPr bwMode="auto">
           <a:xfrm>
-            <a:off x="1097280" y="2633472"/>
-            <a:ext cx="54864" cy="579120"/>
+            <a:off x="6337300" y="3429000"/>
+            <a:ext cx="4241800" cy="2006600"/>
           </a:xfrm>
-          <a:prstGeom prst="roundRect">
-            <a:avLst>
-              <a:gd name="adj" fmla="val 20000"/>
-            </a:avLst>
+          <a:prstGeom prst="rect">
+            <a:avLst/>
           </a:prstGeom>
-          <a:solidFill>
-            <a:srgbClr val="005D84"/>
-          </a:solidFill>
-          <a:ln>
+          <a:noFill/>
+          <a:ln w="9525">
             <a:noFill/>
+            <a:headEnd/>
+            <a:tailEnd/>
           </a:ln>
         </p:spPr>
-        <p:txBody>
-          <a:bodyPr lIns="91440" tIns="68580" rIns="91440" bIns="68580" anchor="t" wrap="square">
-            <a:normAutofit/>
-          </a:bodyPr>
-          <a:lstStyle/>
-          <a:p/>
-        </p:txBody>
-      </p:sp>
-      <p:sp>
-        <p:nvSpPr>
-          <p:cNvPr id="1003" name="card-blue" descr="card: [book icon]. APA Table Templates"/>
-          <p:cNvSpPr/>
-          <p:nvPr/>
-        </p:nvSpPr>
-        <p:spPr>
-          <a:xfrm>
-            <a:off x="4459224" y="2633472"/>
-            <a:ext cx="3270504" cy="579120"/>
-          </a:xfrm>
-          <a:prstGeom prst="roundRect">
-            <a:avLst>
-              <a:gd name="adj" fmla="val 6000"/>
-            </a:avLst>
-          </a:prstGeom>
-          <a:solidFill>
-            <a:srgbClr val="FEFDFA"/>
-          </a:solidFill>
-          <a:ln w="19050">
-            <a:solidFill>
-              <a:srgbClr val="CCCCCC"/>
-            </a:solidFill>
-          </a:ln>
-        </p:spPr>
-        <p:txBody>
-          <a:bodyPr lIns="91440" tIns="68580" rIns="91440" bIns="68580" anchor="t" wrap="square">
-            <a:normAutofit/>
-          </a:bodyPr>
-          <a:lstStyle/>
-          <a:p>
-            <a:pPr algn="l"/>
-            <a:r>
-              <a:rPr lang="en-US" sz="1400" b="1" dirty="0">
-                <a:solidFill>
-                  <a:srgbClr val="005D84"/>
-                </a:solidFill>
-              </a:rPr>
-              <a:t>[book icon]</a:t>
-            </a:r>
-          </a:p>
-          <a:p>
-            <a:pPr algn="l"/>
-            <a:r>
-              <a:rPr lang="en-US" sz="1200" b="0" dirty="0">
-                <a:solidFill>
-                  <a:srgbClr val="010B13"/>
-                </a:solidFill>
-              </a:rPr>
-              <a:t>APA Table Templates</a:t>
-            </a:r>
-          </a:p>
-        </p:txBody>
-      </p:sp>
-      <p:sp>
-        <p:nvSpPr>
-          <p:cNvPr id="1004" name="card-rail" descr=""/>
-          <p:cNvSpPr/>
-          <p:nvPr/>
-        </p:nvSpPr>
-        <p:spPr>
-          <a:xfrm>
-            <a:off x="4459224" y="2633472"/>
-            <a:ext cx="54864" cy="579120"/>
-          </a:xfrm>
-          <a:prstGeom prst="roundRect">
-            <a:avLst>
-              <a:gd name="adj" fmla="val 20000"/>
-            </a:avLst>
-          </a:prstGeom>
-          <a:solidFill>
-            <a:srgbClr val="005D84"/>
-          </a:solidFill>
-          <a:ln>
-            <a:noFill/>
-          </a:ln>
-        </p:spPr>
-        <p:txBody>
-          <a:bodyPr lIns="91440" tIns="68580" rIns="91440" bIns="68580" anchor="t" wrap="square">
-            <a:normAutofit/>
-          </a:bodyPr>
-          <a:lstStyle/>
-          <a:p/>
-        </p:txBody>
-      </p:sp>
-      <p:sp>
-        <p:nvSpPr>
-          <p:cNvPr id="1005" name="card-red" descr="card: [note icon]. kBG ANOVA [PDF]"/>
-          <p:cNvSpPr/>
-          <p:nvPr/>
-        </p:nvSpPr>
-        <p:spPr>
-          <a:xfrm>
-            <a:off x="7821168" y="2633472"/>
-            <a:ext cx="3270504" cy="762000"/>
-          </a:xfrm>
-          <a:prstGeom prst="roundRect">
-            <a:avLst>
-              <a:gd name="adj" fmla="val 6000"/>
-            </a:avLst>
-          </a:prstGeom>
-          <a:solidFill>
-            <a:srgbClr val="FEFDFA"/>
-          </a:solidFill>
-          <a:ln w="19050">
-            <a:solidFill>
-              <a:srgbClr val="CCCCCC"/>
-            </a:solidFill>
-          </a:ln>
-        </p:spPr>
-        <p:txBody>
-          <a:bodyPr lIns="91440" tIns="68580" rIns="91440" bIns="68580" anchor="t" wrap="square">
-            <a:normAutofit/>
-          </a:bodyPr>
-          <a:lstStyle/>
-          <a:p>
-            <a:pPr algn="l"/>
-            <a:r>
-              <a:rPr lang="en-US" sz="1400" b="1" dirty="0">
-                <a:solidFill>
-                  <a:srgbClr val="D00000"/>
-                </a:solidFill>
-              </a:rPr>
-              <a:t>[note icon]</a:t>
-            </a:r>
-          </a:p>
-          <a:p>
-            <a:pPr algn="l"/>
-            <a:r>
-              <a:rPr lang="en-US" sz="1200" b="0" dirty="0">
-                <a:solidFill>
-                  <a:srgbClr val="010B13"/>
-                </a:solidFill>
-              </a:rPr>
-              <a:t>kBG ANOVA</a:t>
-            </a:r>
-          </a:p>
-          <a:p>
-            <a:pPr algn="l"/>
-            <a:r>
-              <a:rPr lang="en-US" sz="1200" b="0" dirty="0">
-                <a:solidFill>
-                  <a:srgbClr val="010B13"/>
-                </a:solidFill>
-              </a:rPr>
-              <a:t>[PDF]</a:t>
-            </a:r>
-          </a:p>
-        </p:txBody>
-      </p:sp>
-      <p:sp>
-        <p:nvSpPr>
-          <p:cNvPr id="1006" name="card-rail" descr=""/>
-          <p:cNvSpPr/>
-          <p:nvPr/>
-        </p:nvSpPr>
-        <p:spPr>
-          <a:xfrm>
-            <a:off x="7821168" y="2633472"/>
-            <a:ext cx="54864" cy="762000"/>
-          </a:xfrm>
-          <a:prstGeom prst="roundRect">
-            <a:avLst>
-              <a:gd name="adj" fmla="val 20000"/>
-            </a:avLst>
-          </a:prstGeom>
-          <a:solidFill>
-            <a:srgbClr val="D00000"/>
-          </a:solidFill>
-          <a:ln>
-            <a:noFill/>
-          </a:ln>
-        </p:spPr>
-        <p:txBody>
-          <a:bodyPr lIns="91440" tIns="68580" rIns="91440" bIns="68580" anchor="t" wrap="square">
-            <a:normAutofit/>
-          </a:bodyPr>
-          <a:lstStyle/>
-          <a:p/>
-        </p:txBody>
-      </p:sp>
-      <p:sp>
-        <p:nvSpPr>
-          <p:cNvPr id="1007" name="card-red" descr="card: [note icon]. kwgf.pdf [PDF]"/>
-          <p:cNvSpPr/>
-          <p:nvPr/>
-        </p:nvSpPr>
-        <p:spPr>
-          <a:xfrm>
-            <a:off x="1097280" y="3486912"/>
-            <a:ext cx="3270504" cy="762000"/>
-          </a:xfrm>
-          <a:prstGeom prst="roundRect">
-            <a:avLst>
-              <a:gd name="adj" fmla="val 6000"/>
-            </a:avLst>
-          </a:prstGeom>
-          <a:solidFill>
-            <a:srgbClr val="FEFDFA"/>
-          </a:solidFill>
-          <a:ln w="19050">
-            <a:solidFill>
-              <a:srgbClr val="CCCCCC"/>
-            </a:solidFill>
-          </a:ln>
-        </p:spPr>
-        <p:txBody>
-          <a:bodyPr lIns="91440" tIns="68580" rIns="91440" bIns="68580" anchor="t" wrap="square">
-            <a:normAutofit/>
-          </a:bodyPr>
-          <a:lstStyle/>
-          <a:p>
-            <a:pPr algn="l"/>
-            <a:r>
-              <a:rPr lang="en-US" sz="1400" b="1" dirty="0">
-                <a:solidFill>
-                  <a:srgbClr val="D00000"/>
-                </a:solidFill>
-              </a:rPr>
-              <a:t>[note icon]</a:t>
-            </a:r>
-          </a:p>
-          <a:p>
-            <a:pPr algn="l"/>
-            <a:r>
-              <a:rPr lang="en-US" sz="1200" b="0" dirty="0">
-                <a:solidFill>
-                  <a:srgbClr val="010B13"/>
-                </a:solidFill>
-              </a:rPr>
-              <a:t>kwgf.pdf</a:t>
-            </a:r>
-          </a:p>
-          <a:p>
-            <a:pPr algn="l"/>
-            <a:r>
-              <a:rPr lang="en-US" sz="1200" b="0" dirty="0">
-                <a:solidFill>
-                  <a:srgbClr val="010B13"/>
-                </a:solidFill>
-              </a:rPr>
-              <a:t>[PDF]</a:t>
-            </a:r>
-          </a:p>
-        </p:txBody>
-      </p:sp>
-      <p:sp>
-        <p:nvSpPr>
-          <p:cNvPr id="1008" name="card-rail" descr=""/>
-          <p:cNvSpPr/>
-          <p:nvPr/>
-        </p:nvSpPr>
-        <p:spPr>
-          <a:xfrm>
-            <a:off x="1097280" y="3486912"/>
-            <a:ext cx="54864" cy="762000"/>
-          </a:xfrm>
-          <a:prstGeom prst="roundRect">
-            <a:avLst>
-              <a:gd name="adj" fmla="val 20000"/>
-            </a:avLst>
-          </a:prstGeom>
-          <a:solidFill>
-            <a:srgbClr val="D00000"/>
-          </a:solidFill>
-          <a:ln>
-            <a:noFill/>
-          </a:ln>
-        </p:spPr>
-        <p:txBody>
-          <a:bodyPr lIns="91440" tIns="68580" rIns="91440" bIns="68580" anchor="t" wrap="square">
-            <a:normAutofit/>
-          </a:bodyPr>
-          <a:lstStyle/>
-          <a:p/>
-        </p:txBody>
-      </p:sp>
-      <p:sp>
-        <p:nvSpPr>
-          <p:cNvPr id="1009" name="card-red" descr="card: [note icon]. 2xkchi_spss.pdf [PDF]"/>
-          <p:cNvSpPr/>
-          <p:nvPr/>
-        </p:nvSpPr>
-        <p:spPr>
-          <a:xfrm>
-            <a:off x="4459224" y="3486912"/>
-            <a:ext cx="3270504" cy="762000"/>
-          </a:xfrm>
-          <a:prstGeom prst="roundRect">
-            <a:avLst>
-              <a:gd name="adj" fmla="val 6000"/>
-            </a:avLst>
-          </a:prstGeom>
-          <a:solidFill>
-            <a:srgbClr val="FEFDFA"/>
-          </a:solidFill>
-          <a:ln w="19050">
-            <a:solidFill>
-              <a:srgbClr val="CCCCCC"/>
-            </a:solidFill>
-          </a:ln>
-        </p:spPr>
-        <p:txBody>
-          <a:bodyPr lIns="91440" tIns="68580" rIns="91440" bIns="68580" anchor="t" wrap="square">
-            <a:normAutofit/>
-          </a:bodyPr>
-          <a:lstStyle/>
-          <a:p>
-            <a:pPr algn="l"/>
-            <a:r>
-              <a:rPr lang="en-US" sz="1400" b="1" dirty="0">
-                <a:solidFill>
-                  <a:srgbClr val="D00000"/>
-                </a:solidFill>
-              </a:rPr>
-              <a:t>[note icon]</a:t>
-            </a:r>
-          </a:p>
-          <a:p>
-            <a:pPr algn="l"/>
-            <a:r>
-              <a:rPr lang="en-US" sz="1200" b="0" dirty="0">
-                <a:solidFill>
-                  <a:srgbClr val="010B13"/>
-                </a:solidFill>
-              </a:rPr>
-              <a:t>2xkchi_spss.pdf</a:t>
-            </a:r>
-          </a:p>
-          <a:p>
-            <a:pPr algn="l"/>
-            <a:r>
-              <a:rPr lang="en-US" sz="1200" b="0" dirty="0">
-                <a:solidFill>
-                  <a:srgbClr val="010B13"/>
-                </a:solidFill>
-              </a:rPr>
-              <a:t>[PDF]</a:t>
-            </a:r>
-          </a:p>
-        </p:txBody>
-      </p:sp>
-      <p:sp>
-        <p:nvSpPr>
-          <p:cNvPr id="1010" name="card-rail" descr=""/>
-          <p:cNvSpPr/>
-          <p:nvPr/>
-        </p:nvSpPr>
-        <p:spPr>
-          <a:xfrm>
-            <a:off x="4459224" y="3486912"/>
-            <a:ext cx="54864" cy="762000"/>
-          </a:xfrm>
-          <a:prstGeom prst="roundRect">
-            <a:avLst>
-              <a:gd name="adj" fmla="val 20000"/>
-            </a:avLst>
-          </a:prstGeom>
-          <a:solidFill>
-            <a:srgbClr val="D00000"/>
-          </a:solidFill>
-          <a:ln>
-            <a:noFill/>
-          </a:ln>
-        </p:spPr>
-        <p:txBody>
-          <a:bodyPr lIns="91440" tIns="68580" rIns="91440" bIns="68580" anchor="t" wrap="square">
-            <a:normAutofit/>
-          </a:bodyPr>
-          <a:lstStyle/>
-          <a:p/>
-        </p:txBody>
-      </p:sp>
-      <p:sp>
-        <p:nvSpPr>
-          <p:cNvPr id="1011" name="card-light-blue" descr="card: [arrow icon]. xls computator [External link]"/>
-          <p:cNvSpPr/>
-          <p:nvPr/>
-        </p:nvSpPr>
-        <p:spPr>
-          <a:xfrm>
-            <a:off x="7821168" y="3486912"/>
-            <a:ext cx="3270504" cy="762000"/>
-          </a:xfrm>
-          <a:prstGeom prst="roundRect">
-            <a:avLst>
-              <a:gd name="adj" fmla="val 6000"/>
-            </a:avLst>
-          </a:prstGeom>
-          <a:solidFill>
-            <a:srgbClr val="FEFDFA"/>
-          </a:solidFill>
-          <a:ln w="19050">
-            <a:solidFill>
-              <a:srgbClr val="CCCCCC"/>
-            </a:solidFill>
-          </a:ln>
-        </p:spPr>
-        <p:txBody>
-          <a:bodyPr lIns="91440" tIns="68580" rIns="91440" bIns="68580" anchor="t" wrap="square">
-            <a:normAutofit/>
-          </a:bodyPr>
-          <a:lstStyle/>
-          <a:p>
-            <a:pPr algn="l"/>
-            <a:r>
-              <a:rPr lang="en-US" sz="1400" b="1" dirty="0">
-                <a:solidFill>
-                  <a:srgbClr val="1B768B"/>
-                </a:solidFill>
-              </a:rPr>
-              <a:t>[arrow icon]</a:t>
-            </a:r>
-          </a:p>
-          <a:p>
-            <a:pPr algn="l"/>
-            <a:r>
-              <a:rPr lang="en-US" sz="1200" b="0" dirty="0">
-                <a:solidFill>
-                  <a:srgbClr val="010B13"/>
-                </a:solidFill>
-              </a:rPr>
-              <a:t>xls computator</a:t>
-            </a:r>
-          </a:p>
-          <a:p>
-            <a:pPr algn="l"/>
-            <a:r>
-              <a:rPr lang="en-US" sz="1200" b="0" dirty="0">
-                <a:solidFill>
-                  <a:srgbClr val="010B13"/>
-                </a:solidFill>
-              </a:rPr>
-              <a:t>[External link]</a:t>
-            </a:r>
-          </a:p>
-        </p:txBody>
-      </p:sp>
-      <p:sp>
-        <p:nvSpPr>
-          <p:cNvPr id="1012" name="card-rail" descr=""/>
-          <p:cNvSpPr/>
-          <p:nvPr/>
-        </p:nvSpPr>
-        <p:spPr>
-          <a:xfrm>
-            <a:off x="7821168" y="3486912"/>
-            <a:ext cx="54864" cy="762000"/>
-          </a:xfrm>
-          <a:prstGeom prst="roundRect">
-            <a:avLst>
-              <a:gd name="adj" fmla="val 20000"/>
-            </a:avLst>
-          </a:prstGeom>
-          <a:solidFill>
-            <a:srgbClr val="249AB5"/>
-          </a:solidFill>
-          <a:ln>
-            <a:noFill/>
-          </a:ln>
-        </p:spPr>
-        <p:txBody>
-          <a:bodyPr lIns="91440" tIns="68580" rIns="91440" bIns="68580" anchor="t" wrap="square">
-            <a:normAutofit/>
-          </a:bodyPr>
-          <a:lstStyle/>
-          <a:p/>
+      </p:pic>
+      <p:sp>
+        <p:nvSpPr>
+          <p:cNvPr id="6" name="Content Placeholder 5"/>
+          <p:cNvSpPr>
+            <a:spLocks noGrp="1"/>
+          </p:cNvSpPr>
+          <p:nvPr>
+            <p:ph idx="4" sz="quarter"/>
+          </p:nvPr>
+        </p:nvSpPr>
+        <p:spPr/>
+        <p:txBody>
+          <a:bodyPr/>
+          <a:lstStyle/>
+          <a:p>
+            <a:pPr lvl="0" indent="0" marL="0">
+              <a:buNone/>
+            </a:pPr>
+            <a:r>
+              <a:rPr b="1"/>
+              <a:t>Save and rerun commands</a:t>
+            </a:r>
+          </a:p>
         </p:txBody>
       </p:sp>
     </p:spTree>
@@ -5540,491 +6752,41 @@
             </a:pPr>
             <a:r>
               <a:rPr/>
-              <a:t>Weekly Lab Assignment</a:t>
-            </a:r>
-          </a:p>
-        </p:txBody>
-      </p:sp>
-      <p:sp>
-        <p:nvSpPr>
-          <p:cNvPr id="1013" name="card-steel" descr="card: [chart icon]. jury_data.sav (RH1 &amp; RH2) [SPSS data file]"/>
-          <p:cNvSpPr/>
+              <a:t>4 Read results in Output Viewer</a:t>
+            </a:r>
+          </a:p>
+        </p:txBody>
+      </p:sp>
+      <p:pic>
+        <p:nvPicPr>
+          <p:cNvPr descr="SPSS-style one-way ANOVA output for recommended prison sentence by defendant attractiveness, showing F equals 4.081 with 2 and 52 degrees of freedom and p equals .023" id="0" name="Picture 1"/>
+          <p:cNvPicPr>
+            <a:picLocks noGrp="1" noChangeAspect="1"/>
+          </p:cNvPicPr>
           <p:nvPr/>
-        </p:nvSpPr>
-        <p:spPr>
+        </p:nvPicPr>
+        <p:blipFill>
+          <a:blip r:embed="rId3"/>
+          <a:stretch>
+            <a:fillRect/>
+          </a:stretch>
+        </p:blipFill>
+        <p:spPr bwMode="auto">
           <a:xfrm>
-            <a:off x="1097280" y="2633472"/>
-            <a:ext cx="3270504" cy="762000"/>
+            <a:off x="1092200" y="2641600"/>
+            <a:ext cx="9994900" cy="3086100"/>
           </a:xfrm>
-          <a:prstGeom prst="roundRect">
-            <a:avLst>
-              <a:gd name="adj" fmla="val 6000"/>
-            </a:avLst>
+          <a:prstGeom prst="rect">
+            <a:avLst/>
           </a:prstGeom>
-          <a:solidFill>
-            <a:srgbClr val="FEFDFA"/>
-          </a:solidFill>
-          <a:ln w="19050">
-            <a:solidFill>
-              <a:srgbClr val="CCCCCC"/>
-            </a:solidFill>
+          <a:noFill/>
+          <a:ln w="9525">
+            <a:noFill/>
+            <a:headEnd/>
+            <a:tailEnd/>
           </a:ln>
         </p:spPr>
-        <p:txBody>
-          <a:bodyPr lIns="91440" tIns="68580" rIns="91440" bIns="68580" anchor="t" wrap="square">
-            <a:normAutofit/>
-          </a:bodyPr>
-          <a:lstStyle/>
-          <a:p>
-            <a:pPr algn="l"/>
-            <a:r>
-              <a:rPr lang="en-US" sz="1400" b="1" dirty="0">
-                <a:solidFill>
-                  <a:srgbClr val="010B13"/>
-                </a:solidFill>
-              </a:rPr>
-              <a:t>[chart icon]</a:t>
-            </a:r>
-          </a:p>
-          <a:p>
-            <a:pPr algn="l"/>
-            <a:r>
-              <a:rPr lang="en-US" sz="1200" b="0" dirty="0">
-                <a:solidFill>
-                  <a:srgbClr val="010B13"/>
-                </a:solidFill>
-              </a:rPr>
-              <a:t>jury_data.sav (RH1 &amp; RH2)</a:t>
-            </a:r>
-          </a:p>
-          <a:p>
-            <a:pPr algn="l"/>
-            <a:r>
-              <a:rPr lang="en-US" sz="1200" b="0" dirty="0">
-                <a:solidFill>
-                  <a:srgbClr val="010B13"/>
-                </a:solidFill>
-              </a:rPr>
-              <a:t>[SPSS data file]</a:t>
-            </a:r>
-          </a:p>
-        </p:txBody>
-      </p:sp>
-      <p:sp>
-        <p:nvSpPr>
-          <p:cNvPr id="1014" name="card-rail" descr=""/>
-          <p:cNvSpPr/>
-          <p:nvPr/>
-        </p:nvSpPr>
-        <p:spPr>
-          <a:xfrm>
-            <a:off x="1097280" y="2633472"/>
-            <a:ext cx="54864" cy="762000"/>
-          </a:xfrm>
-          <a:prstGeom prst="roundRect">
-            <a:avLst>
-              <a:gd name="adj" fmla="val 20000"/>
-            </a:avLst>
-          </a:prstGeom>
-          <a:solidFill>
-            <a:srgbClr val="010B13"/>
-          </a:solidFill>
-          <a:ln>
-            <a:noFill/>
-          </a:ln>
-        </p:spPr>
-        <p:txBody>
-          <a:bodyPr lIns="91440" tIns="68580" rIns="91440" bIns="68580" anchor="t" wrap="square">
-            <a:normAutofit/>
-          </a:bodyPr>
-          <a:lstStyle/>
-          <a:p/>
-        </p:txBody>
-      </p:sp>
-      <p:sp>
-        <p:nvSpPr>
-          <p:cNvPr id="1015" name="card-steel" descr="card: [chart icon]. football_data.sav (RH3) [SPSS data file]"/>
-          <p:cNvSpPr/>
-          <p:nvPr/>
-        </p:nvSpPr>
-        <p:spPr>
-          <a:xfrm>
-            <a:off x="4459224" y="2633472"/>
-            <a:ext cx="3270504" cy="762000"/>
-          </a:xfrm>
-          <a:prstGeom prst="roundRect">
-            <a:avLst>
-              <a:gd name="adj" fmla="val 6000"/>
-            </a:avLst>
-          </a:prstGeom>
-          <a:solidFill>
-            <a:srgbClr val="FEFDFA"/>
-          </a:solidFill>
-          <a:ln w="19050">
-            <a:solidFill>
-              <a:srgbClr val="CCCCCC"/>
-            </a:solidFill>
-          </a:ln>
-        </p:spPr>
-        <p:txBody>
-          <a:bodyPr lIns="91440" tIns="68580" rIns="91440" bIns="68580" anchor="t" wrap="square">
-            <a:normAutofit/>
-          </a:bodyPr>
-          <a:lstStyle/>
-          <a:p>
-            <a:pPr algn="l"/>
-            <a:r>
-              <a:rPr lang="en-US" sz="1400" b="1" dirty="0">
-                <a:solidFill>
-                  <a:srgbClr val="010B13"/>
-                </a:solidFill>
-              </a:rPr>
-              <a:t>[chart icon]</a:t>
-            </a:r>
-          </a:p>
-          <a:p>
-            <a:pPr algn="l"/>
-            <a:r>
-              <a:rPr lang="en-US" sz="1200" b="0" dirty="0">
-                <a:solidFill>
-                  <a:srgbClr val="010B13"/>
-                </a:solidFill>
-              </a:rPr>
-              <a:t>football_data.sav (RH3)</a:t>
-            </a:r>
-          </a:p>
-          <a:p>
-            <a:pPr algn="l"/>
-            <a:r>
-              <a:rPr lang="en-US" sz="1200" b="0" dirty="0">
-                <a:solidFill>
-                  <a:srgbClr val="010B13"/>
-                </a:solidFill>
-              </a:rPr>
-              <a:t>[SPSS data file]</a:t>
-            </a:r>
-          </a:p>
-        </p:txBody>
-      </p:sp>
-      <p:sp>
-        <p:nvSpPr>
-          <p:cNvPr id="1016" name="card-rail" descr=""/>
-          <p:cNvSpPr/>
-          <p:nvPr/>
-        </p:nvSpPr>
-        <p:spPr>
-          <a:xfrm>
-            <a:off x="4459224" y="2633472"/>
-            <a:ext cx="54864" cy="762000"/>
-          </a:xfrm>
-          <a:prstGeom prst="roundRect">
-            <a:avLst>
-              <a:gd name="adj" fmla="val 20000"/>
-            </a:avLst>
-          </a:prstGeom>
-          <a:solidFill>
-            <a:srgbClr val="010B13"/>
-          </a:solidFill>
-          <a:ln>
-            <a:noFill/>
-          </a:ln>
-        </p:spPr>
-        <p:txBody>
-          <a:bodyPr lIns="91440" tIns="68580" rIns="91440" bIns="68580" anchor="t" wrap="square">
-            <a:normAutofit/>
-          </a:bodyPr>
-          <a:lstStyle/>
-          <a:p/>
-        </p:txBody>
-      </p:sp>
-      <p:sp>
-        <p:nvSpPr>
-          <p:cNvPr id="1017" name="card-steel" descr="card: [chart icon]. tips_data.sav (RH4) [SPSS data file]"/>
-          <p:cNvSpPr/>
-          <p:nvPr/>
-        </p:nvSpPr>
-        <p:spPr>
-          <a:xfrm>
-            <a:off x="7821168" y="2633472"/>
-            <a:ext cx="3270504" cy="762000"/>
-          </a:xfrm>
-          <a:prstGeom prst="roundRect">
-            <a:avLst>
-              <a:gd name="adj" fmla="val 6000"/>
-            </a:avLst>
-          </a:prstGeom>
-          <a:solidFill>
-            <a:srgbClr val="FEFDFA"/>
-          </a:solidFill>
-          <a:ln w="19050">
-            <a:solidFill>
-              <a:srgbClr val="CCCCCC"/>
-            </a:solidFill>
-          </a:ln>
-        </p:spPr>
-        <p:txBody>
-          <a:bodyPr lIns="91440" tIns="68580" rIns="91440" bIns="68580" anchor="t" wrap="square">
-            <a:normAutofit/>
-          </a:bodyPr>
-          <a:lstStyle/>
-          <a:p>
-            <a:pPr algn="l"/>
-            <a:r>
-              <a:rPr lang="en-US" sz="1400" b="1" dirty="0">
-                <a:solidFill>
-                  <a:srgbClr val="010B13"/>
-                </a:solidFill>
-              </a:rPr>
-              <a:t>[chart icon]</a:t>
-            </a:r>
-          </a:p>
-          <a:p>
-            <a:pPr algn="l"/>
-            <a:r>
-              <a:rPr lang="en-US" sz="1200" b="0" dirty="0">
-                <a:solidFill>
-                  <a:srgbClr val="010B13"/>
-                </a:solidFill>
-              </a:rPr>
-              <a:t>tips_data.sav (RH4)</a:t>
-            </a:r>
-          </a:p>
-          <a:p>
-            <a:pPr algn="l"/>
-            <a:r>
-              <a:rPr lang="en-US" sz="1200" b="0" dirty="0">
-                <a:solidFill>
-                  <a:srgbClr val="010B13"/>
-                </a:solidFill>
-              </a:rPr>
-              <a:t>[SPSS data file]</a:t>
-            </a:r>
-          </a:p>
-        </p:txBody>
-      </p:sp>
-      <p:sp>
-        <p:nvSpPr>
-          <p:cNvPr id="1018" name="card-rail" descr=""/>
-          <p:cNvSpPr/>
-          <p:nvPr/>
-        </p:nvSpPr>
-        <p:spPr>
-          <a:xfrm>
-            <a:off x="7821168" y="2633472"/>
-            <a:ext cx="54864" cy="762000"/>
-          </a:xfrm>
-          <a:prstGeom prst="roundRect">
-            <a:avLst>
-              <a:gd name="adj" fmla="val 20000"/>
-            </a:avLst>
-          </a:prstGeom>
-          <a:solidFill>
-            <a:srgbClr val="010B13"/>
-          </a:solidFill>
-          <a:ln>
-            <a:noFill/>
-          </a:ln>
-        </p:spPr>
-        <p:txBody>
-          <a:bodyPr lIns="91440" tIns="68580" rIns="91440" bIns="68580" anchor="t" wrap="square">
-            <a:normAutofit/>
-          </a:bodyPr>
-          <a:lstStyle/>
-          <a:p/>
-        </p:txBody>
-      </p:sp>
-      <p:sp>
-        <p:nvSpPr>
-          <p:cNvPr id="1019" name="card-blue" descr="card: [book icon]. Multi-Group Coding &amp; Analyses worksheet [Word document]"/>
-          <p:cNvSpPr/>
-          <p:nvPr/>
-        </p:nvSpPr>
-        <p:spPr>
-          <a:xfrm>
-            <a:off x="1097280" y="3486912"/>
-            <a:ext cx="3270504" cy="944880"/>
-          </a:xfrm>
-          <a:prstGeom prst="roundRect">
-            <a:avLst>
-              <a:gd name="adj" fmla="val 6000"/>
-            </a:avLst>
-          </a:prstGeom>
-          <a:solidFill>
-            <a:srgbClr val="FEFDFA"/>
-          </a:solidFill>
-          <a:ln w="19050">
-            <a:solidFill>
-              <a:srgbClr val="CCCCCC"/>
-            </a:solidFill>
-          </a:ln>
-        </p:spPr>
-        <p:txBody>
-          <a:bodyPr lIns="91440" tIns="68580" rIns="91440" bIns="68580" anchor="t" wrap="square">
-            <a:normAutofit/>
-          </a:bodyPr>
-          <a:lstStyle/>
-          <a:p>
-            <a:pPr algn="l"/>
-            <a:r>
-              <a:rPr lang="en-US" sz="1400" b="1" dirty="0">
-                <a:solidFill>
-                  <a:srgbClr val="005D84"/>
-                </a:solidFill>
-              </a:rPr>
-              <a:t>[book icon]</a:t>
-            </a:r>
-          </a:p>
-          <a:p>
-            <a:pPr algn="l"/>
-            <a:r>
-              <a:rPr lang="en-US" sz="1200" b="0" dirty="0">
-                <a:solidFill>
-                  <a:srgbClr val="010B13"/>
-                </a:solidFill>
-              </a:rPr>
-              <a:t>Multi-Group Coding &amp; Analyses worksheet</a:t>
-            </a:r>
-          </a:p>
-          <a:p>
-            <a:pPr algn="l"/>
-            <a:r>
-              <a:rPr lang="en-US" sz="1200" b="0" dirty="0">
-                <a:solidFill>
-                  <a:srgbClr val="010B13"/>
-                </a:solidFill>
-              </a:rPr>
-              <a:t>[Word document]</a:t>
-            </a:r>
-          </a:p>
-        </p:txBody>
-      </p:sp>
-      <p:sp>
-        <p:nvSpPr>
-          <p:cNvPr id="1020" name="card-rail" descr=""/>
-          <p:cNvSpPr/>
-          <p:nvPr/>
-        </p:nvSpPr>
-        <p:spPr>
-          <a:xfrm>
-            <a:off x="1097280" y="3486912"/>
-            <a:ext cx="54864" cy="944880"/>
-          </a:xfrm>
-          <a:prstGeom prst="roundRect">
-            <a:avLst>
-              <a:gd name="adj" fmla="val 20000"/>
-            </a:avLst>
-          </a:prstGeom>
-          <a:solidFill>
-            <a:srgbClr val="005D84"/>
-          </a:solidFill>
-          <a:ln>
-            <a:noFill/>
-          </a:ln>
-        </p:spPr>
-        <p:txBody>
-          <a:bodyPr lIns="91440" tIns="68580" rIns="91440" bIns="68580" anchor="t" wrap="square">
-            <a:normAutofit/>
-          </a:bodyPr>
-          <a:lstStyle/>
-          <a:p/>
-        </p:txBody>
-      </p:sp>
-      <p:sp>
-        <p:nvSpPr>
-          <p:cNvPr id="1021" name="card-blue" descr="card: [arrow icon]. Multi-Group Analyses hw checker [Web page]"/>
-          <p:cNvSpPr/>
-          <p:nvPr/>
-        </p:nvSpPr>
-        <p:spPr>
-          <a:xfrm>
-            <a:off x="4459224" y="3486912"/>
-            <a:ext cx="3270504" cy="762000"/>
-          </a:xfrm>
-          <a:prstGeom prst="roundRect">
-            <a:avLst>
-              <a:gd name="adj" fmla="val 6000"/>
-            </a:avLst>
-          </a:prstGeom>
-          <a:solidFill>
-            <a:srgbClr val="FEFDFA"/>
-          </a:solidFill>
-          <a:ln w="19050">
-            <a:solidFill>
-              <a:srgbClr val="CCCCCC"/>
-            </a:solidFill>
-          </a:ln>
-        </p:spPr>
-        <p:txBody>
-          <a:bodyPr lIns="91440" tIns="68580" rIns="91440" bIns="68580" anchor="t" wrap="square">
-            <a:normAutofit/>
-          </a:bodyPr>
-          <a:lstStyle/>
-          <a:p>
-            <a:pPr algn="l"/>
-            <a:r>
-              <a:rPr lang="en-US" sz="1400" b="1" dirty="0">
-                <a:solidFill>
-                  <a:srgbClr val="005D84"/>
-                </a:solidFill>
-              </a:rPr>
-              <a:t>[arrow icon]</a:t>
-            </a:r>
-          </a:p>
-          <a:p>
-            <a:pPr algn="l"/>
-            <a:r>
-              <a:rPr lang="en-US" sz="1200" b="0" dirty="0">
-                <a:solidFill>
-                  <a:srgbClr val="010B13"/>
-                </a:solidFill>
-              </a:rPr>
-              <a:t>Multi-Group Analyses hw checker</a:t>
-            </a:r>
-          </a:p>
-          <a:p>
-            <a:pPr algn="l"/>
-            <a:r>
-              <a:rPr lang="en-US" sz="1200" b="0" dirty="0">
-                <a:solidFill>
-                  <a:srgbClr val="010B13"/>
-                </a:solidFill>
-              </a:rPr>
-              <a:t>[Web page]</a:t>
-            </a:r>
-          </a:p>
-        </p:txBody>
-      </p:sp>
-      <p:sp>
-        <p:nvSpPr>
-          <p:cNvPr id="1022" name="card-rail" descr=""/>
-          <p:cNvSpPr/>
-          <p:nvPr/>
-        </p:nvSpPr>
-        <p:spPr>
-          <a:xfrm>
-            <a:off x="4459224" y="3486912"/>
-            <a:ext cx="54864" cy="762000"/>
-          </a:xfrm>
-          <a:prstGeom prst="roundRect">
-            <a:avLst>
-              <a:gd name="adj" fmla="val 20000"/>
-            </a:avLst>
-          </a:prstGeom>
-          <a:solidFill>
-            <a:srgbClr val="005D84"/>
-          </a:solidFill>
-          <a:ln>
-            <a:noFill/>
-          </a:ln>
-        </p:spPr>
-        <p:txBody>
-          <a:bodyPr lIns="91440" tIns="68580" rIns="91440" bIns="68580" anchor="t" wrap="square">
-            <a:normAutofit/>
-          </a:bodyPr>
-          <a:lstStyle/>
-          <a:p/>
-        </p:txBody>
-      </p:sp>
+      </p:pic>
     </p:spTree>
   </p:cSld>
 </p:sld>
@@ -6057,19 +6819,11 @@
             <p:ph type="title"/>
           </p:nvPr>
         </p:nvSpPr>
-        <p:spPr bwMode="blackWhite">
+        <p:spPr>
           <a:xfrm>
-            <a:off x="1097280" y="2386744"/>
-            <a:ext cx="9997440" cy="1645920"/>
+            <a:off x="1097280" y="964692"/>
+            <a:ext cx="9997440" cy="1188720"/>
           </a:xfrm>
-          <a:solidFill>
-            <a:srgbClr val="FFFFFF"/>
-          </a:solidFill>
-          <a:ln w="38100">
-            <a:solidFill>
-              <a:srgbClr val="404040"/>
-            </a:solidFill>
-          </a:ln>
         </p:spPr>
         <p:txBody>
           <a:bodyPr/>
@@ -6080,7 +6834,58 @@
             </a:pPr>
             <a:r>
               <a:rPr/>
-              <a:t>Walkthrough: Multi-Group Analyses</a:t>
+              <a:t>5 Omnibus comes before pairwise</a:t>
+            </a:r>
+          </a:p>
+        </p:txBody>
+      </p:sp>
+      <p:sp>
+        <p:nvSpPr>
+          <p:cNvPr id="3" name="Content Placeholder 2"/>
+          <p:cNvSpPr>
+            <a:spLocks noGrp="1"/>
+          </p:cNvSpPr>
+          <p:nvPr>
+            <p:ph idx="1"/>
+          </p:nvPr>
+        </p:nvSpPr>
+        <p:spPr/>
+        <p:txBody>
+          <a:bodyPr/>
+          <a:lstStyle/>
+          <a:p>
+            <a:pPr lvl="0" indent="-457200" marL="457200">
+              <a:buAutoNum type="arabicPeriod"/>
+            </a:pPr>
+            <a:r>
+              <a:rPr b="1"/>
+              <a:t>Omnibus:</a:t>
+            </a:r>
+            <a:r>
+              <a:rPr/>
+              <a:t> Is there any group difference or association?</a:t>
+            </a:r>
+          </a:p>
+          <a:p>
+            <a:pPr lvl="0" indent="-457200" marL="457200">
+              <a:buAutoNum type="arabicPeriod"/>
+            </a:pPr>
+            <a:r>
+              <a:rPr b="1"/>
+              <a:t>Pairwise:</a:t>
+            </a:r>
+            <a:r>
+              <a:rPr/>
+              <a:t> Which planned pairs differ?</a:t>
+            </a:r>
+          </a:p>
+          <a:p>
+            <a:pPr lvl="0" indent="0" marL="0">
+              <a:buNone/>
+            </a:pPr>
+            <a:r>
+              <a:rPr/>
+              <a:t>Follow up only when the omnibus result justifies it.</a:t>
             </a:r>
           </a:p>
         </p:txBody>
@@ -6132,132 +6937,137 @@
             </a:pPr>
             <a:r>
               <a:rPr/>
-              <a:t>How Today Works</a:t>
-            </a:r>
-          </a:p>
-        </p:txBody>
-      </p:sp>
-      <p:sp>
-        <p:nvSpPr>
-          <p:cNvPr id="3" name="Content Placeholder 2"/>
-          <p:cNvSpPr>
-            <a:spLocks noGrp="1"/>
-          </p:cNvSpPr>
+              <a:t>6 Match variables to the test</a:t>
+            </a:r>
+          </a:p>
+        </p:txBody>
+      </p:sp>
+      <p:graphicFrame>
+        <p:nvGraphicFramePr>
+          <p:cNvPr id="6" name="Content Placeholder 5"/>
+          <p:cNvGraphicFramePr>
+            <a:graphicFrameLocks noGrp="1"/>
+          </p:cNvGraphicFramePr>
           <p:nvPr>
             <p:ph idx="1"/>
           </p:nvPr>
-        </p:nvSpPr>
-        <p:spPr/>
-        <p:txBody>
-          <a:bodyPr/>
-          <a:lstStyle/>
-          <a:p>
-            <a:pPr lvl="0" indent="0" marL="0">
-              <a:buNone/>
-            </a:pPr>
-            <a:r>
-              <a:rPr/>
-              <a:t>We do the first two analyses </a:t>
-            </a:r>
-            <a:r>
-              <a:rPr b="1"/>
-              <a:t>together</a:t>
-            </a:r>
-            <a:r>
-              <a:rPr/>
-              <a:t>:</a:t>
-            </a:r>
-          </a:p>
-          <a:p>
-            <a:pPr lvl="0"/>
-            <a:r>
-              <a:rPr b="1"/>
-              <a:t>RH1:</a:t>
-            </a:r>
-            <a:r>
-              <a:rPr/>
-              <a:t> Mock Jury study – k-group One-Way ANOVA in SPSS</a:t>
-            </a:r>
-          </a:p>
-          <a:p>
-            <a:pPr lvl="0"/>
-            <a:r>
-              <a:rPr b="1"/>
-              <a:t>RH2:</a:t>
-            </a:r>
-            <a:r>
-              <a:rPr/>
-              <a:t> Mock Jury study – k-group Chi-Square in SPSS</a:t>
-            </a:r>
-          </a:p>
-          <a:p>
-            <a:pPr lvl="0" indent="0" marL="0">
-              <a:buNone/>
-            </a:pPr>
-            <a:r>
-              <a:rPr/>
-              <a:t>As we go:</a:t>
-            </a:r>
-          </a:p>
-          <a:p>
-            <a:pPr lvl="0" indent="-457200" marL="457200">
-              <a:buAutoNum type="arabicPeriod"/>
-            </a:pPr>
-            <a:r>
-              <a:rPr/>
-              <a:t>Open </a:t>
-            </a:r>
-            <a:r>
-              <a:rPr>
-                <a:latin typeface="Courier"/>
-              </a:rPr>
-              <a:t>jury_data.sav</a:t>
-            </a:r>
-          </a:p>
-          <a:p>
-            <a:pPr lvl="0" indent="-457200" marL="457200">
-              <a:buAutoNum type="arabicPeriod"/>
-            </a:pPr>
-            <a:r>
-              <a:rPr/>
-              <a:t>Follow the </a:t>
-            </a:r>
-            <a:r>
-              <a:rPr b="1"/>
-              <a:t>kBG ANOVA</a:t>
-            </a:r>
-            <a:r>
-              <a:rPr/>
-              <a:t> and </a:t>
-            </a:r>
-            <a:r>
-              <a:rPr b="1"/>
-              <a:t>2xk Chi-Square</a:t>
-            </a:r>
-            <a:r>
-              <a:rPr/>
-              <a:t> SPSS handouts step by step</a:t>
-            </a:r>
-          </a:p>
-          <a:p>
-            <a:pPr lvl="0" indent="-457200" marL="457200">
-              <a:buAutoNum type="arabicPeriod"/>
-            </a:pPr>
-            <a:r>
-              <a:rPr/>
-              <a:t>Enter your answers in the </a:t>
-            </a:r>
-            <a:r>
-              <a:rPr b="1"/>
-              <a:t>homework checker</a:t>
-            </a:r>
-            <a:r>
-              <a:rPr/>
-              <a:t> on the lab page and take a screenshot when they turn green</a:t>
-            </a:r>
-          </a:p>
-        </p:txBody>
-      </p:sp>
+        </p:nvGraphicFramePr>
+        <p:xfrm>
+          <a:off x="1092200" y="2628900"/>
+          <a:ext cx="9994900" cy="3098800"/>
+        </p:xfrm>
+        <a:graphic>
+          <a:graphicData uri="http://schemas.openxmlformats.org/drawingml/2006/table">
+            <a:tbl>
+              <a:tblPr firstRow="1" bandRow="1">
+                <a:tableStyleId>{5C22544A-7EE6-4342-B048-85BDC9FD1C3A}</a:tableStyleId>
+              </a:tblPr>
+              <a:tblGrid>
+                <a:gridCol w="4991100"/>
+                <a:gridCol w="4991100"/>
+              </a:tblGrid>
+              <a:tr h="0">
+                <a:tc>
+                  <a:txBody>
+                    <a:bodyPr/>
+                    <a:lstStyle/>
+                    <a:p>
+                      <a:pPr lvl="0" indent="0" marL="0">
+                        <a:buNone/>
+                      </a:pPr>
+                      <a:r>
+                        <a:rPr/>
+                        <a:t>Predictor and outcome</a:t>
+                      </a:r>
+                    </a:p>
+                  </a:txBody>
+                  <a:tcPr/>
+                </a:tc>
+                <a:tc>
+                  <a:txBody>
+                    <a:bodyPr/>
+                    <a:lstStyle/>
+                    <a:p>
+                      <a:pPr lvl="0" indent="0" marL="0">
+                        <a:buNone/>
+                      </a:pPr>
+                      <a:r>
+                        <a:rPr/>
+                        <a:t>Use</a:t>
+                      </a:r>
+                    </a:p>
+                  </a:txBody>
+                  <a:tcPr/>
+                </a:tc>
+              </a:tr>
+              <a:tr h="0">
+                <a:tc>
+                  <a:txBody>
+                    <a:bodyPr/>
+                    <a:lstStyle/>
+                    <a:p>
+                      <a:pPr lvl="0" indent="0" marL="0">
+                        <a:buNone/>
+                      </a:pPr>
+                      <a:r>
+                        <a:rPr/>
+                        <a:t>3+ groups and a quantitative outcome</a:t>
+                      </a:r>
+                    </a:p>
+                  </a:txBody>
+                </a:tc>
+                <a:tc>
+                  <a:txBody>
+                    <a:bodyPr/>
+                    <a:lstStyle/>
+                    <a:p>
+                      <a:pPr lvl="0" indent="0" marL="0">
+                        <a:buNone/>
+                      </a:pPr>
+                      <a:r>
+                        <a:rPr/>
+                        <a:t>k-group ANOVA</a:t>
+                      </a:r>
+                    </a:p>
+                  </a:txBody>
+                </a:tc>
+              </a:tr>
+              <a:tr h="0">
+                <a:tc>
+                  <a:txBody>
+                    <a:bodyPr/>
+                    <a:lstStyle/>
+                    <a:p>
+                      <a:pPr lvl="0" indent="0" marL="0">
+                        <a:buNone/>
+                      </a:pPr>
+                      <a:r>
+                        <a:rPr/>
+                        <a:t>Two categorical variables, one with 3+ levels</a:t>
+                      </a:r>
+                    </a:p>
+                  </a:txBody>
+                </a:tc>
+                <a:tc>
+                  <a:txBody>
+                    <a:bodyPr/>
+                    <a:lstStyle/>
+                    <a:p>
+                      <a:pPr lvl="0" indent="0" marL="0">
+                        <a:buNone/>
+                      </a:pPr>
+                      <a:r>
+                        <a:rPr/>
+                        <a:t>k-group chi-square</a:t>
+                      </a:r>
+                    </a:p>
+                  </a:txBody>
+                </a:tc>
+              </a:tr>
+            </a:tbl>
+          </a:graphicData>
+        </a:graphic>
+      </p:graphicFrame>
     </p:spTree>
   </p:cSld>
 </p:sld>
@@ -6305,7 +7115,38 @@
             </a:pPr>
             <a:r>
               <a:rPr/>
-              <a:t>The Data</a:t>
+              <a:t>7 Select the jury walkthrough</a:t>
+            </a:r>
+          </a:p>
+        </p:txBody>
+      </p:sp>
+      <p:sp>
+        <p:nvSpPr>
+          <p:cNvPr id="3" name="Content Placeholder 2"/>
+          <p:cNvSpPr>
+            <a:spLocks noGrp="1"/>
+          </p:cNvSpPr>
+          <p:nvPr>
+            <p:ph idx="1"/>
+          </p:nvPr>
+        </p:nvSpPr>
+        <p:spPr/>
+        <p:txBody>
+          <a:bodyPr/>
+          <a:lstStyle/>
+          <a:p>
+            <a:pPr lvl="0" indent="0">
+              <a:buNone/>
+            </a:pPr>
+            <a:r>
+              <a:rPr>
+                <a:latin typeface="Courier"/>
+              </a:rPr>
+              <a:t>USE ALL.
+COMPUTE filter_$ = (crime = 2).
+FILTER BY filter_$.
+EXECUTE.
+FREQUENCIES VARIABLES=attr years.</a:t>
             </a:r>
           </a:p>
         </p:txBody>
@@ -6357,1500 +7198,42 @@
             </a:pPr>
             <a:r>
               <a:rPr/>
-              <a:t>The Data (continued)</a:t>
-            </a:r>
-          </a:p>
-        </p:txBody>
-      </p:sp>
-      <p:graphicFrame>
-        <p:nvGraphicFramePr>
-          <p:cNvPr id="6" name="Content Placeholder 5"/>
-          <p:cNvGraphicFramePr>
-            <a:graphicFrameLocks noGrp="1"/>
-          </p:cNvGraphicFramePr>
+              <a:t>8 Run the jury ANOVA</a:t>
+            </a:r>
+          </a:p>
+        </p:txBody>
+      </p:sp>
+      <p:sp>
+        <p:nvSpPr>
+          <p:cNvPr id="3" name="Content Placeholder 2"/>
+          <p:cNvSpPr>
+            <a:spLocks noGrp="1"/>
+          </p:cNvSpPr>
           <p:nvPr>
             <p:ph idx="1"/>
           </p:nvPr>
-        </p:nvGraphicFramePr>
-        <p:xfrm>
-          <a:off x="1092200" y="2628900"/>
-          <a:ext cx="9994900" cy="3098800"/>
-        </p:xfrm>
-        <a:graphic>
-          <a:graphicData uri="http://schemas.openxmlformats.org/drawingml/2006/table">
-            <a:tbl>
-              <a:tblPr firstRow="1" bandRow="1">
-                <a:tableStyleId>{5C22544A-7EE6-4342-B048-85BDC9FD1C3A}</a:tableStyleId>
-              </a:tblPr>
-              <a:tblGrid>
-                <a:gridCol w="3327400"/>
-                <a:gridCol w="3327400"/>
-                <a:gridCol w="3327400"/>
-              </a:tblGrid>
-              <a:tr h="0">
-                <a:tc>
-                  <a:txBody>
-                    <a:bodyPr/>
-                    <a:lstStyle/>
-                    <a:p>
-                      <a:pPr lvl="0" indent="0" marL="0">
-                        <a:buNone/>
-                      </a:pPr>
-                      <a:r>
-                        <a:rPr/>
-                        <a:t>thin</a:t>
-                      </a:r>
-                    </a:p>
-                  </a:txBody>
-                  <a:tcPr/>
-                </a:tc>
-                <a:tc>
-                  <a:txBody>
-                    <a:bodyPr/>
-                    <a:lstStyle/>
-                    <a:p>
-                      <a:pPr lvl="0" indent="0" marL="0">
-                        <a:buNone/>
-                      </a:pPr>
-                      <a:r>
-                        <a:rPr/>
-                        <a:t>large</a:t>
-                      </a:r>
-                    </a:p>
-                  </a:txBody>
-                  <a:tcPr/>
-                </a:tc>
-                <a:tc>
-                  <a:txBody>
-                    <a:bodyPr/>
-                    <a:lstStyle/>
-                    <a:p>
-                      <a:pPr lvl="0" indent="0" marL="0">
-                        <a:buNone/>
-                      </a:pPr>
-                      <a:r>
-                        <a:rPr/>
-                        <a:t>dog</a:t>
-                      </a:r>
-                    </a:p>
-                  </a:txBody>
-                  <a:tcPr/>
-                </a:tc>
-              </a:tr>
-              <a:tr h="0">
-                <a:tc>
-                  <a:txBody>
-                    <a:bodyPr/>
-                    <a:lstStyle/>
-                    <a:p>
-                      <a:pPr lvl="0" indent="0" marL="0">
-                        <a:buNone/>
-                      </a:pPr>
-                      <a:r>
-                        <a:rPr/>
-                        <a:t>3.794701</a:t>
-                      </a:r>
-                    </a:p>
-                  </a:txBody>
-                </a:tc>
-                <a:tc>
-                  <a:txBody>
-                    <a:bodyPr/>
-                    <a:lstStyle/>
-                    <a:p>
-                      <a:pPr lvl="0" indent="0" marL="0">
-                        <a:buNone/>
-                      </a:pPr>
-                      <a:r>
-                        <a:rPr/>
-                        <a:t>9.017559</a:t>
-                      </a:r>
-                    </a:p>
-                  </a:txBody>
-                </a:tc>
-                <a:tc>
-                  <a:txBody>
-                    <a:bodyPr/>
-                    <a:lstStyle/>
-                    <a:p>
-                      <a:pPr lvl="0" indent="0" marL="0">
-                        <a:buNone/>
-                      </a:pPr>
-                      <a:r>
-                        <a:rPr/>
-                        <a:t>7.784758</a:t>
-                      </a:r>
-                    </a:p>
-                  </a:txBody>
-                </a:tc>
-              </a:tr>
-              <a:tr h="0">
-                <a:tc>
-                  <a:txBody>
-                    <a:bodyPr/>
-                    <a:lstStyle/>
-                    <a:p>
-                      <a:pPr lvl="0" indent="0" marL="0">
-                        <a:buNone/>
-                      </a:pPr>
-                      <a:r>
-                        <a:rPr/>
-                        <a:t>4.651193</a:t>
-                      </a:r>
-                    </a:p>
-                  </a:txBody>
-                </a:tc>
-                <a:tc>
-                  <a:txBody>
-                    <a:bodyPr/>
-                    <a:lstStyle/>
-                    <a:p>
-                      <a:pPr lvl="0" indent="0" marL="0">
-                        <a:buNone/>
-                      </a:pPr>
-                      <a:r>
-                        <a:rPr/>
-                        <a:t>6.811566</a:t>
-                      </a:r>
-                    </a:p>
-                  </a:txBody>
-                </a:tc>
-                <a:tc>
-                  <a:txBody>
-                    <a:bodyPr/>
-                    <a:lstStyle/>
-                    <a:p>
-                      <a:pPr lvl="0" indent="0" marL="0">
-                        <a:buNone/>
-                      </a:pPr>
-                      <a:r>
-                        <a:rPr/>
-                        <a:t>7.747311</a:t>
-                      </a:r>
-                    </a:p>
-                  </a:txBody>
-                </a:tc>
-              </a:tr>
-              <a:tr h="0">
-                <a:tc>
-                  <a:txBody>
-                    <a:bodyPr/>
-                    <a:lstStyle/>
-                    <a:p>
-                      <a:pPr lvl="0" indent="0" marL="0">
-                        <a:buNone/>
-                      </a:pPr>
-                      <a:r>
-                        <a:rPr/>
-                        <a:t>4.273766</a:t>
-                      </a:r>
-                    </a:p>
-                  </a:txBody>
-                </a:tc>
-                <a:tc>
-                  <a:txBody>
-                    <a:bodyPr/>
-                    <a:lstStyle/>
-                    <a:p>
-                      <a:pPr lvl="0" indent="0" marL="0">
-                        <a:buNone/>
-                      </a:pPr>
-                      <a:r>
-                        <a:rPr/>
-                        <a:t>7.278396</a:t>
-                      </a:r>
-                    </a:p>
-                  </a:txBody>
-                </a:tc>
-                <a:tc>
-                  <a:txBody>
-                    <a:bodyPr/>
-                    <a:lstStyle/>
-                    <a:p>
-                      <a:pPr lvl="0" indent="0" marL="0">
-                        <a:buNone/>
-                      </a:pPr>
-                      <a:r>
-                        <a:rPr/>
-                        <a:t>7.561461</a:t>
-                      </a:r>
-                    </a:p>
-                  </a:txBody>
-                </a:tc>
-              </a:tr>
-              <a:tr h="0">
-                <a:tc>
-                  <a:txBody>
-                    <a:bodyPr/>
-                    <a:lstStyle/>
-                    <a:p>
-                      <a:pPr lvl="0" indent="0" marL="0">
-                        <a:buNone/>
-                      </a:pPr>
-                      <a:r>
-                        <a:rPr/>
-                        <a:t>5.024673</a:t>
-                      </a:r>
-                    </a:p>
-                  </a:txBody>
-                </a:tc>
-                <a:tc>
-                  <a:txBody>
-                    <a:bodyPr/>
-                    <a:lstStyle/>
-                    <a:p>
-                      <a:pPr lvl="0" indent="0" marL="0">
-                        <a:buNone/>
-                      </a:pPr>
-                      <a:r>
-                        <a:rPr/>
-                        <a:t>9.519218</a:t>
-                      </a:r>
-                    </a:p>
-                  </a:txBody>
-                </a:tc>
-                <a:tc>
-                  <a:txBody>
-                    <a:bodyPr/>
-                    <a:lstStyle/>
-                    <a:p>
-                      <a:pPr lvl="0" indent="0" marL="0">
-                        <a:buNone/>
-                      </a:pPr>
-                      <a:r>
-                        <a:rPr/>
-                        <a:t>7.447487</a:t>
-                      </a:r>
-                    </a:p>
-                  </a:txBody>
-                </a:tc>
-              </a:tr>
-              <a:tr h="0">
-                <a:tc>
-                  <a:txBody>
-                    <a:bodyPr/>
-                    <a:lstStyle/>
-                    <a:p>
-                      <a:pPr lvl="0" indent="0" marL="0">
-                        <a:buNone/>
-                      </a:pPr>
-                      <a:r>
-                        <a:rPr/>
-                        <a:t>4.817659</a:t>
-                      </a:r>
-                    </a:p>
-                  </a:txBody>
-                </a:tc>
-                <a:tc>
-                  <a:txBody>
-                    <a:bodyPr/>
-                    <a:lstStyle/>
-                    <a:p>
-                      <a:pPr lvl="0" indent="0" marL="0">
-                        <a:buNone/>
-                      </a:pPr>
-                      <a:r>
-                        <a:rPr/>
-                        <a:t>8.377388</a:t>
-                      </a:r>
-                    </a:p>
-                  </a:txBody>
-                </a:tc>
-                <a:tc>
-                  <a:txBody>
-                    <a:bodyPr/>
-                    <a:lstStyle/>
-                    <a:p>
-                      <a:pPr lvl="0" indent="0" marL="0">
-                        <a:buNone/>
-                      </a:pPr>
-                      <a:r>
-                        <a:rPr/>
-                        <a:t>8.062840</a:t>
-                      </a:r>
-                    </a:p>
-                  </a:txBody>
-                </a:tc>
-              </a:tr>
-              <a:tr h="0">
-                <a:tc>
-                  <a:txBody>
-                    <a:bodyPr/>
-                    <a:lstStyle/>
-                    <a:p>
-                      <a:pPr lvl="0" indent="0" marL="0">
-                        <a:buNone/>
-                      </a:pPr>
-                      <a:r>
-                        <a:rPr/>
-                        <a:t>3.790207</a:t>
-                      </a:r>
-                    </a:p>
-                  </a:txBody>
-                </a:tc>
-                <a:tc>
-                  <a:txBody>
-                    <a:bodyPr/>
-                    <a:lstStyle/>
-                    <a:p>
-                      <a:pPr lvl="0" indent="0" marL="0">
-                        <a:buNone/>
-                      </a:pPr>
-                      <a:r>
-                        <a:rPr/>
-                        <a:t>5.947777</a:t>
-                      </a:r>
-                    </a:p>
-                  </a:txBody>
-                </a:tc>
-                <a:tc>
-                  <a:txBody>
-                    <a:bodyPr/>
-                    <a:lstStyle/>
-                    <a:p>
-                      <a:pPr lvl="0" indent="0" marL="0">
-                        <a:buNone/>
-                      </a:pPr>
-                      <a:r>
-                        <a:rPr/>
-                        <a:t>8.831179</a:t>
-                      </a:r>
-                    </a:p>
-                  </a:txBody>
-                </a:tc>
-              </a:tr>
-              <a:tr h="0">
-                <a:tc>
-                  <a:txBody>
-                    <a:bodyPr/>
-                    <a:lstStyle/>
-                    <a:p>
-                      <a:pPr lvl="0" indent="0" marL="0">
-                        <a:buNone/>
-                      </a:pPr>
-                      <a:r>
-                        <a:rPr/>
-                        <a:t>4.378168</a:t>
-                      </a:r>
-                    </a:p>
-                  </a:txBody>
-                </a:tc>
-                <a:tc>
-                  <a:txBody>
-                    <a:bodyPr/>
-                    <a:lstStyle/>
-                    <a:p>
-                      <a:pPr lvl="0" indent="0" marL="0">
-                        <a:buNone/>
-                      </a:pPr>
-                      <a:r>
-                        <a:rPr/>
-                        <a:t>6.635963</a:t>
-                      </a:r>
-                    </a:p>
-                  </a:txBody>
-                </a:tc>
-                <a:tc>
-                  <a:txBody>
-                    <a:bodyPr/>
-                    <a:lstStyle/>
-                    <a:p>
-                      <a:pPr lvl="0" indent="0" marL="0">
-                        <a:buNone/>
-                      </a:pPr>
-                      <a:r>
-                        <a:rPr/>
-                        <a:t>6.485790</a:t>
-                      </a:r>
-                    </a:p>
-                  </a:txBody>
-                </a:tc>
-              </a:tr>
-              <a:tr h="0">
-                <a:tc>
-                  <a:txBody>
-                    <a:bodyPr/>
-                    <a:lstStyle/>
-                    <a:p>
-                      <a:pPr lvl="0" indent="0" marL="0">
-                        <a:buNone/>
-                      </a:pPr>
-                      <a:r>
-                        <a:rPr/>
-                        <a:t>3.054591</a:t>
-                      </a:r>
-                    </a:p>
-                  </a:txBody>
-                </a:tc>
-                <a:tc>
-                  <a:txBody>
-                    <a:bodyPr/>
-                    <a:lstStyle/>
-                    <a:p>
-                      <a:pPr lvl="0" indent="0" marL="0">
-                        <a:buNone/>
-                      </a:pPr>
-                      <a:r>
-                        <a:rPr/>
-                        <a:t>7.799219</a:t>
-                      </a:r>
-                    </a:p>
-                  </a:txBody>
-                </a:tc>
-                <a:tc>
-                  <a:txBody>
-                    <a:bodyPr/>
-                    <a:lstStyle/>
-                    <a:p>
-                      <a:pPr lvl="0" indent="0" marL="0">
-                        <a:buNone/>
-                      </a:pPr>
-                      <a:r>
-                        <a:rPr/>
-                        <a:t>8.711980</a:t>
-                      </a:r>
-                    </a:p>
-                  </a:txBody>
-                </a:tc>
-              </a:tr>
-              <a:tr h="0">
-                <a:tc>
-                  <a:txBody>
-                    <a:bodyPr/>
-                    <a:lstStyle/>
-                    <a:p>
-                      <a:pPr lvl="0" indent="0" marL="0">
-                        <a:buNone/>
-                      </a:pPr>
-                      <a:r>
-                        <a:rPr/>
-                        <a:t>4.856923</a:t>
-                      </a:r>
-                    </a:p>
-                  </a:txBody>
-                </a:tc>
-                <a:tc>
-                  <a:txBody>
-                    <a:bodyPr/>
-                    <a:lstStyle/>
-                    <a:p>
-                      <a:pPr lvl="0" indent="0" marL="0">
-                        <a:buNone/>
-                      </a:pPr>
-                      <a:r>
-                        <a:rPr/>
-                        <a:t>8.865779</a:t>
-                      </a:r>
-                    </a:p>
-                  </a:txBody>
-                </a:tc>
-                <a:tc>
-                  <a:txBody>
-                    <a:bodyPr/>
-                    <a:lstStyle/>
-                    <a:p>
-                      <a:pPr lvl="0" indent="0" marL="0">
-                        <a:buNone/>
-                      </a:pPr>
-                      <a:r>
-                        <a:rPr/>
-                        <a:t>9.736675</a:t>
-                      </a:r>
-                    </a:p>
-                  </a:txBody>
-                </a:tc>
-              </a:tr>
-              <a:tr h="0">
-                <a:tc>
-                  <a:txBody>
-                    <a:bodyPr/>
-                    <a:lstStyle/>
-                    <a:p>
-                      <a:pPr lvl="0" indent="0" marL="0">
-                        <a:buNone/>
-                      </a:pPr>
-                      <a:r>
-                        <a:rPr/>
-                        <a:t>3.538962</a:t>
-                      </a:r>
-                    </a:p>
-                  </a:txBody>
-                </a:tc>
-                <a:tc>
-                  <a:txBody>
-                    <a:bodyPr/>
-                    <a:lstStyle/>
-                    <a:p>
-                      <a:pPr lvl="0" indent="0" marL="0">
-                        <a:buNone/>
-                      </a:pPr>
-                      <a:r>
-                        <a:rPr/>
-                        <a:t>7.898117</a:t>
-                      </a:r>
-                    </a:p>
-                  </a:txBody>
-                </a:tc>
-                <a:tc>
-                  <a:txBody>
-                    <a:bodyPr/>
-                    <a:lstStyle/>
-                    <a:p>
-                      <a:pPr lvl="0" indent="0" marL="0">
-                        <a:buNone/>
-                      </a:pPr>
-                      <a:r>
-                        <a:rPr/>
-                        <a:t>10.537574</a:t>
-                      </a:r>
-                    </a:p>
-                  </a:txBody>
-                </a:tc>
-              </a:tr>
-              <a:tr h="0">
-                <a:tc>
-                  <a:txBody>
-                    <a:bodyPr/>
-                    <a:lstStyle/>
-                    <a:p>
-                      <a:pPr lvl="0" indent="0" marL="0">
-                        <a:buNone/>
-                      </a:pPr>
-                      <a:r>
-                        <a:rPr/>
-                        <a:t>6.416773</a:t>
-                      </a:r>
-                    </a:p>
-                  </a:txBody>
-                </a:tc>
-                <a:tc>
-                  <a:txBody>
-                    <a:bodyPr/>
-                    <a:lstStyle/>
-                    <a:p>
-                      <a:pPr lvl="0" indent="0" marL="0">
-                        <a:buNone/>
-                      </a:pPr>
-                      <a:r>
-                        <a:rPr/>
-                        <a:t>8.624187</a:t>
-                      </a:r>
-                    </a:p>
-                  </a:txBody>
-                </a:tc>
-                <a:tc>
-                  <a:txBody>
-                    <a:bodyPr/>
-                    <a:lstStyle/>
-                    <a:p>
-                      <a:pPr lvl="0" indent="0" marL="0">
-                        <a:buNone/>
-                      </a:pPr>
-                      <a:r>
-                        <a:rPr/>
-                        <a:t>9.801176</a:t>
-                      </a:r>
-                    </a:p>
-                  </a:txBody>
-                </a:tc>
-              </a:tr>
-              <a:tr h="0">
-                <a:tc>
-                  <a:txBody>
-                    <a:bodyPr/>
-                    <a:lstStyle/>
-                    <a:p>
-                      <a:pPr lvl="0" indent="0" marL="0">
-                        <a:buNone/>
-                      </a:pPr>
-                      <a:r>
-                        <a:rPr/>
-                        <a:t>2.348951</a:t>
-                      </a:r>
-                    </a:p>
-                  </a:txBody>
-                </a:tc>
-                <a:tc>
-                  <a:txBody>
-                    <a:bodyPr/>
-                    <a:lstStyle/>
-                    <a:p>
-                      <a:pPr lvl="0" indent="0" marL="0">
-                        <a:buNone/>
-                      </a:pPr>
-                      <a:r>
-                        <a:rPr/>
-                        <a:t>8.959005</a:t>
-                      </a:r>
-                    </a:p>
-                  </a:txBody>
-                </a:tc>
-                <a:tc>
-                  <a:txBody>
-                    <a:bodyPr/>
-                    <a:lstStyle/>
-                    <a:p>
-                      <a:pPr lvl="0" indent="0" marL="0">
-                        <a:buNone/>
-                      </a:pPr>
-                      <a:r>
-                        <a:rPr/>
-                        <a:t>9.256775</a:t>
-                      </a:r>
-                    </a:p>
-                  </a:txBody>
-                </a:tc>
-              </a:tr>
-              <a:tr h="0">
-                <a:tc>
-                  <a:txBody>
-                    <a:bodyPr/>
-                    <a:lstStyle/>
-                    <a:p>
-                      <a:pPr lvl="0" indent="0" marL="0">
-                        <a:buNone/>
-                      </a:pPr>
-                      <a:r>
-                        <a:rPr/>
-                        <a:t>3.536013</a:t>
-                      </a:r>
-                    </a:p>
-                  </a:txBody>
-                </a:tc>
-                <a:tc>
-                  <a:txBody>
-                    <a:bodyPr/>
-                    <a:lstStyle/>
-                    <a:p>
-                      <a:pPr lvl="0" indent="0" marL="0">
-                        <a:buNone/>
-                      </a:pPr>
-                      <a:r>
-                        <a:rPr/>
-                        <a:t>9.671055</a:t>
-                      </a:r>
-                    </a:p>
-                  </a:txBody>
-                </a:tc>
-                <a:tc>
-                  <a:txBody>
-                    <a:bodyPr/>
-                    <a:lstStyle/>
-                    <a:p>
-                      <a:pPr lvl="0" indent="0" marL="0">
-                        <a:buNone/>
-                      </a:pPr>
-                      <a:r>
-                        <a:rPr/>
-                        <a:t>6.773270</a:t>
-                      </a:r>
-                    </a:p>
-                  </a:txBody>
-                </a:tc>
-              </a:tr>
-              <a:tr h="0">
-                <a:tc>
-                  <a:txBody>
-                    <a:bodyPr/>
-                    <a:lstStyle/>
-                    <a:p>
-                      <a:pPr lvl="0" indent="0" marL="0">
-                        <a:buNone/>
-                      </a:pPr>
-                      <a:r>
-                        <a:rPr/>
-                        <a:t>4.825380</a:t>
-                      </a:r>
-                    </a:p>
-                  </a:txBody>
-                </a:tc>
-                <a:tc>
-                  <a:txBody>
-                    <a:bodyPr/>
-                    <a:lstStyle/>
-                    <a:p>
-                      <a:pPr lvl="0" indent="0" marL="0">
-                        <a:buNone/>
-                      </a:pPr>
-                      <a:r>
-                        <a:rPr/>
-                        <a:t>8.056017</a:t>
-                      </a:r>
-                    </a:p>
-                  </a:txBody>
-                </a:tc>
-                <a:tc>
-                  <a:txBody>
-                    <a:bodyPr/>
-                    <a:lstStyle/>
-                    <a:p>
-                      <a:pPr lvl="0" indent="0" marL="0">
-                        <a:buNone/>
-                      </a:pPr>
-                      <a:r>
-                        <a:rPr/>
-                        <a:t>7.898493</a:t>
-                      </a:r>
-                    </a:p>
-                  </a:txBody>
-                </a:tc>
-              </a:tr>
-              <a:tr h="0">
-                <a:tc>
-                  <a:txBody>
-                    <a:bodyPr/>
-                    <a:lstStyle/>
-                    <a:p>
-                      <a:pPr lvl="0" indent="0" marL="0">
-                        <a:buNone/>
-                      </a:pPr>
-                      <a:r>
-                        <a:rPr/>
-                        <a:t>4.510133</a:t>
-                      </a:r>
-                    </a:p>
-                  </a:txBody>
-                </a:tc>
-                <a:tc>
-                  <a:txBody>
-                    <a:bodyPr/>
-                    <a:lstStyle/>
-                    <a:p>
-                      <a:pPr lvl="0" indent="0" marL="0">
-                        <a:buNone/>
-                      </a:pPr>
-                      <a:r>
-                        <a:rPr/>
-                        <a:t>7.948018</a:t>
-                      </a:r>
-                    </a:p>
-                  </a:txBody>
-                </a:tc>
-                <a:tc>
-                  <a:txBody>
-                    <a:bodyPr/>
-                    <a:lstStyle/>
-                    <a:p>
-                      <a:pPr lvl="0" indent="0" marL="0">
-                        <a:buNone/>
-                      </a:pPr>
-                      <a:r>
-                        <a:rPr/>
-                        <a:t>8.147954</a:t>
-                      </a:r>
-                    </a:p>
-                  </a:txBody>
-                </a:tc>
-              </a:tr>
-              <a:tr h="0">
-                <a:tc>
-                  <a:txBody>
-                    <a:bodyPr/>
-                    <a:lstStyle/>
-                    <a:p>
-                      <a:pPr lvl="0" indent="0" marL="0">
-                        <a:buNone/>
-                      </a:pPr>
-                      <a:r>
-                        <a:rPr/>
-                        <a:t>3.410519</a:t>
-                      </a:r>
-                    </a:p>
-                  </a:txBody>
-                </a:tc>
-                <a:tc>
-                  <a:txBody>
-                    <a:bodyPr/>
-                    <a:lstStyle/>
-                    <a:p>
-                      <a:pPr lvl="0" indent="0" marL="0">
-                        <a:buNone/>
-                      </a:pPr>
-                      <a:r>
-                        <a:rPr/>
-                        <a:t>6.246763</a:t>
-                      </a:r>
-                    </a:p>
-                  </a:txBody>
-                </a:tc>
-                <a:tc>
-                  <a:txBody>
-                    <a:bodyPr/>
-                    <a:lstStyle/>
-                    <a:p>
-                      <a:pPr lvl="0" indent="0" marL="0">
-                        <a:buNone/>
-                      </a:pPr>
-                      <a:r>
-                        <a:rPr/>
-                        <a:t>9.203524</a:t>
-                      </a:r>
-                    </a:p>
-                  </a:txBody>
-                </a:tc>
-              </a:tr>
-              <a:tr h="0">
-                <a:tc>
-                  <a:txBody>
-                    <a:bodyPr/>
-                    <a:lstStyle/>
-                    <a:p>
-                      <a:pPr lvl="0" indent="0" marL="0">
-                        <a:buNone/>
-                      </a:pPr>
-                      <a:r>
-                        <a:rPr/>
-                        <a:t>3.003219</a:t>
-                      </a:r>
-                    </a:p>
-                  </a:txBody>
-                </a:tc>
-                <a:tc>
-                  <a:txBody>
-                    <a:bodyPr/>
-                    <a:lstStyle/>
-                    <a:p>
-                      <a:pPr lvl="0" indent="0" marL="0">
-                        <a:buNone/>
-                      </a:pPr>
-                      <a:r>
-                        <a:rPr/>
-                        <a:t>8.099328</a:t>
-                      </a:r>
-                    </a:p>
-                  </a:txBody>
-                </a:tc>
-                <a:tc>
-                  <a:txBody>
-                    <a:bodyPr/>
-                    <a:lstStyle/>
-                    <a:p>
-                      <a:pPr lvl="0" indent="0" marL="0">
-                        <a:buNone/>
-                      </a:pPr>
-                      <a:r>
-                        <a:rPr/>
-                        <a:t>8.394329</a:t>
-                      </a:r>
-                    </a:p>
-                  </a:txBody>
-                </a:tc>
-              </a:tr>
-              <a:tr h="0">
-                <a:tc>
-                  <a:txBody>
-                    <a:bodyPr/>
-                    <a:lstStyle/>
-                    <a:p>
-                      <a:pPr lvl="0" indent="0" marL="0">
-                        <a:buNone/>
-                      </a:pPr>
-                      <a:r>
-                        <a:rPr/>
-                        <a:t>4.144476</a:t>
-                      </a:r>
-                    </a:p>
-                  </a:txBody>
-                </a:tc>
-                <a:tc>
-                  <a:txBody>
-                    <a:bodyPr/>
-                    <a:lstStyle/>
-                    <a:p>
-                      <a:pPr lvl="0" indent="0" marL="0">
-                        <a:buNone/>
-                      </a:pPr>
-                      <a:r>
-                        <a:rPr/>
-                        <a:t>7.428150</a:t>
-                      </a:r>
-                    </a:p>
-                  </a:txBody>
-                </a:tc>
-                <a:tc>
-                  <a:txBody>
-                    <a:bodyPr/>
-                    <a:lstStyle/>
-                    <a:p>
-                      <a:pPr lvl="0" indent="0" marL="0">
-                        <a:buNone/>
-                      </a:pPr>
-                      <a:r>
-                        <a:rPr/>
-                        <a:t>7.241351</a:t>
-                      </a:r>
-                    </a:p>
-                  </a:txBody>
-                </a:tc>
-              </a:tr>
-              <a:tr h="0">
-                <a:tc>
-                  <a:txBody>
-                    <a:bodyPr/>
-                    <a:lstStyle/>
-                    <a:p>
-                      <a:pPr lvl="0" indent="0" marL="0">
-                        <a:buNone/>
-                      </a:pPr>
-                      <a:r>
-                        <a:rPr/>
-                        <a:t>3.985693</a:t>
-                      </a:r>
-                    </a:p>
-                  </a:txBody>
-                </a:tc>
-                <a:tc>
-                  <a:txBody>
-                    <a:bodyPr/>
-                    <a:lstStyle/>
-                    <a:p>
-                      <a:pPr lvl="0" indent="0" marL="0">
-                        <a:buNone/>
-                      </a:pPr>
-                      <a:r>
-                        <a:rPr/>
-                        <a:t>7.025990</a:t>
-                      </a:r>
-                    </a:p>
-                  </a:txBody>
-                </a:tc>
-                <a:tc>
-                  <a:txBody>
-                    <a:bodyPr/>
-                    <a:lstStyle/>
-                    <a:p>
-                      <a:pPr lvl="0" indent="0" marL="0">
-                        <a:buNone/>
-                      </a:pPr>
-                      <a:r>
-                        <a:rPr/>
-                        <a:t>10.184436</a:t>
-                      </a:r>
-                    </a:p>
-                  </a:txBody>
-                </a:tc>
-              </a:tr>
-              <a:tr h="0">
-                <a:tc>
-                  <a:txBody>
-                    <a:bodyPr/>
-                    <a:lstStyle/>
-                    <a:p>
-                      <a:pPr lvl="0" indent="0" marL="0">
-                        <a:buNone/>
-                      </a:pPr>
-                      <a:r>
-                        <a:rPr/>
-                        <a:t>2.209719</a:t>
-                      </a:r>
-                    </a:p>
-                  </a:txBody>
-                </a:tc>
-                <a:tc>
-                  <a:txBody>
-                    <a:bodyPr/>
-                    <a:lstStyle/>
-                    <a:p>
-                      <a:pPr lvl="0" indent="0" marL="0">
-                        <a:buNone/>
-                      </a:pPr>
-                      <a:r>
-                        <a:rPr/>
-                        <a:t>7.820094</a:t>
-                      </a:r>
-                    </a:p>
-                  </a:txBody>
-                </a:tc>
-                <a:tc>
-                  <a:txBody>
-                    <a:bodyPr/>
-                    <a:lstStyle/>
-                    <a:p>
-                      <a:pPr lvl="0" indent="0" marL="0">
-                        <a:buNone/>
-                      </a:pPr>
-                      <a:r>
-                        <a:rPr/>
-                        <a:t>9.411391</a:t>
-                      </a:r>
-                    </a:p>
-                  </a:txBody>
-                </a:tc>
-              </a:tr>
-              <a:tr h="0">
-                <a:tc>
-                  <a:txBody>
-                    <a:bodyPr/>
-                    <a:lstStyle/>
-                    <a:p>
-                      <a:pPr lvl="0" indent="0" marL="0">
-                        <a:buNone/>
-                      </a:pPr>
-                      <a:r>
-                        <a:rPr/>
-                        <a:t>4.034551</a:t>
-                      </a:r>
-                    </a:p>
-                  </a:txBody>
-                </a:tc>
-                <a:tc>
-                  <a:txBody>
-                    <a:bodyPr/>
-                    <a:lstStyle/>
-                    <a:p>
-                      <a:pPr lvl="0" indent="0" marL="0">
-                        <a:buNone/>
-                      </a:pPr>
-                      <a:r>
-                        <a:rPr/>
-                        <a:t>9.014943</a:t>
-                      </a:r>
-                    </a:p>
-                  </a:txBody>
-                </a:tc>
-                <a:tc>
-                  <a:txBody>
-                    <a:bodyPr/>
-                    <a:lstStyle/>
-                    <a:p>
-                      <a:pPr lvl="0" indent="0" marL="0">
-                        <a:buNone/>
-                      </a:pPr>
-                      <a:r>
-                        <a:rPr/>
-                        <a:t>8.737430</a:t>
-                      </a:r>
-                    </a:p>
-                  </a:txBody>
-                </a:tc>
-              </a:tr>
-              <a:tr h="0">
-                <a:tc>
-                  <a:txBody>
-                    <a:bodyPr/>
-                    <a:lstStyle/>
-                    <a:p>
-                      <a:pPr lvl="0" indent="0" marL="0">
-                        <a:buNone/>
-                      </a:pPr>
-                      <a:r>
-                        <a:rPr/>
-                        <a:t>4.190230</a:t>
-                      </a:r>
-                    </a:p>
-                  </a:txBody>
-                </a:tc>
-                <a:tc>
-                  <a:txBody>
-                    <a:bodyPr/>
-                    <a:lstStyle/>
-                    <a:p>
-                      <a:pPr lvl="0" indent="0" marL="0">
-                        <a:buNone/>
-                      </a:pPr>
-                      <a:r>
-                        <a:rPr/>
-                        <a:t>6.007252</a:t>
-                      </a:r>
-                    </a:p>
-                  </a:txBody>
-                </a:tc>
-                <a:tc>
-                  <a:txBody>
-                    <a:bodyPr/>
-                    <a:lstStyle/>
-                    <a:p>
-                      <a:pPr lvl="0" indent="0" marL="0">
-                        <a:buNone/>
-                      </a:pPr>
-                      <a:r>
-                        <a:rPr/>
-                        <a:t>9.718109</a:t>
-                      </a:r>
-                    </a:p>
-                  </a:txBody>
-                </a:tc>
-              </a:tr>
-              <a:tr h="0">
-                <a:tc>
-                  <a:txBody>
-                    <a:bodyPr/>
-                    <a:lstStyle/>
-                    <a:p>
-                      <a:pPr lvl="0" indent="0" marL="0">
-                        <a:buNone/>
-                      </a:pPr>
-                      <a:r>
-                        <a:rPr/>
-                        <a:t>4.174726</a:t>
-                      </a:r>
-                    </a:p>
-                  </a:txBody>
-                </a:tc>
-                <a:tc>
-                  <a:txBody>
-                    <a:bodyPr/>
-                    <a:lstStyle/>
-                    <a:p>
-                      <a:pPr lvl="0" indent="0" marL="0">
-                        <a:buNone/>
-                      </a:pPr>
-                      <a:r>
-                        <a:rPr/>
-                        <a:t>7.572721</a:t>
-                      </a:r>
-                    </a:p>
-                  </a:txBody>
-                </a:tc>
-                <a:tc>
-                  <a:txBody>
-                    <a:bodyPr/>
-                    <a:lstStyle/>
-                    <a:p>
-                      <a:pPr lvl="0" indent="0" marL="0">
-                        <a:buNone/>
-                      </a:pPr>
-                      <a:r>
-                        <a:rPr/>
-                        <a:t>7.161226</a:t>
-                      </a:r>
-                    </a:p>
-                  </a:txBody>
-                </a:tc>
-              </a:tr>
-              <a:tr h="0">
-                <a:tc>
-                  <a:txBody>
-                    <a:bodyPr/>
-                    <a:lstStyle/>
-                    <a:p>
-                      <a:pPr lvl="0" indent="0" marL="0">
-                        <a:buNone/>
-                      </a:pPr>
-                      <a:r>
-                        <a:rPr/>
-                        <a:t>2.944983</a:t>
-                      </a:r>
-                    </a:p>
-                  </a:txBody>
-                </a:tc>
-                <a:tc>
-                  <a:txBody>
-                    <a:bodyPr/>
-                    <a:lstStyle/>
-                    <a:p>
-                      <a:pPr lvl="0" indent="0" marL="0">
-                        <a:buNone/>
-                      </a:pPr>
-                      <a:r>
-                        <a:rPr/>
-                        <a:t>8.116637</a:t>
-                      </a:r>
-                    </a:p>
-                  </a:txBody>
-                </a:tc>
-                <a:tc>
-                  <a:txBody>
-                    <a:bodyPr/>
-                    <a:lstStyle/>
-                    <a:p>
-                      <a:pPr lvl="0" indent="0" marL="0">
-                        <a:buNone/>
-                      </a:pPr>
-                      <a:r>
-                        <a:rPr/>
-                        <a:t>9.160820</a:t>
-                      </a:r>
-                    </a:p>
-                  </a:txBody>
-                </a:tc>
-              </a:tr>
-              <a:tr h="0">
-                <a:tc>
-                  <a:txBody>
-                    <a:bodyPr/>
-                    <a:lstStyle/>
-                    <a:p>
-                      <a:pPr lvl="0" indent="0" marL="0">
-                        <a:buNone/>
-                      </a:pPr>
-                      <a:r>
-                        <a:rPr/>
-                        <a:t>4.476133</a:t>
-                      </a:r>
-                    </a:p>
-                  </a:txBody>
-                </a:tc>
-                <a:tc>
-                  <a:txBody>
-                    <a:bodyPr/>
-                    <a:lstStyle/>
-                    <a:p>
-                      <a:pPr lvl="0" indent="0" marL="0">
-                        <a:buNone/>
-                      </a:pPr>
-                      <a:r>
-                        <a:rPr/>
-                        <a:t>7.106792</a:t>
-                      </a:r>
-                    </a:p>
-                  </a:txBody>
-                </a:tc>
-                <a:tc>
-                  <a:txBody>
-                    <a:bodyPr/>
-                    <a:lstStyle/>
-                    <a:p>
-                      <a:pPr lvl="0" indent="0" marL="0">
-                        <a:buNone/>
-                      </a:pPr>
-                      <a:r>
-                        <a:rPr/>
-                        <a:t>7.977088</a:t>
-                      </a:r>
-                    </a:p>
-                  </a:txBody>
-                </a:tc>
-              </a:tr>
-              <a:tr h="0">
-                <a:tc>
-                  <a:txBody>
-                    <a:bodyPr/>
-                    <a:lstStyle/>
-                    <a:p>
-                      <a:pPr lvl="0" indent="0" marL="0">
-                        <a:buNone/>
-                      </a:pPr>
-                      <a:r>
-                        <a:rPr/>
-                        <a:t>5.378570</a:t>
-                      </a:r>
-                    </a:p>
-                  </a:txBody>
-                </a:tc>
-                <a:tc>
-                  <a:txBody>
-                    <a:bodyPr/>
-                    <a:lstStyle/>
-                    <a:p>
-                      <a:pPr lvl="0" indent="0" marL="0">
-                        <a:buNone/>
-                      </a:pPr>
-                      <a:r>
-                        <a:rPr/>
-                        <a:t>8.333903</a:t>
-                      </a:r>
-                    </a:p>
-                  </a:txBody>
-                </a:tc>
-                <a:tc>
-                  <a:txBody>
-                    <a:bodyPr/>
-                    <a:lstStyle/>
-                    <a:p>
-                      <a:pPr lvl="0" indent="0" marL="0">
-                        <a:buNone/>
-                      </a:pPr>
-                      <a:r>
-                        <a:rPr/>
-                        <a:t>9.183746</a:t>
-                      </a:r>
-                    </a:p>
-                  </a:txBody>
-                </a:tc>
-              </a:tr>
-              <a:tr h="0">
-                <a:tc>
-                  <a:txBody>
-                    <a:bodyPr/>
-                    <a:lstStyle/>
-                    <a:p>
-                      <a:pPr lvl="0" indent="0" marL="0">
-                        <a:buNone/>
-                      </a:pPr>
-                      <a:r>
-                        <a:rPr/>
-                        <a:t>4.456236</a:t>
-                      </a:r>
-                    </a:p>
-                  </a:txBody>
-                </a:tc>
-                <a:tc>
-                  <a:txBody>
-                    <a:bodyPr/>
-                    <a:lstStyle/>
-                    <a:p>
-                      <a:pPr lvl="0" indent="0" marL="0">
-                        <a:buNone/>
-                      </a:pPr>
-                      <a:r>
-                        <a:rPr/>
-                        <a:t>8.411430</a:t>
-                      </a:r>
-                    </a:p>
-                  </a:txBody>
-                </a:tc>
-                <a:tc>
-                  <a:txBody>
-                    <a:bodyPr/>
-                    <a:lstStyle/>
-                    <a:p>
-                      <a:pPr lvl="0" indent="0" marL="0">
-                        <a:buNone/>
-                      </a:pPr>
-                      <a:r>
-                        <a:rPr/>
-                        <a:t>8.439178</a:t>
-                      </a:r>
-                    </a:p>
-                  </a:txBody>
-                </a:tc>
-              </a:tr>
-              <a:tr h="0">
-                <a:tc>
-                  <a:txBody>
-                    <a:bodyPr/>
-                    <a:lstStyle/>
-                    <a:p>
-                      <a:pPr lvl="0" indent="0" marL="0">
-                        <a:buNone/>
-                      </a:pPr>
-                      <a:r>
-                        <a:rPr/>
-                        <a:t>2.864412</a:t>
-                      </a:r>
-                    </a:p>
-                  </a:txBody>
-                </a:tc>
-                <a:tc>
-                  <a:txBody>
-                    <a:bodyPr/>
-                    <a:lstStyle/>
-                    <a:p>
-                      <a:pPr lvl="0" indent="0" marL="0">
-                        <a:buNone/>
-                      </a:pPr>
-                      <a:r>
-                        <a:rPr/>
-                        <a:t>7.966964</a:t>
-                      </a:r>
-                    </a:p>
-                  </a:txBody>
-                </a:tc>
-                <a:tc>
-                  <a:txBody>
-                    <a:bodyPr/>
-                    <a:lstStyle/>
-                    <a:p>
-                      <a:pPr lvl="0" indent="0" marL="0">
-                        <a:buNone/>
-                      </a:pPr>
-                      <a:r>
-                        <a:rPr/>
-                        <a:t>9.132961</a:t>
-                      </a:r>
-                    </a:p>
-                  </a:txBody>
-                </a:tc>
-              </a:tr>
-              <a:tr h="0">
-                <a:tc>
-                  <a:txBody>
-                    <a:bodyPr/>
-                    <a:lstStyle/>
-                    <a:p>
-                      <a:pPr lvl="0" indent="0" marL="0">
-                        <a:buNone/>
-                      </a:pPr>
-                      <a:r>
-                        <a:rPr/>
-                        <a:t>3.564355</a:t>
-                      </a:r>
-                    </a:p>
-                  </a:txBody>
-                </a:tc>
-                <a:tc>
-                  <a:txBody>
-                    <a:bodyPr/>
-                    <a:lstStyle/>
-                    <a:p>
-                      <a:pPr lvl="0" indent="0" marL="0">
-                        <a:buNone/>
-                      </a:pPr>
-                      <a:r>
-                        <a:rPr/>
-                        <a:t>5.534102</a:t>
-                      </a:r>
-                    </a:p>
-                  </a:txBody>
-                </a:tc>
-                <a:tc>
-                  <a:txBody>
-                    <a:bodyPr/>
-                    <a:lstStyle/>
-                    <a:p>
-                      <a:pPr lvl="0" indent="0" marL="0">
-                        <a:buNone/>
-                      </a:pPr>
-                      <a:r>
-                        <a:rPr/>
-                        <a:t>9.835518</a:t>
-                      </a:r>
-                    </a:p>
-                  </a:txBody>
-                </a:tc>
-              </a:tr>
-              <a:tr h="0">
-                <a:tc>
-                  <a:txBody>
-                    <a:bodyPr/>
-                    <a:lstStyle/>
-                    <a:p>
-                      <a:pPr lvl="0" indent="0" marL="0">
-                        <a:buNone/>
-                      </a:pPr>
-                      <a:r>
-                        <a:rPr/>
-                        <a:t>4.346104</a:t>
-                      </a:r>
-                    </a:p>
-                  </a:txBody>
-                </a:tc>
-                <a:tc>
-                  <a:txBody>
-                    <a:bodyPr/>
-                    <a:lstStyle/>
-                    <a:p>
-                      <a:pPr lvl="0" indent="0" marL="0">
-                        <a:buNone/>
-                      </a:pPr>
-                      <a:r>
-                        <a:rPr/>
-                        <a:t>10.571458</a:t>
-                      </a:r>
-                    </a:p>
-                  </a:txBody>
-                </a:tc>
-                <a:tc>
-                  <a:txBody>
-                    <a:bodyPr/>
-                    <a:lstStyle/>
-                    <a:p>
-                      <a:pPr lvl="0" indent="0" marL="0">
-                        <a:buNone/>
-                      </a:pPr>
-                      <a:r>
-                        <a:rPr/>
-                        <a:t>8.507290</a:t>
-                      </a:r>
-                    </a:p>
-                  </a:txBody>
-                </a:tc>
-              </a:tr>
-            </a:tbl>
-          </a:graphicData>
-        </a:graphic>
-      </p:graphicFrame>
+        </p:nvSpPr>
+        <p:spPr/>
+        <p:txBody>
+          <a:bodyPr/>
+          <a:lstStyle/>
+          <a:p>
+            <a:pPr lvl="0" indent="0">
+              <a:buNone/>
+            </a:pPr>
+            <a:r>
+              <a:rPr>
+                <a:latin typeface="Courier"/>
+              </a:rPr>
+              <a:t>UNIANOVA years BY attr
+  /METHOD=SSTYPE(3)
+  /POSTHOC=attr(LSD)
+  /PRINT=DESCRIPTIVE ETASQ
+  /CRITERIA=ALPHA(.05).</a:t>
+            </a:r>
+          </a:p>
+        </p:txBody>
+      </p:sp>
     </p:spTree>
   </p:cSld>
 </p:sld>
@@ -7873,7 +7256,7 @@
         <a:srgbClr val="E8E3CE"/>
       </a:lt2>
       <a:accent1>
-        <a:srgbClr val="F6A21D"/>
+        <a:srgbClr val="B65B00"/>
       </a:accent1>
       <a:accent2>
         <a:srgbClr val="5E5E5E"/>

--- a/labs/lab11/slides/slides.pptx
+++ b/labs/lab11/slides/slides.pptx
@@ -5,7 +5,7 @@
     <p:sldMasterId id="2147483696" r:id="rId1"/>
   </p:sldMasterIdLst>
   <p:notesMasterIdLst>
-    <p:notesMasterId r:id="rId19"/>
+    <p:notesMasterId r:id="rId17"/>
   </p:notesMasterIdLst>
   <p:sldIdLst>
     <p:sldId id="256" r:id="rId2"/>
@@ -23,8 +23,6 @@
     <p:sldId id="268" r:id="rId14"/>
     <p:sldId id="269" r:id="rId15"/>
     <p:sldId id="270" r:id="rId16"/>
-    <p:sldId id="271" r:id="rId17"/>
-    <p:sldId id="272" r:id="rId18"/>
   </p:sldIdLst>
   <p:sldSz cx="12192000" cy="6858000"/>
   <p:notesSz cx="6858000" cy="9144000"/>
@@ -529,7 +527,7 @@
             </a:pPr>
             <a:r>
               <a:rPr/>
-              <a:t>The jury file supports both walkthroughs. Football and tips are used in the independent sections.</a:t>
+              <a:t>Both walkthroughs use jury_data.sav. Keep the Lab 11 worksheet, syntax, and Output Viewer open. The simple guides demonstrate the procedures with other datasets; use the jury variables and coding specified in this worksheet.</a:t>
             </a:r>
           </a:p>
         </p:txBody>
@@ -611,7 +609,7 @@
             </a:pPr>
             <a:r>
               <a:rPr/>
-              <a:t>SPSS prints each pair twice. Connect each planned pair to RH1, RH2, or RH3 and keep the stated direction visible.</a:t>
+              <a:t>This orientation matches the worksheet: seriousness categories are rows and attractiveness groups are columns. Column percentages describe seriousness within each attractiveness group. The expected counts help you check the Pearson test’s conditions. The guide uses a different dataset, so its results should not be copied into this worksheet.</a:t>
             </a:r>
           </a:p>
         </p:txBody>
@@ -633,7 +631,7 @@
           <a:p>
             <a:fld id="{18BDFEC3-8487-43E8-A154-7C12CBC1FFF2}" type="slidenum">
               <a:rPr lang="en-US"/>
-              <a:t>11</a:t>
+              <a:t>12</a:t>
             </a:fld>
             <a:endParaRPr lang="en-US"/>
           </a:p>
@@ -693,17 +691,7 @@
             </a:pPr>
             <a:r>
               <a:rPr/>
-              <a:t>The worksheet requires this recode before the crosstab. Create a new variable rather than changing </a:t>
-            </a:r>
-            <a:r>
-              <a:rPr>
-                <a:latin typeface="Courier"/>
-              </a:rPr>
-              <a:t>serious</a:t>
-            </a:r>
-            <a:r>
-              <a:rPr/>
-              <a:t>, then confirm its values before continuing.</a:t>
+              <a:t>Use the Pearson Chi-Square row, not a continuity-correction or Fisher result. Describe the proportions before deciding whether the evidence supports an association. The worksheet asks for pairwise calculations too; completing those practice fields does not change the omnibus conclusion.</a:t>
             </a:r>
           </a:p>
         </p:txBody>
@@ -725,7 +713,7 @@
           <a:p>
             <a:fld id="{18BDFEC3-8487-43E8-A154-7C12CBC1FFF2}" type="slidenum">
               <a:rPr lang="en-US"/>
-              <a:t>12</a:t>
+              <a:t>13</a:t>
             </a:fld>
             <a:endParaRPr lang="en-US"/>
           </a:p>
@@ -785,7 +773,7 @@
             </a:pPr>
             <a:r>
               <a:rPr/>
-              <a:t>Use the same jury subset. Describe row or column percentages before statistical significance, then follow up with the worksheet’s corrected threshold only when justified.</a:t>
+              <a:t>Use the pr_chi&gt;r tab in the same Computator workbook. Compare Beautiful with Average, Beautiful with Unattractive, and Average with Unattractive. The current worksheet/checker use the unadjusted one-df critical value, not a Bonferroni-corrected threshold. Take the counts from the swindle crosstab; do not combine crime conditions. Describe a nonsignificant result as insufficient evidence of a difference, not proof that the proportions are equal.</a:t>
             </a:r>
           </a:p>
         </p:txBody>
@@ -807,7 +795,7 @@
           <a:p>
             <a:fld id="{18BDFEC3-8487-43E8-A154-7C12CBC1FFF2}" type="slidenum">
               <a:rPr lang="en-US"/>
-              <a:t>13</a:t>
+              <a:t>14</a:t>
             </a:fld>
             <a:endParaRPr lang="en-US"/>
           </a:p>
@@ -867,7 +855,7 @@
             </a:pPr>
             <a:r>
               <a:rPr/>
-              <a:t>Save every filter in syntax. A leftover pairwise filter will silently invalidate the next comparison.</a:t>
+              <a:t>Report the sample size, chi-square, degrees of freedom, and p alongside the pattern of counts or proportions. Use the worksheet for the pairwise effect-size and decision fields. Save the syntax and output. Turn the filter off when you finish working with this dataset.</a:t>
             </a:r>
           </a:p>
         </p:txBody>
@@ -889,253 +877,7 @@
           <a:p>
             <a:fld id="{18BDFEC3-8487-43E8-A154-7C12CBC1FFF2}" type="slidenum">
               <a:rPr lang="en-US"/>
-              <a:t>14</a:t>
-            </a:fld>
-            <a:endParaRPr lang="en-US"/>
-          </a:p>
-        </p:txBody>
-      </p:sp>
-    </p:spTree>
-  </p:cSld>
-</p:notes>
-</file>
-
-<file path=ppt/notesSlides/notesSlide14.xml><?xml version="1.0" encoding="utf-8"?>
-<p:notes xmlns:a="http://schemas.openxmlformats.org/drawingml/2006/main" xmlns:r="http://schemas.openxmlformats.org/officeDocument/2006/relationships" xmlns:p="http://schemas.openxmlformats.org/presentationml/2006/main">
-  <p:cSld>
-    <p:spTree>
-      <p:nvGrpSpPr>
-        <p:cNvPr id="1" name=""/>
-        <p:cNvGrpSpPr/>
-        <p:nvPr/>
-      </p:nvGrpSpPr>
-      <p:grpSpPr>
-        <a:xfrm>
-          <a:off x="0" y="0"/>
-          <a:ext cx="0" cy="0"/>
-          <a:chOff x="0" y="0"/>
-          <a:chExt cx="0" cy="0"/>
-        </a:xfrm>
-      </p:grpSpPr>
-      <p:sp>
-        <p:nvSpPr>
-          <p:cNvPr id="2" name="Slide Image Placeholder 1"/>
-          <p:cNvSpPr>
-            <a:spLocks noGrp="1" noRot="1" noChangeAspect="1"/>
-          </p:cNvSpPr>
-          <p:nvPr>
-            <p:ph type="sldImg"/>
-          </p:nvPr>
-        </p:nvSpPr>
-        <p:spPr/>
-      </p:sp>
-      <p:sp>
-        <p:nvSpPr>
-          <p:cNvPr id="3" name="Notes Placeholder 2"/>
-          <p:cNvSpPr>
-            <a:spLocks noGrp="1"/>
-          </p:cNvSpPr>
-          <p:nvPr>
-            <p:ph type="body" idx="1"/>
-          </p:nvPr>
-        </p:nvSpPr>
-        <p:spPr/>
-        <p:txBody>
-          <a:bodyPr/>
-          <a:lstStyle/>
-          <a:p>
-            <a:pPr lvl="0" indent="0" marL="0">
-              <a:buNone/>
-            </a:pPr>
-            <a:r>
-              <a:rPr/>
-              <a:t>The independent analyses use different variables, but their order should match the walkthrough exactly.</a:t>
-            </a:r>
-          </a:p>
-        </p:txBody>
-      </p:sp>
-      <p:sp>
-        <p:nvSpPr>
-          <p:cNvPr id="4" name="Slide Number Placeholder 3"/>
-          <p:cNvSpPr>
-            <a:spLocks noGrp="1"/>
-          </p:cNvSpPr>
-          <p:nvPr>
-            <p:ph type="sldNum" sz="quarter" idx="10"/>
-          </p:nvPr>
-        </p:nvSpPr>
-        <p:spPr/>
-        <p:txBody>
-          <a:bodyPr/>
-          <a:lstStyle/>
-          <a:p>
-            <a:fld id="{18BDFEC3-8487-43E8-A154-7C12CBC1FFF2}" type="slidenum">
-              <a:rPr lang="en-US"/>
               <a:t>15</a:t>
-            </a:fld>
-            <a:endParaRPr lang="en-US"/>
-          </a:p>
-        </p:txBody>
-      </p:sp>
-    </p:spTree>
-  </p:cSld>
-</p:notes>
-</file>
-
-<file path=ppt/notesSlides/notesSlide15.xml><?xml version="1.0" encoding="utf-8"?>
-<p:notes xmlns:a="http://schemas.openxmlformats.org/drawingml/2006/main" xmlns:r="http://schemas.openxmlformats.org/officeDocument/2006/relationships" xmlns:p="http://schemas.openxmlformats.org/presentationml/2006/main">
-  <p:cSld>
-    <p:spTree>
-      <p:nvGrpSpPr>
-        <p:cNvPr id="1" name=""/>
-        <p:cNvGrpSpPr/>
-        <p:nvPr/>
-      </p:nvGrpSpPr>
-      <p:grpSpPr>
-        <a:xfrm>
-          <a:off x="0" y="0"/>
-          <a:ext cx="0" cy="0"/>
-          <a:chOff x="0" y="0"/>
-          <a:chExt cx="0" cy="0"/>
-        </a:xfrm>
-      </p:grpSpPr>
-      <p:sp>
-        <p:nvSpPr>
-          <p:cNvPr id="2" name="Slide Image Placeholder 1"/>
-          <p:cNvSpPr>
-            <a:spLocks noGrp="1" noRot="1" noChangeAspect="1"/>
-          </p:cNvSpPr>
-          <p:nvPr>
-            <p:ph type="sldImg"/>
-          </p:nvPr>
-        </p:nvSpPr>
-        <p:spPr/>
-      </p:sp>
-      <p:sp>
-        <p:nvSpPr>
-          <p:cNvPr id="3" name="Notes Placeholder 2"/>
-          <p:cNvSpPr>
-            <a:spLocks noGrp="1"/>
-          </p:cNvSpPr>
-          <p:nvPr>
-            <p:ph type="body" idx="1"/>
-          </p:nvPr>
-        </p:nvSpPr>
-        <p:spPr/>
-        <p:txBody>
-          <a:bodyPr/>
-          <a:lstStyle/>
-          <a:p>
-            <a:pPr lvl="0" indent="0" marL="0">
-              <a:buNone/>
-            </a:pPr>
-            <a:r>
-              <a:rPr/>
-              <a:t>This output is generated with create_apa_anova_descriptives_table(), consistent with the course reporting functions and APA table template.</a:t>
-            </a:r>
-          </a:p>
-        </p:txBody>
-      </p:sp>
-      <p:sp>
-        <p:nvSpPr>
-          <p:cNvPr id="4" name="Slide Number Placeholder 3"/>
-          <p:cNvSpPr>
-            <a:spLocks noGrp="1"/>
-          </p:cNvSpPr>
-          <p:nvPr>
-            <p:ph type="sldNum" sz="quarter" idx="10"/>
-          </p:nvPr>
-        </p:nvSpPr>
-        <p:spPr/>
-        <p:txBody>
-          <a:bodyPr/>
-          <a:lstStyle/>
-          <a:p>
-            <a:fld id="{18BDFEC3-8487-43E8-A154-7C12CBC1FFF2}" type="slidenum">
-              <a:rPr lang="en-US"/>
-              <a:t>16</a:t>
-            </a:fld>
-            <a:endParaRPr lang="en-US"/>
-          </a:p>
-        </p:txBody>
-      </p:sp>
-    </p:spTree>
-  </p:cSld>
-</p:notes>
-</file>
-
-<file path=ppt/notesSlides/notesSlide16.xml><?xml version="1.0" encoding="utf-8"?>
-<p:notes xmlns:a="http://schemas.openxmlformats.org/drawingml/2006/main" xmlns:r="http://schemas.openxmlformats.org/officeDocument/2006/relationships" xmlns:p="http://schemas.openxmlformats.org/presentationml/2006/main">
-  <p:cSld>
-    <p:spTree>
-      <p:nvGrpSpPr>
-        <p:cNvPr id="1" name=""/>
-        <p:cNvGrpSpPr/>
-        <p:nvPr/>
-      </p:nvGrpSpPr>
-      <p:grpSpPr>
-        <a:xfrm>
-          <a:off x="0" y="0"/>
-          <a:ext cx="0" cy="0"/>
-          <a:chOff x="0" y="0"/>
-          <a:chExt cx="0" cy="0"/>
-        </a:xfrm>
-      </p:grpSpPr>
-      <p:sp>
-        <p:nvSpPr>
-          <p:cNvPr id="2" name="Slide Image Placeholder 1"/>
-          <p:cNvSpPr>
-            <a:spLocks noGrp="1" noRot="1" noChangeAspect="1"/>
-          </p:cNvSpPr>
-          <p:nvPr>
-            <p:ph type="sldImg"/>
-          </p:nvPr>
-        </p:nvSpPr>
-        <p:spPr/>
-      </p:sp>
-      <p:sp>
-        <p:nvSpPr>
-          <p:cNvPr id="3" name="Notes Placeholder 2"/>
-          <p:cNvSpPr>
-            <a:spLocks noGrp="1"/>
-          </p:cNvSpPr>
-          <p:nvPr>
-            <p:ph type="body" idx="1"/>
-          </p:nvPr>
-        </p:nvSpPr>
-        <p:spPr/>
-        <p:txBody>
-          <a:bodyPr/>
-          <a:lstStyle/>
-          <a:p>
-            <a:pPr lvl="0" indent="0" marL="0">
-              <a:buNone/>
-            </a:pPr>
-            <a:r>
-              <a:rPr/>
-              <a:t>For chi-square, replace means with the contingency-table pattern and report χ², df, p, sample size, and effect size before the pairwise results.</a:t>
-            </a:r>
-          </a:p>
-        </p:txBody>
-      </p:sp>
-      <p:sp>
-        <p:nvSpPr>
-          <p:cNvPr id="4" name="Slide Number Placeholder 3"/>
-          <p:cNvSpPr>
-            <a:spLocks noGrp="1"/>
-          </p:cNvSpPr>
-          <p:nvPr>
-            <p:ph type="sldNum" sz="quarter" idx="10"/>
-          </p:nvPr>
-        </p:nvSpPr>
-        <p:spPr/>
-        <p:txBody>
-          <a:bodyPr/>
-          <a:lstStyle/>
-          <a:p>
-            <a:fld id="{18BDFEC3-8487-43E8-A154-7C12CBC1FFF2}" type="slidenum">
-              <a:rPr lang="en-US"/>
-              <a:t>17</a:t>
             </a:fld>
             <a:endParaRPr lang="en-US"/>
           </a:p>
@@ -1195,7 +937,7 @@
             </a:pPr>
             <a:r>
               <a:rPr/>
-              <a:t>The computator supports the worksheet’s LSD minimum-mean-difference steps. The APA template is used in the reporting section.</a:t>
+              <a:t>Start with the omnibus result, then read the worksheet’s pairwise questions. A significant omnibus result does not identify which pairs differ. For this lab, complete the assigned comparison tables and keep their interpretation consistent with the overall result.</a:t>
             </a:r>
           </a:p>
         </p:txBody>
@@ -1277,7 +1019,7 @@
             </a:pPr>
             <a:r>
               <a:rPr/>
-              <a:t>Keep the dataset and saved syntax open together. Inspect variables and cases in the Data Editor; reproduce every command in the Syntax Editor.</a:t>
+              <a:t>The attractiveness codes are 1 = Beautiful, 2 = Average, and 3 = Unattractive. Have students state the three predictions before looking at the means. The 114-row dataset contains both crime conditions; the walkthrough uses only the swindle cases.</a:t>
             </a:r>
           </a:p>
         </p:txBody>
@@ -1359,7 +1101,7 @@
             </a:pPr>
             <a:r>
               <a:rPr/>
-              <a:t>The Output Viewer accumulates tables, charts, warnings, and processing notes. Keep it open beside the data and syntax windows, and export only the results needed for the worksheet or report.</a:t>
+              <a:t>Keep all rows in the file and filter the analysis to crime = 2. Check the selected cases and variable labels before continuing. Keep this filter active for both walkthroughs; do not select the swindle cases again from a smaller pairwise subset.</a:t>
             </a:r>
           </a:p>
         </p:txBody>
@@ -1441,7 +1183,7 @@
             </a:pPr>
             <a:r>
               <a:rPr/>
-              <a:t>This is the central concept in both halves of the lab. Starting with multiple pairwise tests inflates the Type I error rate.</a:t>
+              <a:t>Use years as the dependent variable and attr as the factor. This is the syntax in the worksheet. The worksheet’s comparison table uses the LSD minimum mean difference from the Computator, so a completed SPSS post-hoc table is not needed here.</a:t>
             </a:r>
           </a:p>
         </p:txBody>
@@ -1523,7 +1265,7 @@
             </a:pPr>
             <a:r>
               <a:rPr/>
-              <a:t>The same omnibus-then-follow-up logic applies to both test families, but the evidence is means for ANOVA and cell counts or percentages for chi-square.</a:t>
+              <a:t>MSe is the Within Groups mean square. Compare p with the worksheet’s significance level, then decide whether follow-up comparisons are needed. The omnibus test does not tell you which specific predictions were supported.</a:t>
             </a:r>
           </a:p>
         </p:txBody>
@@ -1545,7 +1287,7 @@
           <a:p>
             <a:fld id="{18BDFEC3-8487-43E8-A154-7C12CBC1FFF2}" type="slidenum">
               <a:rPr lang="en-US"/>
-              <a:t>7</a:t>
+              <a:t>8</a:t>
             </a:fld>
             <a:endParaRPr lang="en-US"/>
           </a:p>
@@ -1605,7 +1347,7 @@
             </a:pPr>
             <a:r>
               <a:rPr/>
-              <a:t>The walkthrough output uses the specified crime subset. Verify the active cases and the attractiveness value labels before running either analysis.</a:t>
+              <a:t>Use the LSD-HSD tab for the worksheet’s common cutoff and pr_means-&gt; r &amp; d for the pairwise effect sizes. The worksheet/checker use average group size and a t-table lookup. The newer guide distinguishes equal-group formulas from pair-specific formulas for unequal groups; those exact cutoffs can differ from the worksheet’s approximation. Follow the worksheet method for its answer fields. Complete its power-question column using the accompanying course guidance. A nonsignificant comparison does not establish equal population means.</a:t>
             </a:r>
           </a:p>
         </p:txBody>
@@ -1627,7 +1369,7 @@
           <a:p>
             <a:fld id="{18BDFEC3-8487-43E8-A154-7C12CBC1FFF2}" type="slidenum">
               <a:rPr lang="en-US"/>
-              <a:t>8</a:t>
+              <a:t>9</a:t>
             </a:fld>
             <a:endParaRPr lang="en-US"/>
           </a:p>
@@ -1687,7 +1429,7 @@
             </a:pPr>
             <a:r>
               <a:rPr/>
-              <a:t>Record group means, F, both degrees of freedom, MSe, p, and effect size before interpreting any pairwise row.</a:t>
+              <a:t>Use the worksheet’s tables and the simple guide to check the reporting details. Include the group descriptives, F, both degrees of freedom, MSe, and p. Identify the comparison method and describe the observed direction. Finish this walkthrough before starting the seriousness analysis.</a:t>
             </a:r>
           </a:p>
         </p:txBody>
@@ -1709,7 +1451,7 @@
           <a:p>
             <a:fld id="{18BDFEC3-8487-43E8-A154-7C12CBC1FFF2}" type="slidenum">
               <a:rPr lang="en-US"/>
-              <a:t>9</a:t>
+              <a:t>10</a:t>
             </a:fld>
             <a:endParaRPr lang="en-US"/>
           </a:p>
@@ -1769,7 +1511,7 @@
             </a:pPr>
             <a:r>
               <a:rPr/>
-              <a:t>Read the model row first. The significant omnibus result justifies moving to the worksheet’s planned comparisons.</a:t>
+              <a:t>Keep the crime = 2 filter active. These category names and ranges follow the worksheet: 1–4 become Serious Crime, 6–10 become Not Serious Crime, and 5 is excluded. Preserve serious and create serious_cat separately. Check the new frequencies before running the crosstab.</a:t>
             </a:r>
           </a:p>
         </p:txBody>
@@ -1791,7 +1533,7 @@
           <a:p>
             <a:fld id="{18BDFEC3-8487-43E8-A154-7C12CBC1FFF2}" type="slidenum">
               <a:rPr lang="en-US"/>
-              <a:t>10</a:t>
+              <a:t>11</a:t>
             </a:fld>
             <a:endParaRPr lang="en-US"/>
           </a:p>
@@ -3060,8 +2802,8 @@
         </p:nvSpPr>
         <p:spPr>
           <a:xfrm>
-            <a:off x="1583436" y="2313433"/>
-            <a:ext cx="4270248" cy="704087"/>
+            <a:off x="1097280" y="2313433"/>
+            <a:ext cx="4907280" cy="548640"/>
           </a:xfrm>
         </p:spPr>
         <p:txBody>
@@ -3133,8 +2875,8 @@
         </p:nvSpPr>
         <p:spPr>
           <a:xfrm>
-            <a:off x="1583436" y="3143250"/>
-            <a:ext cx="4270248" cy="2596776"/>
+            <a:off x="1097280" y="2926080"/>
+            <a:ext cx="4907280" cy="3177540"/>
           </a:xfrm>
         </p:spPr>
         <p:txBody>
@@ -3190,8 +2932,8 @@
         </p:nvSpPr>
         <p:spPr>
           <a:xfrm>
-            <a:off x="6338316" y="3143250"/>
-            <a:ext cx="4253484" cy="2596776"/>
+            <a:off x="6187440" y="2926080"/>
+            <a:ext cx="4907280" cy="3177540"/>
           </a:xfrm>
         </p:spPr>
         <p:txBody>
@@ -3251,8 +2993,8 @@
         </p:nvSpPr>
         <p:spPr>
           <a:xfrm>
-            <a:off x="6338316" y="2313433"/>
-            <a:ext cx="4270248" cy="704087"/>
+            <a:off x="6187440" y="2313433"/>
+            <a:ext cx="4907280" cy="548640"/>
           </a:xfrm>
         </p:spPr>
         <p:txBody>
@@ -3387,7 +3129,12 @@
             <p:ph type="title"/>
           </p:nvPr>
         </p:nvSpPr>
-        <p:spPr/>
+        <p:spPr>
+          <a:xfrm>
+            <a:off x="1097280" y="964692"/>
+            <a:ext cx="9997440" cy="1188720"/>
+          </a:xfrm>
+        </p:spPr>
         <p:txBody>
           <a:bodyPr/>
           <a:lstStyle/>
@@ -5072,41 +4819,63 @@
             </a:pPr>
             <a:r>
               <a:rPr/>
-              <a:t>9 Let the omnibus result determine follow-up</a:t>
-            </a:r>
-          </a:p>
-        </p:txBody>
-      </p:sp>
-      <p:pic>
-        <p:nvPicPr>
-          <p:cNvPr descr="SPSS-style one-way ANOVA output for recommended prison sentence by defendant attractiveness, showing F equals 4.081 with 2 and 52 degrees of freedom and p equals .023" id="0" name="Picture 1"/>
-          <p:cNvPicPr>
-            <a:picLocks noGrp="1" noChangeAspect="1"/>
-          </p:cNvPicPr>
-          <p:nvPr/>
-        </p:nvPicPr>
-        <p:blipFill>
-          <a:blip r:embed="rId3"/>
-          <a:stretch>
-            <a:fillRect/>
-          </a:stretch>
-        </p:blipFill>
-        <p:spPr bwMode="auto">
-          <a:xfrm>
-            <a:off x="1092200" y="2641600"/>
-            <a:ext cx="9994900" cy="3086100"/>
-          </a:xfrm>
-          <a:prstGeom prst="rect">
-            <a:avLst/>
-          </a:prstGeom>
-          <a:noFill/>
-          <a:ln w="9525">
-            <a:noFill/>
-            <a:headEnd/>
-            <a:tailEnd/>
-          </a:ln>
-        </p:spPr>
-      </p:pic>
+              <a:t>8 Finish the RH1 report</a:t>
+            </a:r>
+          </a:p>
+        </p:txBody>
+      </p:sp>
+      <p:sp>
+        <p:nvSpPr>
+          <p:cNvPr id="3" name="Content Placeholder 2"/>
+          <p:cNvSpPr>
+            <a:spLocks noGrp="1"/>
+          </p:cNvSpPr>
+          <p:nvPr>
+            <p:ph idx="1"/>
+          </p:nvPr>
+        </p:nvSpPr>
+        <p:spPr/>
+        <p:txBody>
+          <a:bodyPr/>
+          <a:lstStyle/>
+          <a:p>
+            <a:pPr lvl="0"/>
+            <a:r>
+              <a:rPr/>
+              <a:t>Write up the omnibus </a:t>
+            </a:r>
+            <a:r>
+              <a:rPr i="1"/>
+              <a:t>F</a:t>
+            </a:r>
+            <a:r>
+              <a:rPr/>
+              <a:t> and LSD comparisons</a:t>
+            </a:r>
+          </a:p>
+          <a:p>
+            <a:pPr lvl="0"/>
+            <a:r>
+              <a:rPr/>
+              <a:t>Explain how the results relate to the three predictions</a:t>
+            </a:r>
+          </a:p>
+          <a:p>
+            <a:pPr lvl="0"/>
+            <a:r>
+              <a:rPr/>
+              <a:t>Include a table or figure and refer to it in the text</a:t>
+            </a:r>
+          </a:p>
+          <a:p>
+            <a:pPr lvl="0"/>
+            <a:r>
+              <a:rPr/>
+              <a:t>Add the required checker screenshot</a:t>
+            </a:r>
+          </a:p>
+        </p:txBody>
+      </p:sp>
     </p:spTree>
   </p:cSld>
 </p:sld>
@@ -5154,41 +4923,44 @@
             </a:pPr>
             <a:r>
               <a:rPr/>
-              <a:t>10 Read one direction for each planned pair</a:t>
-            </a:r>
-          </a:p>
-        </p:txBody>
-      </p:sp>
-      <p:pic>
-        <p:nvPicPr>
-          <p:cNvPr descr="SPSS-style LSD multiple-comparisons output for recommended prison sentence across beautiful, average, and unattractive defendant groups; comparisons with the unattractive group are statistically significant" id="0" name="Picture 1"/>
-          <p:cNvPicPr>
-            <a:picLocks noGrp="1" noChangeAspect="1"/>
-          </p:cNvPicPr>
-          <p:nvPr/>
-        </p:nvPicPr>
-        <p:blipFill>
-          <a:blip r:embed="rId3"/>
-          <a:stretch>
-            <a:fillRect/>
-          </a:stretch>
-        </p:blipFill>
-        <p:spPr bwMode="auto">
-          <a:xfrm>
-            <a:off x="1092200" y="2667000"/>
-            <a:ext cx="9994900" cy="3022600"/>
-          </a:xfrm>
-          <a:prstGeom prst="rect">
-            <a:avLst/>
-          </a:prstGeom>
-          <a:noFill/>
-          <a:ln w="9525">
-            <a:noFill/>
-            <a:headEnd/>
-            <a:tailEnd/>
-          </a:ln>
-        </p:spPr>
-      </p:pic>
+              <a:t>9 Recode seriousness for RH2</a:t>
+            </a:r>
+          </a:p>
+        </p:txBody>
+      </p:sp>
+      <p:sp>
+        <p:nvSpPr>
+          <p:cNvPr id="3" name="Content Placeholder 2"/>
+          <p:cNvSpPr>
+            <a:spLocks noGrp="1"/>
+          </p:cNvSpPr>
+          <p:nvPr>
+            <p:ph idx="1"/>
+          </p:nvPr>
+        </p:nvSpPr>
+        <p:spPr/>
+        <p:txBody>
+          <a:bodyPr/>
+          <a:lstStyle/>
+          <a:p>
+            <a:pPr lvl="0" indent="0">
+              <a:buNone/>
+            </a:pPr>
+            <a:r>
+              <a:rPr>
+                <a:latin typeface="Courier"/>
+              </a:rPr>
+              <a:t>RECODE serious
+  (1 THRU 4 = 1) (5 = SYSMIS)
+  (6 THRU 10 = 2) INTO serious_cat.
+VALUE LABELS serious_cat
+  1 'Serious Crime' 2 'Not Serious Crime'.
+EXECUTE.
+FREQUENCIES VARIABLES=serious serious_cat.</a:t>
+            </a:r>
+          </a:p>
+        </p:txBody>
+      </p:sp>
     </p:spTree>
   </p:cSld>
 </p:sld>
@@ -5236,7 +5008,7 @@
             </a:pPr>
             <a:r>
               <a:rPr/>
-              <a:t>11 Recode seriousness before the crosstab</a:t>
+              <a:t>10 Run the RH2 crosstab</a:t>
             </a:r>
           </a:p>
         </p:txBody>
@@ -5263,13 +5035,19 @@
               <a:rPr>
                 <a:latin typeface="Courier"/>
               </a:rPr>
-              <a:t>* 1–4 = Serious Crime; 6–10 = Not Serious Crime; 5 = missing.
-RECODE serious
-  (1 THRU 4 = 1)
-  (5 = SYSMIS)
-  (6 THRU 10 = 2)
-  INTO serious_cat.
-EXECUTE.</a:t>
+              <a:t>CROSSTABS
+  /TABLES=serious_cat BY attr
+  /STATISTICS=CHISQ
+  /CELLS=COUNT EXPECTED COLUMN.</a:t>
+            </a:r>
+          </a:p>
+          <a:p>
+            <a:pPr lvl="0" indent="0" marL="0">
+              <a:buNone/>
+            </a:pPr>
+            <a:r>
+              <a:rPr b="1"/>
+              <a:t>Read the counts before the test statistic</a:t>
             </a:r>
           </a:p>
         </p:txBody>
@@ -5321,7 +5099,7 @@
             </a:pPr>
             <a:r>
               <a:rPr/>
-              <a:t>12 Run the jury chi-square</a:t>
+              <a:t>11 Read the RH2 output</a:t>
             </a:r>
           </a:p>
         </p:txBody>
@@ -5341,26 +5119,47 @@
           <a:bodyPr/>
           <a:lstStyle/>
           <a:p>
-            <a:pPr lvl="0" indent="0">
-              <a:buNone/>
-            </a:pPr>
-            <a:r>
-              <a:rPr>
-                <a:latin typeface="Courier"/>
-              </a:rPr>
-              <a:t>CROSSTABS
-  /TABLES=attr BY serious_cat
-  /STATISTICS=CHISQ PHI
-  /CELLS=COUNT EXPECTED ROW COLUMN.</a:t>
-            </a:r>
-          </a:p>
-          <a:p>
-            <a:pPr lvl="0" indent="0" marL="0">
-              <a:buNone/>
-            </a:pPr>
+            <a:pPr lvl="0"/>
             <a:r>
               <a:rPr/>
-              <a:t>Read the full table and omnibus χ² before filtering to any 2 × 2 pair.</a:t>
+              <a:t>How many selected cases remain after the recode?</a:t>
+            </a:r>
+          </a:p>
+          <a:p>
+            <a:pPr lvl="0"/>
+            <a:r>
+              <a:rPr/>
+              <a:t>What percentage in each group rated the crime as serious?</a:t>
+            </a:r>
+          </a:p>
+          <a:p>
+            <a:pPr lvl="0"/>
+            <a:r>
+              <a:rPr/>
+              <a:t>What are Pearson χ², </a:t>
+            </a:r>
+            <a:r>
+              <a:rPr i="1"/>
+              <a:t>df</a:t>
+            </a:r>
+            <a:r>
+              <a:rPr/>
+              <a:t>, and </a:t>
+            </a:r>
+            <a:r>
+              <a:rPr i="1"/>
+              <a:t>p</a:t>
+            </a:r>
+            <a:r>
+              <a:rPr/>
+              <a:t>?</a:t>
+            </a:r>
+          </a:p>
+          <a:p>
+            <a:pPr lvl="0"/>
+            <a:r>
+              <a:rPr/>
+              <a:t>What does the omnibus result say about the association?</a:t>
             </a:r>
           </a:p>
         </p:txBody>
@@ -5412,7 +5211,7 @@
             </a:pPr>
             <a:r>
               <a:rPr/>
-              <a:t>13 Follow up with 2-by-2 tables</a:t>
+              <a:t>12 Complete the RH2 comparisons</a:t>
             </a:r>
           </a:p>
         </p:txBody>
@@ -5432,48 +5231,31 @@
           <a:bodyPr/>
           <a:lstStyle/>
           <a:p>
-            <a:pPr lvl="0" indent="-457200" marL="457200">
-              <a:buAutoNum type="arabicPeriod"/>
-            </a:pPr>
+            <a:pPr lvl="0"/>
             <a:r>
               <a:rPr/>
-              <a:t>Restore the full selected jury sample.</a:t>
-            </a:r>
-          </a:p>
-          <a:p>
-            <a:pPr lvl="0" indent="-457200" marL="457200">
-              <a:buAutoNum type="arabicPeriod"/>
-            </a:pPr>
+              <a:t>Use the four counts for each attractiveness pair</a:t>
+            </a:r>
+          </a:p>
+          <a:p>
+            <a:pPr lvl="0"/>
             <a:r>
               <a:rPr/>
-              <a:t>Keep only one planned pair of attractiveness levels.</a:t>
-            </a:r>
-          </a:p>
-          <a:p>
-            <a:pPr lvl="0" indent="-457200" marL="457200">
-              <a:buAutoNum type="arabicPeriod"/>
-            </a:pPr>
+              <a:t>Calculate the pairwise Pearson χ² and effect size</a:t>
+            </a:r>
+          </a:p>
+          <a:p>
+            <a:pPr lvl="0"/>
             <a:r>
               <a:rPr/>
-              <a:t>Rerun the same crosstab syntax.</a:t>
-            </a:r>
-          </a:p>
-          <a:p>
-            <a:pPr lvl="0" indent="-457200" marL="457200">
-              <a:buAutoNum type="arabicPeriod"/>
-            </a:pPr>
+              <a:t>Compare χ² with the worksheet’s critical value</a:t>
+            </a:r>
+          </a:p>
+          <a:p>
+            <a:pPr lvl="0"/>
             <a:r>
               <a:rPr/>
-              <a:t>Compare the result with the corrected criterion.</a:t>
-            </a:r>
-          </a:p>
-          <a:p>
-            <a:pPr lvl="0" indent="-457200" marL="457200">
-              <a:buAutoNum type="arabicPeriod"/>
-            </a:pPr>
-            <a:r>
-              <a:rPr/>
-              <a:t>Restore cases before the next pair.</a:t>
+              <a:t>Complete the remaining columns and evaluate the predictions</a:t>
             </a:r>
           </a:p>
         </p:txBody>
@@ -5525,7 +5307,7 @@
             </a:pPr>
             <a:r>
               <a:rPr/>
-              <a:t>14 Repeat with new datasets</a:t>
+              <a:t>13 Finish the RH2 report</a:t>
             </a:r>
           </a:p>
         </p:txBody>
@@ -5547,235 +5329,29 @@
           <a:p>
             <a:pPr lvl="0"/>
             <a:r>
-              <a:rPr b="1"/>
-              <a:t>Football:</a:t>
-            </a:r>
-            <a:r>
               <a:rPr/>
-              <a:t> k-group ANOVA on hippocampal volume</a:t>
+              <a:t>Write up the omnibus χ² and assigned comparisons</a:t>
             </a:r>
           </a:p>
           <a:p>
             <a:pPr lvl="0"/>
             <a:r>
-              <a:rPr b="1"/>
-              <a:t>Tips:</a:t>
-            </a:r>
-            <a:r>
               <a:rPr/>
-              <a:t> k-group chi-square on card condition and tipping</a:t>
-            </a:r>
-          </a:p>
-          <a:p>
-            <a:pPr lvl="0" indent="0" marL="0">
-              <a:buNone/>
-            </a:pPr>
+              <a:t>Explain how the results relate to the three predictions</a:t>
+            </a:r>
+          </a:p>
+          <a:p>
+            <a:pPr lvl="0"/>
             <a:r>
               <a:rPr/>
-              <a:t>For each: </a:t>
-            </a:r>
-            <a:r>
-              <a:rPr b="1"/>
-              <a:t>prepare → omnibus → pairwise → effect size → RH decision</a:t>
-            </a:r>
+              <a:t>Include a table or figure and refer to it in the text</a:t>
+            </a:r>
+          </a:p>
+          <a:p>
+            <a:pPr lvl="0"/>
             <a:r>
               <a:rPr/>
-              <a:t>.</a:t>
-            </a:r>
-          </a:p>
-        </p:txBody>
-      </p:sp>
-    </p:spTree>
-  </p:cSld>
-</p:sld>
-</file>
-
-<file path=ppt/slides/slide16.xml><?xml version="1.0" encoding="utf-8"?>
-<p:sld xmlns:a="http://schemas.openxmlformats.org/drawingml/2006/main" xmlns:r="http://schemas.openxmlformats.org/officeDocument/2006/relationships" xmlns:p="http://schemas.openxmlformats.org/presentationml/2006/main">
-  <p:cSld>
-    <p:spTree>
-      <p:nvGrpSpPr>
-        <p:cNvPr id="1" name=""/>
-        <p:cNvGrpSpPr/>
-        <p:nvPr/>
-      </p:nvGrpSpPr>
-      <p:grpSpPr>
-        <a:xfrm>
-          <a:off x="0" y="0"/>
-          <a:ext cx="0" cy="0"/>
-          <a:chOff x="0" y="0"/>
-          <a:chExt cx="0" cy="0"/>
-        </a:xfrm>
-      </p:grpSpPr>
-      <p:sp>
-        <p:nvSpPr>
-          <p:cNvPr id="2" name="Title 1"/>
-          <p:cNvSpPr>
-            <a:spLocks noGrp="1"/>
-          </p:cNvSpPr>
-          <p:nvPr>
-            <p:ph type="title"/>
-          </p:nvPr>
-        </p:nvSpPr>
-        <p:spPr>
-          <a:xfrm>
-            <a:off x="1097280" y="964692"/>
-            <a:ext cx="9997440" cy="1188720"/>
-          </a:xfrm>
-        </p:spPr>
-        <p:txBody>
-          <a:bodyPr/>
-          <a:lstStyle/>
-          <a:p>
-            <a:pPr lvl="0" indent="0" marL="0">
-              <a:buNone/>
-            </a:pPr>
-            <a:r>
-              <a:rPr/>
-              <a:t>15 Make the APA descriptives table</a:t>
-            </a:r>
-          </a:p>
-        </p:txBody>
-      </p:sp>
-      <p:pic>
-        <p:nvPicPr>
-          <p:cNvPr descr="APA-style table of recommended prison-sentence means and standard deviations for beautiful, average, and unattractive defendants" id="0" name="Picture 1"/>
-          <p:cNvPicPr>
-            <a:picLocks noGrp="1" noChangeAspect="1"/>
-          </p:cNvPicPr>
-          <p:nvPr/>
-        </p:nvPicPr>
-        <p:blipFill>
-          <a:blip r:embed="rId3"/>
-          <a:stretch>
-            <a:fillRect/>
-          </a:stretch>
-        </p:blipFill>
-        <p:spPr bwMode="auto">
-          <a:xfrm>
-            <a:off x="1092200" y="2743200"/>
-            <a:ext cx="9994900" cy="2870200"/>
-          </a:xfrm>
-          <a:prstGeom prst="rect">
-            <a:avLst/>
-          </a:prstGeom>
-          <a:noFill/>
-          <a:ln w="9525">
-            <a:noFill/>
-            <a:headEnd/>
-            <a:tailEnd/>
-          </a:ln>
-        </p:spPr>
-      </p:pic>
-    </p:spTree>
-  </p:cSld>
-</p:sld>
-</file>
-
-<file path=ppt/slides/slide17.xml><?xml version="1.0" encoding="utf-8"?>
-<p:sld xmlns:a="http://schemas.openxmlformats.org/drawingml/2006/main" xmlns:r="http://schemas.openxmlformats.org/officeDocument/2006/relationships" xmlns:p="http://schemas.openxmlformats.org/presentationml/2006/main">
-  <p:cSld>
-    <p:spTree>
-      <p:nvGrpSpPr>
-        <p:cNvPr id="1" name=""/>
-        <p:cNvGrpSpPr/>
-        <p:nvPr/>
-      </p:nvGrpSpPr>
-      <p:grpSpPr>
-        <a:xfrm>
-          <a:off x="0" y="0"/>
-          <a:ext cx="0" cy="0"/>
-          <a:chOff x="0" y="0"/>
-          <a:chExt cx="0" cy="0"/>
-        </a:xfrm>
-      </p:grpSpPr>
-      <p:sp>
-        <p:nvSpPr>
-          <p:cNvPr id="2" name="Title 1"/>
-          <p:cNvSpPr>
-            <a:spLocks noGrp="1"/>
-          </p:cNvSpPr>
-          <p:nvPr>
-            <p:ph type="title"/>
-          </p:nvPr>
-        </p:nvSpPr>
-        <p:spPr>
-          <a:xfrm>
-            <a:off x="1097280" y="964692"/>
-            <a:ext cx="9997440" cy="1188720"/>
-          </a:xfrm>
-        </p:spPr>
-        <p:txBody>
-          <a:bodyPr/>
-          <a:lstStyle/>
-          <a:p>
-            <a:pPr lvl="0" indent="0" marL="0">
-              <a:buNone/>
-            </a:pPr>
-            <a:r>
-              <a:rPr/>
-              <a:t>16 Write the full result package</a:t>
-            </a:r>
-          </a:p>
-        </p:txBody>
-      </p:sp>
-      <p:sp>
-        <p:nvSpPr>
-          <p:cNvPr id="3" name="Content Placeholder 2"/>
-          <p:cNvSpPr>
-            <a:spLocks noGrp="1"/>
-          </p:cNvSpPr>
-          <p:nvPr>
-            <p:ph idx="1"/>
-          </p:nvPr>
-        </p:nvSpPr>
-        <p:spPr/>
-        <p:txBody>
-          <a:bodyPr/>
-          <a:lstStyle/>
-          <a:p>
-            <a:pPr lvl="0" indent="-457200" marL="457200">
-              <a:buAutoNum type="arabicPeriod"/>
-            </a:pPr>
-            <a:r>
-              <a:rPr/>
-              <a:t>Refer to the descriptive table or figure.</a:t>
-            </a:r>
-          </a:p>
-          <a:p>
-            <a:pPr lvl="0" indent="-457200" marL="457200">
-              <a:buAutoNum type="arabicPeriod"/>
-            </a:pPr>
-            <a:r>
-              <a:rPr/>
-              <a:t>Report the omnibus test and effect size.</a:t>
-            </a:r>
-          </a:p>
-          <a:p>
-            <a:pPr lvl="0" indent="-457200" marL="457200">
-              <a:buAutoNum type="arabicPeriod"/>
-            </a:pPr>
-            <a:r>
-              <a:rPr/>
-              <a:t>Name the follow-up method and corrected criterion.</a:t>
-            </a:r>
-          </a:p>
-          <a:p>
-            <a:pPr lvl="0" indent="-457200" marL="457200">
-              <a:buAutoNum type="arabicPeriod"/>
-            </a:pPr>
-            <a:r>
-              <a:rPr/>
-              <a:t>Describe each planned pair and RH decision.</a:t>
-            </a:r>
-          </a:p>
-          <a:p>
-            <a:pPr lvl="0" indent="-457200" marL="457200">
-              <a:buAutoNum type="arabicPeriod"/>
-            </a:pPr>
-            <a:r>
-              <a:rPr/>
-              <a:t>Add the all-green checker screenshot.</a:t>
+              <a:t>Add the required checker screenshot</a:t>
             </a:r>
           </a:p>
         </p:txBody>
@@ -5827,14 +5403,14 @@
             </a:pPr>
             <a:r>
               <a:rPr/>
-              <a:t>1 Download the Lab 11 data</a:t>
-            </a:r>
-          </a:p>
-        </p:txBody>
-      </p:sp>
-      <p:sp>
-        <p:nvSpPr>
-          <p:cNvPr id="1001" name="card-steel" descr="card: Worksheet. Download worksheet"/>
+              <a:t>1 Open the Lab 11 files</a:t>
+            </a:r>
+          </a:p>
+        </p:txBody>
+      </p:sp>
+      <p:sp>
+        <p:nvSpPr>
+          <p:cNvPr id="1001" name="card-steel" descr="card: Walkthrough data. Jury data"/>
           <p:cNvSpPr/>
           <p:nvPr/>
         </p:nvSpPr>
@@ -5870,7 +5446,7 @@
                   <a:srgbClr val="010B13"/>
                 </a:solidFill>
               </a:rPr>
-              <a:t>Worksheet</a:t>
+              <a:t>Walkthrough data</a:t>
             </a:r>
           </a:p>
           <a:p>
@@ -5882,14 +5458,20 @@
                 </a:solidFill>
                 <a:hlinkClick r:id="rId3"/>
               </a:rPr>
-              <a:t>Download worksheet</a:t>
-            </a:r>
-          </a:p>
-        </p:txBody>
-      </p:sp>
-      <p:sp>
-        <p:nvSpPr>
-          <p:cNvPr id="1002" name="card-rail" descr=""/>
+              <a:t>Jury data</a:t>
+            </a:r>
+          </a:p>
+        </p:txBody>
+      </p:sp>
+      <p:sp>
+        <p:nvSpPr>
+          <p:cNvPr id="1002" name="card-rail" descr="">
+            <a:extLst>
+              <a:ext uri="{C183D7F6-B498-43B3-948B-1728B52AA6E4}">
+                <adec:decorative xmlns:adec="http://schemas.microsoft.com/office/drawing/2017/decorative" val="1"/>
+              </a:ext>
+            </a:extLst>
+          </p:cNvPr>
           <p:cNvSpPr/>
           <p:nvPr/>
         </p:nvSpPr>
@@ -5920,14 +5502,14 @@
       </p:sp>
       <p:sp>
         <p:nvSpPr>
-          <p:cNvPr id="1003" name="card-steel" descr="card: Walkthrough data. Download jury data"/>
+          <p:cNvPr id="1003" name="card-steel" descr="card: Simple SPSS guides. k-group ANOVA PDF k-group chi-square PDF"/>
           <p:cNvSpPr/>
           <p:nvPr/>
         </p:nvSpPr>
         <p:spPr>
           <a:xfrm>
             <a:off x="6167628" y="2633472"/>
-            <a:ext cx="4924044" cy="1005840"/>
+            <a:ext cx="4924044" cy="1310640"/>
           </a:xfrm>
           <a:prstGeom prst="roundRect">
             <a:avLst>
@@ -5956,7 +5538,7 @@
                   <a:srgbClr val="010B13"/>
                 </a:solidFill>
               </a:rPr>
-              <a:t>Walkthrough data</a:t>
+              <a:t>Simple SPSS guides</a:t>
             </a:r>
           </a:p>
           <a:p>
@@ -5968,81 +5550,7 @@
                 </a:solidFill>
                 <a:hlinkClick r:id="rId4"/>
               </a:rPr>
-              <a:t>Download jury data</a:t>
-            </a:r>
-          </a:p>
-        </p:txBody>
-      </p:sp>
-      <p:sp>
-        <p:nvSpPr>
-          <p:cNvPr id="1004" name="card-rail" descr=""/>
-          <p:cNvSpPr/>
-          <p:nvPr/>
-        </p:nvSpPr>
-        <p:spPr>
-          <a:xfrm>
-            <a:off x="6167628" y="2633472"/>
-            <a:ext cx="54864" cy="1005840"/>
-          </a:xfrm>
-          <a:prstGeom prst="roundRect">
-            <a:avLst>
-              <a:gd name="adj" fmla="val 20000"/>
-            </a:avLst>
-          </a:prstGeom>
-          <a:solidFill>
-            <a:srgbClr val="010B13"/>
-          </a:solidFill>
-          <a:ln>
-            <a:noFill/>
-          </a:ln>
-        </p:spPr>
-        <p:txBody>
-          <a:bodyPr lIns="182880" tIns="182880" rIns="182880" bIns="182880" anchor="t" wrap="square">
-            <a:normAutofit/>
-          </a:bodyPr>
-          <a:lstStyle/>
-          <a:p/>
-        </p:txBody>
-      </p:sp>
-      <p:sp>
-        <p:nvSpPr>
-          <p:cNvPr id="1005" name="card-steel" descr="card: ANOVA practice. Download football data"/>
-          <p:cNvSpPr/>
-          <p:nvPr/>
-        </p:nvSpPr>
-        <p:spPr>
-          <a:xfrm>
-            <a:off x="1097280" y="3785616"/>
-            <a:ext cx="4924044" cy="1005840"/>
-          </a:xfrm>
-          <a:prstGeom prst="roundRect">
-            <a:avLst>
-              <a:gd name="adj" fmla="val 6000"/>
-            </a:avLst>
-          </a:prstGeom>
-          <a:solidFill>
-            <a:srgbClr val="FEFDFA"/>
-          </a:solidFill>
-          <a:ln w="19050">
-            <a:solidFill>
-              <a:srgbClr val="CCCCCC"/>
-            </a:solidFill>
-          </a:ln>
-        </p:spPr>
-        <p:txBody>
-          <a:bodyPr lIns="182880" tIns="182880" rIns="182880" bIns="182880" anchor="t" wrap="square">
-            <a:normAutofit/>
-          </a:bodyPr>
-          <a:lstStyle/>
-          <a:p>
-            <a:pPr algn="l"/>
-            <a:r>
-              <a:rPr lang="en-US" sz="2200" b="1" dirty="0">
-                <a:solidFill>
-                  <a:srgbClr val="010B13"/>
-                </a:solidFill>
-              </a:rPr>
-              <a:t>ANOVA practice</a:t>
+              <a:t>k-group ANOVA PDF</a:t>
             </a:r>
           </a:p>
           <a:p>
@@ -6054,107 +5562,27 @@
                 </a:solidFill>
                 <a:hlinkClick r:id="rId5"/>
               </a:rPr>
-              <a:t>Download football data</a:t>
-            </a:r>
-          </a:p>
-        </p:txBody>
-      </p:sp>
-      <p:sp>
-        <p:nvSpPr>
-          <p:cNvPr id="1006" name="card-rail" descr=""/>
+              <a:t>k-group chi-square PDF</a:t>
+            </a:r>
+          </a:p>
+        </p:txBody>
+      </p:sp>
+      <p:sp>
+        <p:nvSpPr>
+          <p:cNvPr id="1004" name="card-rail" descr="">
+            <a:extLst>
+              <a:ext uri="{C183D7F6-B498-43B3-948B-1728B52AA6E4}">
+                <adec:decorative xmlns:adec="http://schemas.microsoft.com/office/drawing/2017/decorative" val="1"/>
+              </a:ext>
+            </a:extLst>
+          </p:cNvPr>
           <p:cNvSpPr/>
           <p:nvPr/>
         </p:nvSpPr>
         <p:spPr>
           <a:xfrm>
-            <a:off x="1097280" y="3785616"/>
-            <a:ext cx="54864" cy="1005840"/>
-          </a:xfrm>
-          <a:prstGeom prst="roundRect">
-            <a:avLst>
-              <a:gd name="adj" fmla="val 20000"/>
-            </a:avLst>
-          </a:prstGeom>
-          <a:solidFill>
-            <a:srgbClr val="010B13"/>
-          </a:solidFill>
-          <a:ln>
-            <a:noFill/>
-          </a:ln>
-        </p:spPr>
-        <p:txBody>
-          <a:bodyPr lIns="182880" tIns="182880" rIns="182880" bIns="182880" anchor="t" wrap="square">
-            <a:normAutofit/>
-          </a:bodyPr>
-          <a:lstStyle/>
-          <a:p/>
-        </p:txBody>
-      </p:sp>
-      <p:sp>
-        <p:nvSpPr>
-          <p:cNvPr id="1007" name="card-steel" descr="card: Chi-square practice. Download tips data"/>
-          <p:cNvSpPr/>
-          <p:nvPr/>
-        </p:nvSpPr>
-        <p:spPr>
-          <a:xfrm>
-            <a:off x="6167628" y="3785616"/>
-            <a:ext cx="4924044" cy="1005840"/>
-          </a:xfrm>
-          <a:prstGeom prst="roundRect">
-            <a:avLst>
-              <a:gd name="adj" fmla="val 6000"/>
-            </a:avLst>
-          </a:prstGeom>
-          <a:solidFill>
-            <a:srgbClr val="FEFDFA"/>
-          </a:solidFill>
-          <a:ln w="19050">
-            <a:solidFill>
-              <a:srgbClr val="CCCCCC"/>
-            </a:solidFill>
-          </a:ln>
-        </p:spPr>
-        <p:txBody>
-          <a:bodyPr lIns="182880" tIns="182880" rIns="182880" bIns="182880" anchor="t" wrap="square">
-            <a:normAutofit/>
-          </a:bodyPr>
-          <a:lstStyle/>
-          <a:p>
-            <a:pPr algn="l"/>
-            <a:r>
-              <a:rPr lang="en-US" sz="2200" b="1" dirty="0">
-                <a:solidFill>
-                  <a:srgbClr val="010B13"/>
-                </a:solidFill>
-              </a:rPr>
-              <a:t>Chi-square practice</a:t>
-            </a:r>
-          </a:p>
-          <a:p>
-            <a:pPr algn="l"/>
-            <a:r>
-              <a:rPr lang="en-US" sz="2000" b="0" dirty="0">
-                <a:solidFill>
-                  <a:srgbClr val="010B13"/>
-                </a:solidFill>
-                <a:hlinkClick r:id="rId6"/>
-              </a:rPr>
-              <a:t>Download tips data</a:t>
-            </a:r>
-          </a:p>
-        </p:txBody>
-      </p:sp>
-      <p:sp>
-        <p:nvSpPr>
-          <p:cNvPr id="1008" name="card-rail" descr=""/>
-          <p:cNvSpPr/>
-          <p:nvPr/>
-        </p:nvSpPr>
-        <p:spPr>
-          <a:xfrm>
-            <a:off x="6167628" y="3785616"/>
-            <a:ext cx="54864" cy="1005840"/>
+            <a:off x="6167628" y="2633472"/>
+            <a:ext cx="54864" cy="1310640"/>
           </a:xfrm>
           <a:prstGeom prst="roundRect">
             <a:avLst>
@@ -6223,279 +5651,65 @@
             </a:pPr>
             <a:r>
               <a:rPr/>
-              <a:t>2 Open the Lab 11 guides</a:t>
-            </a:r>
-          </a:p>
-        </p:txBody>
-      </p:sp>
-      <p:sp>
-        <p:nvSpPr>
-          <p:cNvPr id="1009" name="card-steel" descr="card: Analysis guides. k-group ANOVA k-group chi-square"/>
-          <p:cNvSpPr/>
-          <p:nvPr/>
-        </p:nvSpPr>
-        <p:spPr>
-          <a:xfrm>
-            <a:off x="1097280" y="2633472"/>
-            <a:ext cx="3233928" cy="1310640"/>
-          </a:xfrm>
-          <a:prstGeom prst="roundRect">
-            <a:avLst>
-              <a:gd name="adj" fmla="val 6000"/>
-            </a:avLst>
-          </a:prstGeom>
-          <a:solidFill>
-            <a:srgbClr val="FEFDFA"/>
-          </a:solidFill>
-          <a:ln w="19050">
-            <a:solidFill>
-              <a:srgbClr val="CCCCCC"/>
-            </a:solidFill>
-          </a:ln>
-        </p:spPr>
-        <p:txBody>
-          <a:bodyPr lIns="182880" tIns="182880" rIns="182880" bIns="182880" anchor="t" wrap="square">
-            <a:normAutofit/>
-          </a:bodyPr>
-          <a:lstStyle/>
-          <a:p>
-            <a:pPr algn="l"/>
-            <a:r>
-              <a:rPr lang="en-US" sz="2200" b="1" dirty="0">
-                <a:solidFill>
-                  <a:srgbClr val="010B13"/>
-                </a:solidFill>
-              </a:rPr>
-              <a:t>Analysis guides</a:t>
-            </a:r>
-          </a:p>
-          <a:p>
-            <a:pPr algn="l"/>
-            <a:r>
-              <a:rPr lang="en-US" sz="2000" b="0" dirty="0">
-                <a:solidFill>
-                  <a:srgbClr val="010B13"/>
-                </a:solidFill>
-                <a:hlinkClick r:id="rId3"/>
-              </a:rPr>
-              <a:t>k-group ANOVA</a:t>
-            </a:r>
-          </a:p>
-          <a:p>
-            <a:pPr algn="l"/>
-            <a:r>
-              <a:rPr lang="en-US" sz="2000" b="0" dirty="0">
-                <a:solidFill>
-                  <a:srgbClr val="010B13"/>
-                </a:solidFill>
-                <a:hlinkClick r:id="rId4"/>
-              </a:rPr>
-              <a:t>k-group chi-square</a:t>
-            </a:r>
-          </a:p>
-        </p:txBody>
-      </p:sp>
-      <p:sp>
-        <p:nvSpPr>
-          <p:cNvPr id="1010" name="card-rail" descr=""/>
-          <p:cNvSpPr/>
-          <p:nvPr/>
-        </p:nvSpPr>
-        <p:spPr>
-          <a:xfrm>
-            <a:off x="1097280" y="2633472"/>
-            <a:ext cx="54864" cy="1310640"/>
-          </a:xfrm>
-          <a:prstGeom prst="roundRect">
-            <a:avLst>
-              <a:gd name="adj" fmla="val 20000"/>
-            </a:avLst>
-          </a:prstGeom>
-          <a:solidFill>
-            <a:srgbClr val="010B13"/>
-          </a:solidFill>
-          <a:ln>
-            <a:noFill/>
-          </a:ln>
-        </p:spPr>
-        <p:txBody>
-          <a:bodyPr lIns="182880" tIns="182880" rIns="182880" bIns="182880" anchor="t" wrap="square">
-            <a:normAutofit/>
-          </a:bodyPr>
-          <a:lstStyle/>
-          <a:p/>
-        </p:txBody>
-      </p:sp>
-      <p:sp>
-        <p:nvSpPr>
-          <p:cNvPr id="1011" name="card-steel" descr="card: Post-hoc calculator. Download Computator"/>
-          <p:cNvSpPr/>
-          <p:nvPr/>
-        </p:nvSpPr>
-        <p:spPr>
-          <a:xfrm>
-            <a:off x="4477512" y="2633472"/>
-            <a:ext cx="3233928" cy="1341120"/>
-          </a:xfrm>
-          <a:prstGeom prst="roundRect">
-            <a:avLst>
-              <a:gd name="adj" fmla="val 6000"/>
-            </a:avLst>
-          </a:prstGeom>
-          <a:solidFill>
-            <a:srgbClr val="FEFDFA"/>
-          </a:solidFill>
-          <a:ln w="19050">
-            <a:solidFill>
-              <a:srgbClr val="CCCCCC"/>
-            </a:solidFill>
-          </a:ln>
-        </p:spPr>
-        <p:txBody>
-          <a:bodyPr lIns="182880" tIns="182880" rIns="182880" bIns="182880" anchor="t" wrap="square">
-            <a:normAutofit/>
-          </a:bodyPr>
-          <a:lstStyle/>
-          <a:p>
-            <a:pPr algn="l"/>
-            <a:r>
-              <a:rPr lang="en-US" sz="2200" b="1" dirty="0">
-                <a:solidFill>
-                  <a:srgbClr val="010B13"/>
-                </a:solidFill>
-              </a:rPr>
-              <a:t>Post-hoc calculator</a:t>
-            </a:r>
-          </a:p>
-          <a:p>
-            <a:pPr algn="l"/>
-            <a:r>
-              <a:rPr lang="en-US" sz="2000" b="0" dirty="0">
-                <a:solidFill>
-                  <a:srgbClr val="010B13"/>
-                </a:solidFill>
-                <a:hlinkClick r:id="rId5"/>
-              </a:rPr>
-              <a:t>Download Computator</a:t>
-            </a:r>
-          </a:p>
-        </p:txBody>
-      </p:sp>
-      <p:sp>
-        <p:nvSpPr>
-          <p:cNvPr id="1012" name="card-rail" descr=""/>
-          <p:cNvSpPr/>
-          <p:nvPr/>
-        </p:nvSpPr>
-        <p:spPr>
-          <a:xfrm>
-            <a:off x="4477512" y="2633472"/>
-            <a:ext cx="54864" cy="1341120"/>
-          </a:xfrm>
-          <a:prstGeom prst="roundRect">
-            <a:avLst>
-              <a:gd name="adj" fmla="val 20000"/>
-            </a:avLst>
-          </a:prstGeom>
-          <a:solidFill>
-            <a:srgbClr val="010B13"/>
-          </a:solidFill>
-          <a:ln>
-            <a:noFill/>
-          </a:ln>
-        </p:spPr>
-        <p:txBody>
-          <a:bodyPr lIns="182880" tIns="182880" rIns="182880" bIns="182880" anchor="t" wrap="square">
-            <a:normAutofit/>
-          </a:bodyPr>
-          <a:lstStyle/>
-          <a:p/>
-        </p:txBody>
-      </p:sp>
-      <p:sp>
-        <p:nvSpPr>
-          <p:cNvPr id="1013" name="card-steel" descr="card: APA table help. Open templates"/>
-          <p:cNvSpPr/>
-          <p:nvPr/>
-        </p:nvSpPr>
-        <p:spPr>
-          <a:xfrm>
-            <a:off x="7857744" y="2633472"/>
-            <a:ext cx="3233928" cy="1005840"/>
-          </a:xfrm>
-          <a:prstGeom prst="roundRect">
-            <a:avLst>
-              <a:gd name="adj" fmla="val 6000"/>
-            </a:avLst>
-          </a:prstGeom>
-          <a:solidFill>
-            <a:srgbClr val="FEFDFA"/>
-          </a:solidFill>
-          <a:ln w="19050">
-            <a:solidFill>
-              <a:srgbClr val="CCCCCC"/>
-            </a:solidFill>
-          </a:ln>
-        </p:spPr>
-        <p:txBody>
-          <a:bodyPr lIns="182880" tIns="182880" rIns="182880" bIns="182880" anchor="t" wrap="square">
-            <a:normAutofit/>
-          </a:bodyPr>
-          <a:lstStyle/>
-          <a:p>
-            <a:pPr algn="l"/>
-            <a:r>
-              <a:rPr lang="en-US" sz="2200" b="1" dirty="0">
-                <a:solidFill>
-                  <a:srgbClr val="010B13"/>
-                </a:solidFill>
-              </a:rPr>
-              <a:t>APA table help</a:t>
-            </a:r>
-          </a:p>
-          <a:p>
-            <a:pPr algn="l"/>
-            <a:r>
-              <a:rPr lang="en-US" sz="2000" b="0" dirty="0">
-                <a:solidFill>
-                  <a:srgbClr val="010B13"/>
-                </a:solidFill>
-                <a:hlinkClick r:id="rId6"/>
-              </a:rPr>
-              <a:t>Open templates</a:t>
-            </a:r>
-          </a:p>
-        </p:txBody>
-      </p:sp>
-      <p:sp>
-        <p:nvSpPr>
-          <p:cNvPr id="1014" name="card-rail" descr=""/>
-          <p:cNvSpPr/>
-          <p:nvPr/>
-        </p:nvSpPr>
-        <p:spPr>
-          <a:xfrm>
-            <a:off x="7857744" y="2633472"/>
-            <a:ext cx="54864" cy="1005840"/>
-          </a:xfrm>
-          <a:prstGeom prst="roundRect">
-            <a:avLst>
-              <a:gd name="adj" fmla="val 20000"/>
-            </a:avLst>
-          </a:prstGeom>
-          <a:solidFill>
-            <a:srgbClr val="010B13"/>
-          </a:solidFill>
-          <a:ln>
-            <a:noFill/>
-          </a:ln>
-        </p:spPr>
-        <p:txBody>
-          <a:bodyPr lIns="182880" tIns="182880" rIns="182880" bIns="182880" anchor="t" wrap="square">
-            <a:normAutofit/>
-          </a:bodyPr>
-          <a:lstStyle/>
-          <a:p/>
+              <a:t>2 Separate omnibus and pairwise questions</a:t>
+            </a:r>
+          </a:p>
+        </p:txBody>
+      </p:sp>
+      <p:sp>
+        <p:nvSpPr>
+          <p:cNvPr id="3" name="Content Placeholder 2"/>
+          <p:cNvSpPr>
+            <a:spLocks noGrp="1"/>
+          </p:cNvSpPr>
+          <p:nvPr>
+            <p:ph idx="1"/>
+          </p:nvPr>
+        </p:nvSpPr>
+        <p:spPr/>
+        <p:txBody>
+          <a:bodyPr/>
+          <a:lstStyle/>
+          <a:p>
+            <a:pPr lvl="0" indent="0" marL="0">
+              <a:buNone/>
+            </a:pPr>
+            <a:r>
+              <a:rPr b="1"/>
+              <a:t>Omnibus:</a:t>
+            </a:r>
+            <a:r>
+              <a:rPr/>
+              <a:t> Is there a difference or association across the groups?</a:t>
+            </a:r>
+          </a:p>
+          <a:p>
+            <a:pPr lvl="0" indent="0" marL="0">
+              <a:buNone/>
+            </a:pPr>
+            <a:r>
+              <a:rPr b="1"/>
+              <a:t>Pairwise:</a:t>
+            </a:r>
+            <a:r>
+              <a:rPr/>
+              <a:t> How do two particular groups compare?</a:t>
+            </a:r>
+          </a:p>
+          <a:p>
+            <a:pPr lvl="0"/>
+            <a:r>
+              <a:rPr/>
+              <a:t>ANOVA compares means</a:t>
+            </a:r>
+          </a:p>
+          <a:p>
+            <a:pPr lvl="0"/>
+            <a:r>
+              <a:rPr/>
+              <a:t>Chi-square examines counts and proportions</a:t>
+            </a:r>
+          </a:p>
         </p:txBody>
       </p:sp>
     </p:spTree>
@@ -6522,7 +5736,7 @@
       </p:grpSpPr>
       <p:sp>
         <p:nvSpPr>
-          <p:cNvPr id="10" name="Title 9"/>
+          <p:cNvPr id="2" name="Title 1"/>
           <p:cNvSpPr>
             <a:spLocks noGrp="1"/>
           </p:cNvSpPr>
@@ -6530,7 +5744,12 @@
             <p:ph type="title"/>
           </p:nvPr>
         </p:nvSpPr>
-        <p:spPr/>
+        <p:spPr>
+          <a:xfrm>
+            <a:off x="1097280" y="964692"/>
+            <a:ext cx="9997440" cy="1188720"/>
+          </a:xfrm>
+        </p:spPr>
         <p:txBody>
           <a:bodyPr/>
           <a:lstStyle/>
@@ -6540,19 +5759,19 @@
             </a:pPr>
             <a:r>
               <a:rPr/>
-              <a:t>3 Keep Data and Syntax Editors open</a:t>
-            </a:r>
-          </a:p>
-        </p:txBody>
-      </p:sp>
-      <p:sp>
-        <p:nvSpPr>
-          <p:cNvPr id="3" name="Text Placeholder 2"/>
-          <p:cNvSpPr>
-            <a:spLocks noGrp="1"/>
-          </p:cNvSpPr>
-          <p:nvPr>
-            <p:ph idx="1" type="body"/>
+              <a:t>3 Prepare the jury walkthrough</a:t>
+            </a:r>
+          </a:p>
+        </p:txBody>
+      </p:sp>
+      <p:sp>
+        <p:nvSpPr>
+          <p:cNvPr id="3" name="Content Placeholder 2"/>
+          <p:cNvSpPr>
+            <a:spLocks noGrp="1"/>
+          </p:cNvSpPr>
+          <p:nvPr>
+            <p:ph idx="1"/>
           </p:nvPr>
         </p:nvSpPr>
         <p:spPr/>
@@ -6564,143 +5783,56 @@
               <a:buNone/>
             </a:pPr>
             <a:r>
+              <a:rPr/>
+              <a:t>[RH1 · Recommended prison sentences]</a:t>
+            </a:r>
+          </a:p>
+          <a:p>
+            <a:pPr lvl="0"/>
+            <a:r>
+              <a:rPr/>
+              <a:t>Grouping variable: </a:t>
+            </a:r>
+            <a:r>
+              <a:rPr>
+                <a:latin typeface="Courier"/>
+              </a:rPr>
+              <a:t>attr</a:t>
+            </a:r>
+          </a:p>
+          <a:p>
+            <a:pPr lvl="0"/>
+            <a:r>
+              <a:rPr/>
+              <a:t>Outcome: </a:t>
+            </a:r>
+            <a:r>
+              <a:rPr>
+                <a:latin typeface="Courier"/>
+              </a:rPr>
+              <a:t>years</a:t>
+            </a:r>
+          </a:p>
+          <a:p>
+            <a:pPr lvl="0"/>
+            <a:r>
+              <a:rPr/>
+              <a:t>Select the swindle condition: </a:t>
+            </a:r>
+            <a:r>
+              <a:rPr>
+                <a:latin typeface="Courier"/>
+              </a:rPr>
+              <a:t>crime = 2</a:t>
+            </a:r>
+          </a:p>
+          <a:p>
+            <a:pPr lvl="0" indent="0" marL="0">
+              <a:buNone/>
+            </a:pPr>
+            <a:r>
               <a:rPr b="1"/>
-              <a:t>Data Editor</a:t>
-            </a:r>
-          </a:p>
-        </p:txBody>
-      </p:sp>
-      <p:pic>
-        <p:nvPicPr>
-          <p:cNvPr descr="Focused SPSS Data Editor image showing spreadsheet columns and the Data View and Variable View tabs" id="0" name="Picture 1"/>
-          <p:cNvPicPr>
-            <a:picLocks noGrp="1" noChangeAspect="1"/>
-          </p:cNvPicPr>
-          <p:nvPr/>
-        </p:nvPicPr>
-        <p:blipFill>
-          <a:blip r:embed="rId3"/>
-          <a:stretch>
-            <a:fillRect/>
-          </a:stretch>
-        </p:blipFill>
-        <p:spPr bwMode="auto">
-          <a:xfrm>
-            <a:off x="1574800" y="3416300"/>
-            <a:ext cx="4267200" cy="2032000"/>
-          </a:xfrm>
-          <a:prstGeom prst="rect">
-            <a:avLst/>
-          </a:prstGeom>
-          <a:noFill/>
-          <a:ln w="9525">
-            <a:noFill/>
-            <a:headEnd/>
-            <a:tailEnd/>
-          </a:ln>
-        </p:spPr>
-      </p:pic>
-      <p:sp>
-        <p:nvSpPr>
-          <p:cNvPr id="4" name="Content Placeholder 3"/>
-          <p:cNvSpPr>
-            <a:spLocks noGrp="1"/>
-          </p:cNvSpPr>
-          <p:nvPr>
-            <p:ph idx="2" sz="half"/>
-          </p:nvPr>
-        </p:nvSpPr>
-        <p:spPr/>
-        <p:txBody>
-          <a:bodyPr/>
-          <a:lstStyle/>
-          <a:p>
-            <a:pPr lvl="0" indent="0" marL="0">
-              <a:buNone/>
-            </a:pPr>
-            <a:r>
-              <a:rPr b="1"/>
-              <a:t>Inspect groups and outcomes</a:t>
-            </a:r>
-          </a:p>
-        </p:txBody>
-      </p:sp>
-      <p:sp>
-        <p:nvSpPr>
-          <p:cNvPr id="11" name="Text Placeholder 4"/>
-          <p:cNvSpPr>
-            <a:spLocks noGrp="1"/>
-          </p:cNvSpPr>
-          <p:nvPr>
-            <p:ph idx="13" sz="quarter" type="body"/>
-          </p:nvPr>
-        </p:nvSpPr>
-        <p:spPr/>
-        <p:txBody>
-          <a:bodyPr/>
-          <a:lstStyle/>
-          <a:p>
-            <a:pPr lvl="0" indent="0" marL="0">
-              <a:buNone/>
-            </a:pPr>
-            <a:r>
-              <a:rPr b="1"/>
-              <a:t>Syntax Editor</a:t>
-            </a:r>
-          </a:p>
-        </p:txBody>
-      </p:sp>
-      <p:pic>
-        <p:nvPicPr>
-          <p:cNvPr descr="Focused SPSS Syntax Editor image showing the command area and an annotation pointing to the green Run button" id="0" name="Picture 1"/>
-          <p:cNvPicPr>
-            <a:picLocks noGrp="1" noChangeAspect="1"/>
-          </p:cNvPicPr>
-          <p:nvPr/>
-        </p:nvPicPr>
-        <p:blipFill>
-          <a:blip r:embed="rId4"/>
-          <a:stretch>
-            <a:fillRect/>
-          </a:stretch>
-        </p:blipFill>
-        <p:spPr bwMode="auto">
-          <a:xfrm>
-            <a:off x="6337300" y="3429000"/>
-            <a:ext cx="4241800" cy="2006600"/>
-          </a:xfrm>
-          <a:prstGeom prst="rect">
-            <a:avLst/>
-          </a:prstGeom>
-          <a:noFill/>
-          <a:ln w="9525">
-            <a:noFill/>
-            <a:headEnd/>
-            <a:tailEnd/>
-          </a:ln>
-        </p:spPr>
-      </p:pic>
-      <p:sp>
-        <p:nvSpPr>
-          <p:cNvPr id="6" name="Content Placeholder 5"/>
-          <p:cNvSpPr>
-            <a:spLocks noGrp="1"/>
-          </p:cNvSpPr>
-          <p:nvPr>
-            <p:ph idx="4" sz="quarter"/>
-          </p:nvPr>
-        </p:nvSpPr>
-        <p:spPr/>
-        <p:txBody>
-          <a:bodyPr/>
-          <a:lstStyle/>
-          <a:p>
-            <a:pPr lvl="0" indent="0" marL="0">
-              <a:buNone/>
-            </a:pPr>
-            <a:r>
-              <a:rPr b="1"/>
-              <a:t>Save and rerun commands</a:t>
+              <a:t>What does the worksheet predict for each pair?</a:t>
             </a:r>
           </a:p>
         </p:txBody>
@@ -6752,41 +5884,43 @@
             </a:pPr>
             <a:r>
               <a:rPr/>
-              <a:t>4 Read results in Output Viewer</a:t>
-            </a:r>
-          </a:p>
-        </p:txBody>
-      </p:sp>
-      <p:pic>
-        <p:nvPicPr>
-          <p:cNvPr descr="SPSS-style one-way ANOVA output for recommended prison sentence by defendant attractiveness, showing F equals 4.081 with 2 and 52 degrees of freedom and p equals .023" id="0" name="Picture 1"/>
-          <p:cNvPicPr>
-            <a:picLocks noGrp="1" noChangeAspect="1"/>
-          </p:cNvPicPr>
-          <p:nvPr/>
-        </p:nvPicPr>
-        <p:blipFill>
-          <a:blip r:embed="rId3"/>
-          <a:stretch>
-            <a:fillRect/>
-          </a:stretch>
-        </p:blipFill>
-        <p:spPr bwMode="auto">
-          <a:xfrm>
-            <a:off x="1092200" y="2641600"/>
-            <a:ext cx="9994900" cy="3086100"/>
-          </a:xfrm>
-          <a:prstGeom prst="rect">
-            <a:avLst/>
-          </a:prstGeom>
-          <a:noFill/>
-          <a:ln w="9525">
-            <a:noFill/>
-            <a:headEnd/>
-            <a:tailEnd/>
-          </a:ln>
-        </p:spPr>
-      </p:pic>
+              <a:t>4 Select the swindle cases</a:t>
+            </a:r>
+          </a:p>
+        </p:txBody>
+      </p:sp>
+      <p:sp>
+        <p:nvSpPr>
+          <p:cNvPr id="3" name="Content Placeholder 2"/>
+          <p:cNvSpPr>
+            <a:spLocks noGrp="1"/>
+          </p:cNvSpPr>
+          <p:nvPr>
+            <p:ph idx="1"/>
+          </p:nvPr>
+        </p:nvSpPr>
+        <p:spPr/>
+        <p:txBody>
+          <a:bodyPr/>
+          <a:lstStyle/>
+          <a:p>
+            <a:pPr lvl="0" indent="0">
+              <a:buNone/>
+            </a:pPr>
+            <a:r>
+              <a:rPr>
+                <a:latin typeface="Courier"/>
+              </a:rPr>
+              <a:t>FILTER OFF.
+USE ALL.
+COMPUTE filter_$ = (crime = 2).
+FILTER BY filter_$.
+EXECUTE.
+FREQUENCIES VARIABLES=crime attr years.</a:t>
+            </a:r>
+          </a:p>
+        </p:txBody>
+      </p:sp>
     </p:spTree>
   </p:cSld>
 </p:sld>
@@ -6834,7 +5968,7 @@
             </a:pPr>
             <a:r>
               <a:rPr/>
-              <a:t>5 Omnibus comes before pairwise</a:t>
+              <a:t>5 Run the RH1 ANOVA</a:t>
             </a:r>
           </a:p>
         </p:txBody>
@@ -6854,38 +5988,25 @@
           <a:bodyPr/>
           <a:lstStyle/>
           <a:p>
-            <a:pPr lvl="0" indent="-457200" marL="457200">
-              <a:buAutoNum type="arabicPeriod"/>
+            <a:pPr lvl="0" indent="0">
+              <a:buNone/>
             </a:pPr>
             <a:r>
+              <a:rPr>
+                <a:latin typeface="Courier"/>
+              </a:rPr>
+              <a:t>ONEWAY years BY attr
+  /STATISTICS DESCRIPTIVES
+  /MISSING ANALYSIS.</a:t>
+            </a:r>
+          </a:p>
+          <a:p>
+            <a:pPr lvl="0" indent="0" marL="0">
+              <a:buNone/>
+            </a:pPr>
+            <a:r>
               <a:rPr b="1"/>
-              <a:t>Omnibus:</a:t>
-            </a:r>
-            <a:r>
-              <a:rPr/>
-              <a:t> Is there any group difference or association?</a:t>
-            </a:r>
-          </a:p>
-          <a:p>
-            <a:pPr lvl="0" indent="-457200" marL="457200">
-              <a:buAutoNum type="arabicPeriod"/>
-            </a:pPr>
-            <a:r>
-              <a:rPr b="1"/>
-              <a:t>Pairwise:</a:t>
-            </a:r>
-            <a:r>
-              <a:rPr/>
-              <a:t> Which planned pairs differ?</a:t>
-            </a:r>
-          </a:p>
-          <a:p>
-            <a:pPr lvl="0" indent="0" marL="0">
-              <a:buNone/>
-            </a:pPr>
-            <a:r>
-              <a:rPr/>
-              <a:t>Follow up only when the omnibus result justifies it.</a:t>
+              <a:t>Start with each group’s mean, SD, and sample size</a:t>
             </a:r>
           </a:p>
         </p:txBody>
@@ -6937,137 +6058,101 @@
             </a:pPr>
             <a:r>
               <a:rPr/>
-              <a:t>6 Match variables to the test</a:t>
-            </a:r>
-          </a:p>
-        </p:txBody>
-      </p:sp>
-      <p:graphicFrame>
-        <p:nvGraphicFramePr>
-          <p:cNvPr id="6" name="Content Placeholder 5"/>
-          <p:cNvGraphicFramePr>
-            <a:graphicFrameLocks noGrp="1"/>
-          </p:cNvGraphicFramePr>
+              <a:t>6 Read the RH1 output</a:t>
+            </a:r>
+          </a:p>
+        </p:txBody>
+      </p:sp>
+      <p:pic>
+        <p:nvPicPr>
+          <p:cNvPr descr="ANOVA for years. Between Groups: sum of squares 123.300, df 2, mean square 61.650, F 4.081, Sig. .023. Within Groups: sum of squares 785.500, df 52, mean square 15.106. Total: sum of squares 908.800, df 54." id="0" name="Picture 1"/>
+          <p:cNvPicPr>
+            <a:picLocks noGrp="1" noChangeAspect="1"/>
+          </p:cNvPicPr>
+          <p:nvPr/>
+        </p:nvPicPr>
+        <p:blipFill>
+          <a:blip r:embed="rId2"/>
+          <a:stretch>
+            <a:fillRect/>
+          </a:stretch>
+        </p:blipFill>
+        <p:spPr bwMode="auto">
+          <a:xfrm>
+            <a:off x="1892300" y="2628900"/>
+            <a:ext cx="8407400" cy="2590800"/>
+          </a:xfrm>
+          <a:prstGeom prst="rect">
+            <a:avLst/>
+          </a:prstGeom>
+          <a:noFill/>
+          <a:ln w="9525">
+            <a:noFill/>
+            <a:headEnd/>
+            <a:tailEnd/>
+          </a:ln>
+        </p:spPr>
+      </p:pic>
+      <p:sp>
+        <p:nvSpPr>
+          <p:cNvPr id="1" name="TextBox 3"/>
+          <p:cNvSpPr txBox="1"/>
           <p:nvPr>
             <p:ph idx="1"/>
           </p:nvPr>
-        </p:nvGraphicFramePr>
-        <p:xfrm>
-          <a:off x="1092200" y="2628900"/>
-          <a:ext cx="9994900" cy="3098800"/>
-        </p:xfrm>
-        <a:graphic>
-          <a:graphicData uri="http://schemas.openxmlformats.org/drawingml/2006/table">
-            <a:tbl>
-              <a:tblPr firstRow="1" bandRow="1">
-                <a:tableStyleId>{5C22544A-7EE6-4342-B048-85BDC9FD1C3A}</a:tableStyleId>
-              </a:tblPr>
-              <a:tblGrid>
-                <a:gridCol w="4991100"/>
-                <a:gridCol w="4991100"/>
-              </a:tblGrid>
-              <a:tr h="0">
-                <a:tc>
-                  <a:txBody>
-                    <a:bodyPr/>
-                    <a:lstStyle/>
-                    <a:p>
-                      <a:pPr lvl="0" indent="0" marL="0">
-                        <a:buNone/>
-                      </a:pPr>
-                      <a:r>
-                        <a:rPr/>
-                        <a:t>Predictor and outcome</a:t>
-                      </a:r>
-                    </a:p>
-                  </a:txBody>
-                  <a:tcPr/>
-                </a:tc>
-                <a:tc>
-                  <a:txBody>
-                    <a:bodyPr/>
-                    <a:lstStyle/>
-                    <a:p>
-                      <a:pPr lvl="0" indent="0" marL="0">
-                        <a:buNone/>
-                      </a:pPr>
-                      <a:r>
-                        <a:rPr/>
-                        <a:t>Use</a:t>
-                      </a:r>
-                    </a:p>
-                  </a:txBody>
-                  <a:tcPr/>
-                </a:tc>
-              </a:tr>
-              <a:tr h="0">
-                <a:tc>
-                  <a:txBody>
-                    <a:bodyPr/>
-                    <a:lstStyle/>
-                    <a:p>
-                      <a:pPr lvl="0" indent="0" marL="0">
-                        <a:buNone/>
-                      </a:pPr>
-                      <a:r>
-                        <a:rPr/>
-                        <a:t>3+ groups and a quantitative outcome</a:t>
-                      </a:r>
-                    </a:p>
-                  </a:txBody>
-                </a:tc>
-                <a:tc>
-                  <a:txBody>
-                    <a:bodyPr/>
-                    <a:lstStyle/>
-                    <a:p>
-                      <a:pPr lvl="0" indent="0" marL="0">
-                        <a:buNone/>
-                      </a:pPr>
-                      <a:r>
-                        <a:rPr/>
-                        <a:t>k-group ANOVA</a:t>
-                      </a:r>
-                    </a:p>
-                  </a:txBody>
-                </a:tc>
-              </a:tr>
-              <a:tr h="0">
-                <a:tc>
-                  <a:txBody>
-                    <a:bodyPr/>
-                    <a:lstStyle/>
-                    <a:p>
-                      <a:pPr lvl="0" indent="0" marL="0">
-                        <a:buNone/>
-                      </a:pPr>
-                      <a:r>
-                        <a:rPr/>
-                        <a:t>Two categorical variables, one with 3+ levels</a:t>
-                      </a:r>
-                    </a:p>
-                  </a:txBody>
-                </a:tc>
-                <a:tc>
-                  <a:txBody>
-                    <a:bodyPr/>
-                    <a:lstStyle/>
-                    <a:p>
-                      <a:pPr lvl="0" indent="0" marL="0">
-                        <a:buNone/>
-                      </a:pPr>
-                      <a:r>
-                        <a:rPr/>
-                        <a:t>k-group chi-square</a:t>
-                      </a:r>
-                    </a:p>
-                  </a:txBody>
-                </a:tc>
-              </a:tr>
-            </a:tbl>
-          </a:graphicData>
-        </a:graphic>
-      </p:graphicFrame>
+        </p:nvSpPr>
+        <p:spPr>
+          <a:xfrm>
+            <a:off x="1092200" y="5219700"/>
+            <a:ext cx="9994900" cy="508000"/>
+          </a:xfrm>
+          <a:prstGeom prst="rect">
+            <a:avLst/>
+          </a:prstGeom>
+          <a:noFill/>
+        </p:spPr>
+        <p:txBody>
+          <a:bodyPr/>
+          <a:lstStyle/>
+          <a:p>
+            <a:pPr lvl="0" indent="0" marL="0" algn="ctr">
+              <a:buNone/>
+            </a:pPr>
+            <a:r>
+              <a:rPr b="1"/>
+              <a:t>Identify </a:t>
+            </a:r>
+            <a:r>
+              <a:rPr b="1" i="1"/>
+              <a:t>F</a:t>
+            </a:r>
+            <a:r>
+              <a:rPr b="1"/>
+              <a:t>, both </a:t>
+            </a:r>
+            <a:r>
+              <a:rPr b="1" i="1"/>
+              <a:t>df</a:t>
+            </a:r>
+            <a:r>
+              <a:rPr b="1"/>
+              <a:t>, </a:t>
+            </a:r>
+            <a:r>
+              <a:rPr b="1" i="1"/>
+              <a:t>MSe</a:t>
+            </a:r>
+            <a:r>
+              <a:rPr b="1"/>
+              <a:t>, and </a:t>
+            </a:r>
+            <a:r>
+              <a:rPr b="1" i="1"/>
+              <a:t>p</a:t>
+            </a:r>
+          </a:p>
+        </p:txBody>
+      </p:sp>
     </p:spTree>
   </p:cSld>
 </p:sld>
@@ -7115,7 +6200,7 @@
             </a:pPr>
             <a:r>
               <a:rPr/>
-              <a:t>7 Select the jury walkthrough</a:t>
+              <a:t>6 Read the RH1 output (continued)</a:t>
             </a:r>
           </a:p>
         </p:txBody>
@@ -7135,18 +6220,12 @@
           <a:bodyPr/>
           <a:lstStyle/>
           <a:p>
-            <a:pPr lvl="0" indent="0">
+            <a:pPr lvl="0" indent="0" marL="0">
               <a:buNone/>
             </a:pPr>
             <a:r>
-              <a:rPr>
-                <a:latin typeface="Courier"/>
-              </a:rPr>
-              <a:t>USE ALL.
-COMPUTE filter_$ = (crime = 2).
-FILTER BY filter_$.
-EXECUTE.
-FREQUENCIES VARIABLES=attr years.</a:t>
+              <a:rPr/>
+              <a:t>What does the omnibus result tell you about the three means?</a:t>
             </a:r>
           </a:p>
         </p:txBody>
@@ -7198,7 +6277,7 @@
             </a:pPr>
             <a:r>
               <a:rPr/>
-              <a:t>8 Run the jury ANOVA</a:t>
+              <a:t>7 Compare the RH1 means</a:t>
             </a:r>
           </a:p>
         </p:txBody>
@@ -7218,18 +6297,42 @@
           <a:bodyPr/>
           <a:lstStyle/>
           <a:p>
-            <a:pPr lvl="0" indent="0">
+            <a:pPr lvl="0" indent="0" marL="0">
               <a:buNone/>
             </a:pPr>
             <a:r>
               <a:rPr>
-                <a:latin typeface="Courier"/>
+                <a:hlinkClick r:id="rId3"/>
               </a:rPr>
-              <a:t>UNIANOVA years BY attr
-  /METHOD=SSTYPE(3)
-  /POSTHOC=attr(LSD)
-  /PRINT=DESCRIPTIVE ETASQ
-  /CRITERIA=ALPHA(.05).</a:t>
+              <a:t>Computator workbook</a:t>
+            </a:r>
+          </a:p>
+          <a:p>
+            <a:pPr lvl="0"/>
+            <a:r>
+              <a:rPr/>
+              <a:t>Calculate the worksheet’s LSD minimum mean difference</a:t>
+            </a:r>
+          </a:p>
+          <a:p>
+            <a:pPr lvl="0"/>
+            <a:r>
+              <a:rPr/>
+              <a:t>Compare each pair’s mean difference with that cutoff</a:t>
+            </a:r>
+          </a:p>
+          <a:p>
+            <a:pPr lvl="0"/>
+            <a:r>
+              <a:rPr/>
+              <a:t>Complete the effect-size and decision-error columns</a:t>
+            </a:r>
+          </a:p>
+          <a:p>
+            <a:pPr lvl="0"/>
+            <a:r>
+              <a:rPr/>
+              <a:t>Use the differences and decisions to evaluate each prediction</a:t>
             </a:r>
           </a:p>
         </p:txBody>
